--- a/en/slides/02-Computer_Architecture-First_Contact_with_RISC-V_Assembly.pptx
+++ b/en/slides/02-Computer_Architecture-First_Contact_with_RISC-V_Assembly.pptx
@@ -123,26 +123,26 @@
   <p:extLst>
     <p:ext uri="{521415D9-36F7-43E2-AB2F-B90AF26B5E84}">
       <p14:sectionLst xmlns:p14="http://schemas.microsoft.com/office/powerpoint/2010/main">
-        <p14:section name="Opening" id="{eccb1362-45a9-521f-0d2e-1172029be547}">
+        <p14:section name="Opening" id="{d85a0ac3-dd62-341b-f5d8-e0c2b749966c}">
           <p14:sldIdLst>
             <p14:sldId id="256"/>
             <p14:sldId id="257"/>
           </p14:sldIdLst>
         </p14:section>
-        <p14:section name="The machine" id="{0bac181c-d8b2-0321-faa9-5d820d66d66a}">
+        <p14:section name="The machine" id="{32299ff8-09e1-b0e2-40b3-34a045bb3e3f}">
           <p14:sldIdLst>
             <p14:sldId id="258"/>
             <p14:sldId id="259"/>
             <p14:sldId id="260"/>
           </p14:sldIdLst>
         </p14:section>
-        <p14:section name="Your first cartridge" id="{c711a821-b124-36da-5e54-a9065e97c3e3}">
+        <p14:section name="Your first cartridge" id="{04450d97-cd70-0e70-10c1-657e88017a62}">
           <p14:sldIdLst>
             <p14:sldId id="261"/>
             <p14:sldId id="262"/>
           </p14:sldIdLst>
         </p14:section>
-        <p14:section name="Reading what you wrote" id="{12f4790a-1dea-3401-5c93-032b0179a8b3}">
+        <p14:section name="Reading what you wrote" id="{037085ab-647d-81a9-fd8a-0e038a83b20c}">
           <p14:sldIdLst>
             <p14:sldId id="263"/>
             <p14:sldId id="264"/>
@@ -151,7 +151,7 @@
             <p14:sldId id="267"/>
           </p14:sldIdLst>
         </p14:section>
-        <p14:section name="What comes next" id="{17c8ff9f-aa3e-31c7-2a3f-93e8cc61db0f}">
+        <p14:section name="What comes next" id="{875dc64a-d7d2-cdaa-4f39-492b827891a4}">
           <p14:sldIdLst>
             <p14:sldId id="268"/>
             <p14:sldId id="269"/>
@@ -2844,7 +2844,7 @@
                 <a:ea typeface="Cambria" pitchFamily="34" charset="-122"/>
                 <a:cs typeface="Cambria" pitchFamily="34" charset="-120"/>
               </a:rPr>
-              <a:t>First Contact: RISC-V Assembly on PRG32</a:t>
+              <a:t>First Contact: RISC‑V Assembly on PRG32</a:t>
             </a:r>
             <a:endParaRPr lang="en-US" sz="4800" dirty="0"/>
           </a:p>
@@ -3020,7 +3020,63 @@
       </p:sp>
       <p:sp>
         <p:nvSpPr>
-          <p:cNvPr id="12" name="Shape 10"/>
+          <p:cNvPr id="12" name="Text 10"/>
+          <p:cNvSpPr txBox="1"/>
+          <p:nvPr/>
+        </p:nvSpPr>
+        <p:spPr>
+          <a:xfrm>
+            <a:off x="4693615" y="566928"/>
+            <a:ext cx="6949440" cy="640080"/>
+          </a:xfrm>
+          <a:prstGeom prst="rect">
+            <a:avLst/>
+          </a:prstGeom>
+          <a:noFill/>
+          <a:ln/>
+        </p:spPr>
+        <p:txBody>
+          <a:bodyPr wrap="square" lIns="0" tIns="0" rIns="0" bIns="0" rtlCol="0" anchor="t"/>
+          <a:lstStyle/>
+          <a:p>
+            <a:pPr algn="r" indent="0" marL="0">
+              <a:buNone/>
+            </a:pPr>
+            <a:r>
+              <a:rPr lang="en-US" sz="1300" dirty="0">
+                <a:solidFill>
+                  <a:srgbClr val="CFE3EA"/>
+                </a:solidFill>
+                <a:latin typeface="Calibri" pitchFamily="34" charset="0"/>
+                <a:ea typeface="Calibri" pitchFamily="34" charset="-122"/>
+                <a:cs typeface="Calibri" pitchFamily="34" charset="-120"/>
+              </a:rPr>
+              <a:t>Lecture deck. The listings, the complete program and how to test it are in the code deck:</a:t>
+            </a:r>
+            <a:endParaRPr lang="en-US" sz="1300" dirty="0"/>
+          </a:p>
+          <a:p>
+            <a:pPr algn="r" indent="0" marL="0">
+              <a:buNone/>
+            </a:pPr>
+            <a:r>
+              <a:rPr lang="en-US" sz="1300" dirty="0">
+                <a:solidFill>
+                  <a:srgbClr val="CFE3EA"/>
+                </a:solidFill>
+                <a:latin typeface="Calibri" pitchFamily="34" charset="0"/>
+                <a:ea typeface="Calibri" pitchFamily="34" charset="-122"/>
+                <a:cs typeface="Calibri" pitchFamily="34" charset="-120"/>
+              </a:rPr>
+              <a:t>02-Computer_Architecture-First_Contact_with_RISC-V_Assembly-Code.pptx</a:t>
+            </a:r>
+            <a:endParaRPr lang="en-US" sz="1300" dirty="0"/>
+          </a:p>
+        </p:txBody>
+      </p:sp>
+      <p:sp>
+        <p:nvSpPr>
+          <p:cNvPr id="13" name="Shape 11"/>
           <p:cNvSpPr/>
           <p:nvPr/>
         </p:nvSpPr>
@@ -3047,7 +3103,7 @@
       </p:sp>
       <p:pic>
         <p:nvPicPr>
-          <p:cNvPr id="13" name="Image 0" descr="/Users/raffaelemontella/devel/riscv-prg32/computer-architecture-with-prg32/tools/assets/lab1_step4_bar.png">    </p:cNvPr>
+          <p:cNvPr id="14" name="Image 0" descr="/Users/raffaelemontella/devel/riscv-prg32/computer-architecture-with-prg32/tools/assets/lab1_step4_bar.png">    </p:cNvPr>
           <p:cNvPicPr>
             <a:picLocks noChangeAspect="1"/>
           </p:cNvPicPr>

--- a/en/slides/02-Computer_Architecture-First_Contact_with_RISC-V_Assembly.pptx
+++ b/en/slides/02-Computer_Architecture-First_Contact_with_RISC-V_Assembly.pptx
@@ -123,26 +123,26 @@
   <p:extLst>
     <p:ext uri="{521415D9-36F7-43E2-AB2F-B90AF26B5E84}">
       <p14:sectionLst xmlns:p14="http://schemas.microsoft.com/office/powerpoint/2010/main">
-        <p14:section name="Opening" id="{d85a0ac3-dd62-341b-f5d8-e0c2b749966c}">
+        <p14:section name="Opening" id="{9294287b-2c89-3184-0768-aa35baa74bed}">
           <p14:sldIdLst>
             <p14:sldId id="256"/>
             <p14:sldId id="257"/>
           </p14:sldIdLst>
         </p14:section>
-        <p14:section name="The machine" id="{32299ff8-09e1-b0e2-40b3-34a045bb3e3f}">
+        <p14:section name="The machine" id="{b8d38fc7-c8f3-0225-5962-75aaf7131914}">
           <p14:sldIdLst>
             <p14:sldId id="258"/>
             <p14:sldId id="259"/>
             <p14:sldId id="260"/>
           </p14:sldIdLst>
         </p14:section>
-        <p14:section name="Your first cartridge" id="{04450d97-cd70-0e70-10c1-657e88017a62}">
+        <p14:section name="Your first cartridge" id="{7c8ba8b8-44ed-1083-1c93-7286f65752de}">
           <p14:sldIdLst>
             <p14:sldId id="261"/>
             <p14:sldId id="262"/>
           </p14:sldIdLst>
         </p14:section>
-        <p14:section name="Reading what you wrote" id="{037085ab-647d-81a9-fd8a-0e038a83b20c}">
+        <p14:section name="Reading what you wrote" id="{ac0f44cc-3462-8508-f3f7-2aae209b440f}">
           <p14:sldIdLst>
             <p14:sldId id="263"/>
             <p14:sldId id="264"/>
@@ -151,7 +151,7 @@
             <p14:sldId id="267"/>
           </p14:sldIdLst>
         </p14:section>
-        <p14:section name="What comes next" id="{875dc64a-d7d2-cdaa-4f39-492b827891a4}">
+        <p14:section name="What comes next" id="{294f027b-8176-402c-d707-593113daa329}">
           <p14:sldIdLst>
             <p14:sldId id="268"/>
             <p14:sldId id="269"/>
@@ -565,6 +565,8 @@
             <a:r>
               <a:rPr lang="en-US" dirty="0"/>
               <a:t>This is the first lecture in which you write a program, and it comes before any theory on purpose. In two hours you build four small cartridges, each a complete program that runs. You will not understand every detail today, and you are not expected to: the aim is to see registers, memory and a function call at work, so that the lectures that follow have something concrete to explain. The quotation sets the tone: less talk, more code.
+Learning status: UNDERSTAND NOW, by the end of this lecture you explain it, trace it and apply it on your own; USE NOW, you follow and use the recipe today; how it works inside is explained later, or is not part of the course; UNDERSTAND LATER, recognise the name and what it is for; a later lecture explains it. A slide without a badge is context: a story, an example, a question, an exercise.
+Learning status of this lecture. UNDERSTAND NOW: registers, compute, move, jump; registers; the init, update, draw contract; arguments in a0 to a7; why ra is saved; address, value, load, store; the base instructions; pseudo-instructions; an instruction is a number; tracing by hand. USE NOW: the calling convention (Lecture 18); bit masks (Lecture 08) and, used without being studied in this course, the assembler directives, the PRG32 tools, the PRG32 runtime calls, the PRG32-QT debugger, the complete program. UNDERSTAND LATER: the stack (Lecture 18); addressing modes (Lecture 19); instruction formats (Lecture 19); hexadecimal (Lecture 04); two's complement (Lecture 05); fixed point (Lecture 06); Boolean algebra (Lecture 08); the adder (Lecture 09); from volts to bits (Lecture 10); latches and flip-flops (Lecture 13); the processor cycle (Lecture 19); the Verm1 project (Lecture 07). A slide without a badge is context: a story, an example, a question, an exercise.
 For the lecturer: New lecture for 2026/27. It is the 'play' turn of the spiral for the whole first half of the course: every later lecture points back to something typed here. The four steps are the verified steps of the textbook lab 05-asm-first-contact; run them live (labs/run.sh 05-asm-first-contact/stepN_....S first).</a:t>
             </a:r>
             <a:endParaRPr lang="en-US" dirty="0"/>
@@ -654,6 +656,7 @@
             <a:r>
               <a:rPr lang="en-US" dirty="0"/>
               <a:t>An instruction is a number. addi t1, t1, 1 is the 32-bit word 0x00130313, and the coloured strip shows its fields: twelve bits for the constant 1, five for the source register (t1 is register number 6), three that say "add", five for the destination, seven for the kind of instruction. You do not need to learn the format now. Keep the idea: assembly is a readable spelling of machine code, and the processor reads these fields with circuits that you will learn to design.
+UNDERSTAND NOW: an instruction is a number. UNDERSTAND LATER: instruction formats (studied in Lecture 19).
 For the lecturer: Check: 0000 0000 0001 | 00110 | 000 | 00110 | 0010011 = 0000 0000 0001 0011 0000 0011 0001 0011 = 0x00130313. Do not explain the formats now; the point is only that an instruction is data. Lecture 04 (digital information) and the lectures on the processor come back to this slide.</a:t>
             </a:r>
             <a:endParaRPr lang="en-US" dirty="0"/>
@@ -743,6 +746,7 @@
             <a:r>
               <a:rPr lang="en-US" dirty="0"/>
               <a:t>PRG32-QT runs the same cartridge on your laptop and can stop between any two instructions, showing every register. Use it now on the third step: go to update, pause, and execute the four instructions of first_update one at a time, watching t0 and t1. Before each press, say aloud what will change. The last line is a rule to remember: the board tells the truth about time, PRG32-QT tells the truth about a register.
+USE NOW: the PRG32-QT debugger (used, not studied, in this course).
 For the lecturer: Demonstrate live: load step 3, break at first_update, single-step four times. Ask the students to predict each register before pressing the key.</a:t>
             </a:r>
             <a:endParaRPr lang="en-US" dirty="0"/>
@@ -832,6 +836,7 @@
             <a:r>
               <a:rPr lang="en-US" dirty="0"/>
               <a:t>A trace by hand: for each frame, write what each instruction leaves in t1 and in memory. In the first frames nothing surprising happens. Look at the highlighted row: at frame 256 the counter becomes 256, yet the width of the bar is 0, because andi with 255 keeps only the low eight bits, and 256 in binary is a one followed by eight zeros. Tracing by hand is slow and unglamorous, and it is the most useful debugging skill you will learn in this course.
+UNDERSTAND NOW: tracing by hand.
 For the lecturer: The by-hand trace is the most valuable debugging skill of the course. 256 = 1 0000 0000 in binary: the low eight bits are all zero, so the bar restarts.</a:t>
             </a:r>
             <a:endParaRPr lang="en-US" dirty="0"/>
@@ -921,6 +926,7 @@
             <a:r>
               <a:rPr lang="en-US" dirty="0"/>
               <a:t>Each row is something you saw today, the question it raises and where the answer is. Why hexadecimal? Lectures 04 and 05. How does a register hold a negative number? Lecture 05. What does AND do to thirty-two bits at once? Lectures 08 and 09. How does a circuit remember a bit? Lectures 13 and 15. How is 0x00130313 decoded and executed? Lectures 18 and 19. The last row is the project: from three functions and a rectangle, a whole game. Keep this table: it is the map of the course seen from your own program.
+UNDERSTAND LATER: hexadecimal (studied in Lecture 04); two's complement (studied in Lecture 05); fixed point (studied in Lecture 06); Boolean algebra (studied in Lecture 08); the adder (studied in Lecture 09); from volts to bits (studied in Lecture 10); latches and flip-flops (studied in Lecture 13); the processor cycle (studied in Lecture 19); the Verm1 project (studied in Lecture 07).
 For the lecturer: This is the forward map of the course. Keep a copy: each later deck opens by pointing at one of these rows. The last row is the project: Verm1 starts in Lecture 07 from exactly the skeleton of today.</a:t>
             </a:r>
             <a:endParaRPr lang="en-US" dirty="0"/>
@@ -1279,6 +1285,7 @@
             <a:r>
               <a:rPr lang="en-US" dirty="0"/>
               <a:t>Four sentences contain the lecture. A RISC-V processor is thirty-two registers and a small set of instructions that compute, move and jump. A PRG32 game is three functions, with arguments in a0 to a7, and a function that calls another saves ra. Variables live in memory: la for the address, lw and sw for the value. An instruction is a 32-bit number, and assembly is its readable spelling. The next lecture steps back and tells the history that led to this machine.
+Learning status, recap. UNDERSTAND NOW: registers, compute, move, jump; registers; the init, update, draw contract; arguments in a0 to a7; why ra is saved; address, value, load, store; the base instructions; pseudo-instructions; an instruction is a number; tracing by hand. USE NOW: the calling convention (Lecture 18); bit masks (Lecture 08) and, used without being studied in this course, the assembler directives, the PRG32 tools, the PRG32 runtime calls, the PRG32-QT debugger, the complete program. UNDERSTAND LATER: the stack (Lecture 18); addressing modes (Lecture 19); instruction formats (Lecture 19); hexadecimal (Lecture 04); two's complement (Lecture 05); fixed point (Lecture 06); Boolean algebra (Lecture 08); the adder (Lecture 09); from volts to bits (Lecture 10); latches and flip-flops (Lecture 13); the processor cycle (Lecture 19); the Verm1 project (Lecture 07). A slide without a badge is context: a story, an example, a question, an exercise.
 For the lecturer: Next lecture: the history that led to this machine.</a:t>
             </a:r>
             <a:endParaRPr lang="en-US" dirty="0"/>
@@ -1457,6 +1464,7 @@
             <a:r>
               <a:rPr lang="en-US" dirty="0"/>
               <a:t>The whole machine in four cards. There are 32 registers, each holding one 32-bit value, and the processor can compute only on what is in them. There are three kinds of instruction. Compute: arithmetic and logic between registers, such as add or addi. Move: transfers between a register and memory, lw to load a word and sw to store one; nothing else touches memory. Jump: changes of the instruction that runs next. Everything a computer does is a long sequence of these three kinds.
+UNDERSTAND NOW: registers, compute, move, jump.
 For the lecturer: That is very nearly the whole machine. The richness of computing comes not from a large instruction set but from combining a small one in long sequences.</a:t>
             </a:r>
             <a:endParaRPr lang="en-US" dirty="0"/>
@@ -1546,6 +1554,7 @@
             <a:r>
               <a:rPr lang="en-US" dirty="0"/>
               <a:t>The registers have names that say how they are used. a0 to a7 carry the arguments of a call, and a0 carries the result back. t0 to t6 are temporaries, free to use and not preserved by a call. s0 to s11 are preserved. ra holds the return address, sp the top of the stack, and zero always reads as 0. Read the caption carefully: these roles are not built into the hardware. They are an agreement, the calling convention, and it is what lets your assembly and the C code of the framework call each other.
+UNDERSTAND NOW: registers. USE NOW: the calling convention (studied in Lecture 18).
 For the lecturer: The roles are fixed not by the hardware but by an agreement: the calling convention, or ABI. Following it is what lets your assembly and the framework's C code call each other.</a:t>
             </a:r>
             <a:endParaRPr lang="en-US" dirty="0"/>
@@ -1634,7 +1643,8 @@
           <a:p>
             <a:r>
               <a:rPr lang="en-US" dirty="0"/>
-              <a:t>The contract with PRG32 is three functions that you write. init is called once, when the cartridge starts, to set up the state. update is called once per frame, to read the input and change the state. draw is called once per frame, to turn the state into a picture. The firmware finds them by name: a prefix chosen by you, followed by _init, _update and _draw. Keep the division of labour in mind from the first day: update decides, draw shows.</a:t>
+              <a:t>The contract with PRG32 is three functions that you write. init is called once, when the cartridge starts, to set up the state. update is called once per frame, to read the input and change the state. draw is called once per frame, to turn the state into a picture. The firmware finds them by name: a prefix chosen by you, followed by _init, _update and _draw. Keep the division of labour in mind from the first day: update decides, draw shows.
+UNDERSTAND NOW: the init, update, draw contract.</a:t>
             </a:r>
             <a:endParaRPr lang="en-US" dirty="0"/>
           </a:p>
@@ -1723,6 +1733,7 @@
             <a:r>
               <a:rPr lang="en-US" dirty="0"/>
               <a:t>Why save ra? The instruction call writes into ra the address to return to. But the function you call may make calls of its own, and each of them overwrites ra. So a function that calls another must first save its own ra in memory: it lowers sp by 16 to make room, the stack frame, and stores ra at 12(sp). After the call it does the reverse. The drawing shows the frame: the stack grows towards lower addresses. Forgetting this pair of operations is the classic first bug: the function returns to the wrong place.
+UNDERSTAND NOW: why ra is saved. UNDERSTAND LATER: the stack (studied in Lecture 18).
 For the lecturer: The convention requires sp to stay 16-byte aligned across calls, which is why the frame is 16 bytes even though only 4 are used. The stack is treated formally in the lectures on memory and on subroutines.</a:t>
             </a:r>
             <a:endParaRPr lang="en-US" dirty="0"/>
@@ -1812,6 +1823,7 @@
             <a:r>
               <a:rPr lang="en-US" dirty="0"/>
               <a:t>This slide separates two ideas that beginners confuse: the address and the value. After la, t0 contains where the counter lives. After lw, t1 contains what is stored there, 41 in the drawing. addi changes the copy in the register to 42, and memory still says 41 until sw writes it back. Follow the two arrows. A practical habit from the box on the right: in your comments, write for every register whether it holds an ADDRESS or a VALUE. It prevents the most common error of the first month.
+UNDERSTAND NOW: address, value, load, store. UNDERSTAND LATER: addressing modes (studied in Lecture 19).
 For the lecturer: A label names a location. la gives the location, lw gives the contents. This is how every variable in every program ultimately works; we return to it formally with addressing modes.</a:t>
             </a:r>
             <a:endParaRPr lang="en-US" dirty="0"/>
@@ -1901,6 +1913,7 @@
             <a:r>
               <a:rPr lang="en-US" dirty="0"/>
               <a:t>Five families cover everything you have typed: arithmetic (add, sub), logic (and, or, xor), the immediate forms that take a small constant (addi, andi), memory (lw, sw) and control (call, ret). In every instruction the result goes in the first register named: add t0, t1, t2 puts t1 + t2 in t0. The base instruction set has about forty instructions, and you have already met a quarter of them.
+UNDERSTAND NOW: the base instructions.
 For the lecturer: The result goes in the first register. The base RISC-V integer instruction set (RV32I) has about forty instructions; you have already met a quarter of them.</a:t>
             </a:r>
             <a:endParaRPr lang="en-US" dirty="0"/>
@@ -1990,6 +2003,7 @@
             <a:r>
               <a:rPr lang="en-US" dirty="0"/>
               <a:t>Some of the instructions you wrote do not exist in the processor: they are pseudo-instructions, shortcuts that the assembler expands. li t0, 42 becomes addi t0, zero, 42; mv is an addi with 0; ret is a jump to the address in ra; beqz is a comparison with the register zero. Notice how often zero appears in the middle column: a register that is always 0 lets a small instruction set do the work of a larger one.
+UNDERSTAND NOW: pseudo-instructions.
 For the lecturer: A pseudo-instruction is not a separate hardware operation. The register zero is what makes many of them possible: a small instruction set, reused with care.</a:t>
             </a:r>
             <a:endParaRPr lang="en-US" dirty="0"/>
@@ -3127,6 +3141,420 @@
       </p:pic>
       <p:sp>
         <p:nvSpPr>
+          <p:cNvPr id="15" name="Shape 12"/>
+          <p:cNvSpPr/>
+          <p:nvPr/>
+        </p:nvSpPr>
+        <p:spPr>
+          <a:xfrm>
+            <a:off x="9690303" y="91440"/>
+            <a:ext cx="1952752" cy="274320"/>
+          </a:xfrm>
+          <a:prstGeom prst="rect">
+            <a:avLst/>
+          </a:prstGeom>
+          <a:solidFill>
+            <a:srgbClr val="F3E8FF"/>
+          </a:solidFill>
+          <a:ln w="12700">
+            <a:solidFill>
+              <a:srgbClr val="7E22CE"/>
+            </a:solidFill>
+            <a:prstDash val="dash"/>
+          </a:ln>
+        </p:spPr>
+      </p:sp>
+      <p:sp>
+        <p:nvSpPr>
+          <p:cNvPr id="16" name="Shape 13"/>
+          <p:cNvSpPr/>
+          <p:nvPr/>
+        </p:nvSpPr>
+        <p:spPr>
+          <a:xfrm>
+            <a:off x="9717735" y="128016"/>
+            <a:ext cx="45720" cy="45720"/>
+          </a:xfrm>
+          <a:prstGeom prst="rect">
+            <a:avLst/>
+          </a:prstGeom>
+          <a:solidFill>
+            <a:srgbClr val="7E22CE"/>
+          </a:solidFill>
+          <a:ln w="12700">
+            <a:solidFill>
+              <a:srgbClr val="7E22CE"/>
+            </a:solidFill>
+            <a:prstDash val="solid"/>
+          </a:ln>
+        </p:spPr>
+      </p:sp>
+      <p:sp>
+        <p:nvSpPr>
+          <p:cNvPr id="17" name="Shape 14"/>
+          <p:cNvSpPr/>
+          <p:nvPr/>
+        </p:nvSpPr>
+        <p:spPr>
+          <a:xfrm>
+            <a:off x="9717735" y="205740"/>
+            <a:ext cx="45720" cy="45720"/>
+          </a:xfrm>
+          <a:prstGeom prst="rect">
+            <a:avLst/>
+          </a:prstGeom>
+          <a:solidFill>
+            <a:srgbClr val="7E22CE"/>
+          </a:solidFill>
+          <a:ln w="12700">
+            <a:solidFill>
+              <a:srgbClr val="7E22CE"/>
+            </a:solidFill>
+            <a:prstDash val="solid"/>
+          </a:ln>
+        </p:spPr>
+      </p:sp>
+      <p:sp>
+        <p:nvSpPr>
+          <p:cNvPr id="18" name="Shape 15"/>
+          <p:cNvSpPr/>
+          <p:nvPr/>
+        </p:nvSpPr>
+        <p:spPr>
+          <a:xfrm>
+            <a:off x="9717735" y="283464"/>
+            <a:ext cx="45720" cy="45720"/>
+          </a:xfrm>
+          <a:prstGeom prst="rect">
+            <a:avLst/>
+          </a:prstGeom>
+          <a:solidFill>
+            <a:srgbClr val="7E22CE"/>
+          </a:solidFill>
+          <a:ln w="12700">
+            <a:solidFill>
+              <a:srgbClr val="7E22CE"/>
+            </a:solidFill>
+            <a:prstDash val="solid"/>
+          </a:ln>
+        </p:spPr>
+      </p:sp>
+      <p:pic>
+        <p:nvPicPr>
+          <p:cNvPr id="19" name="Image 1" descr="preencoded.png">    </p:cNvPr>
+          <p:cNvPicPr>
+            <a:picLocks noChangeAspect="1"/>
+          </p:cNvPicPr>
+          <p:nvPr/>
+        </p:nvPicPr>
+        <p:blipFill>
+          <a:blip r:embed="rId2"/>
+          <a:stretch>
+            <a:fillRect/>
+          </a:stretch>
+        </p:blipFill>
+        <p:spPr>
+          <a:xfrm>
+            <a:off x="9818319" y="128016"/>
+            <a:ext cx="201168" cy="201168"/>
+          </a:xfrm>
+          <a:prstGeom prst="rect">
+            <a:avLst/>
+          </a:prstGeom>
+        </p:spPr>
+      </p:pic>
+      <p:sp>
+        <p:nvSpPr>
+          <p:cNvPr id="20" name="Text 16"/>
+          <p:cNvSpPr txBox="1"/>
+          <p:nvPr/>
+        </p:nvSpPr>
+        <p:spPr>
+          <a:xfrm>
+            <a:off x="10074351" y="91440"/>
+            <a:ext cx="1532128" cy="274320"/>
+          </a:xfrm>
+          <a:prstGeom prst="rect">
+            <a:avLst/>
+          </a:prstGeom>
+          <a:noFill/>
+          <a:ln/>
+        </p:spPr>
+        <p:txBody>
+          <a:bodyPr wrap="square" lIns="0" tIns="0" rIns="0" bIns="0" rtlCol="0" anchor="ctr"/>
+          <a:lstStyle/>
+          <a:p>
+            <a:pPr indent="0" marL="0">
+              <a:buNone/>
+            </a:pPr>
+            <a:r>
+              <a:rPr lang="en-US" sz="1100" b="1" dirty="0">
+                <a:solidFill>
+                  <a:srgbClr val="6B21A8"/>
+                </a:solidFill>
+                <a:latin typeface="Calibri" pitchFamily="34" charset="0"/>
+                <a:ea typeface="Calibri" pitchFamily="34" charset="-122"/>
+                <a:cs typeface="Calibri" pitchFamily="34" charset="-120"/>
+              </a:rPr>
+              <a:t>UNDERSTAND LATER</a:t>
+            </a:r>
+            <a:endParaRPr lang="en-US" sz="1100" dirty="0"/>
+          </a:p>
+        </p:txBody>
+      </p:sp>
+      <p:sp>
+        <p:nvSpPr>
+          <p:cNvPr id="21" name="Shape 17"/>
+          <p:cNvSpPr/>
+          <p:nvPr/>
+        </p:nvSpPr>
+        <p:spPr>
+          <a:xfrm>
+            <a:off x="8407349" y="91440"/>
+            <a:ext cx="1173226" cy="274320"/>
+          </a:xfrm>
+          <a:prstGeom prst="rect">
+            <a:avLst/>
+          </a:prstGeom>
+          <a:solidFill>
+            <a:srgbClr val="FEF3C7"/>
+          </a:solidFill>
+          <a:ln w="12700">
+            <a:solidFill>
+              <a:srgbClr val="B45309"/>
+            </a:solidFill>
+            <a:prstDash val="solid"/>
+          </a:ln>
+        </p:spPr>
+      </p:sp>
+      <p:sp>
+        <p:nvSpPr>
+          <p:cNvPr id="22" name="Shape 18"/>
+          <p:cNvSpPr/>
+          <p:nvPr/>
+        </p:nvSpPr>
+        <p:spPr>
+          <a:xfrm>
+            <a:off x="8407349" y="91440"/>
+            <a:ext cx="27432" cy="274320"/>
+          </a:xfrm>
+          <a:prstGeom prst="rect">
+            <a:avLst/>
+          </a:prstGeom>
+          <a:solidFill>
+            <a:srgbClr val="B45309"/>
+          </a:solidFill>
+          <a:ln w="12700">
+            <a:solidFill>
+              <a:srgbClr val="B45309"/>
+            </a:solidFill>
+            <a:prstDash val="solid"/>
+          </a:ln>
+        </p:spPr>
+      </p:sp>
+      <p:sp>
+        <p:nvSpPr>
+          <p:cNvPr id="23" name="Shape 19"/>
+          <p:cNvSpPr/>
+          <p:nvPr/>
+        </p:nvSpPr>
+        <p:spPr>
+          <a:xfrm>
+            <a:off x="8462213" y="91440"/>
+            <a:ext cx="27432" cy="274320"/>
+          </a:xfrm>
+          <a:prstGeom prst="rect">
+            <a:avLst/>
+          </a:prstGeom>
+          <a:solidFill>
+            <a:srgbClr val="B45309"/>
+          </a:solidFill>
+          <a:ln w="12700">
+            <a:solidFill>
+              <a:srgbClr val="B45309"/>
+            </a:solidFill>
+            <a:prstDash val="solid"/>
+          </a:ln>
+        </p:spPr>
+      </p:sp>
+      <p:pic>
+        <p:nvPicPr>
+          <p:cNvPr id="24" name="Image 2" descr="preencoded.png">    </p:cNvPr>
+          <p:cNvPicPr>
+            <a:picLocks noChangeAspect="1"/>
+          </p:cNvPicPr>
+          <p:nvPr/>
+        </p:nvPicPr>
+        <p:blipFill>
+          <a:blip r:embed="rId3"/>
+          <a:stretch>
+            <a:fillRect/>
+          </a:stretch>
+        </p:blipFill>
+        <p:spPr>
+          <a:xfrm>
+            <a:off x="8535365" y="128016"/>
+            <a:ext cx="201168" cy="201168"/>
+          </a:xfrm>
+          <a:prstGeom prst="rect">
+            <a:avLst/>
+          </a:prstGeom>
+        </p:spPr>
+      </p:pic>
+      <p:sp>
+        <p:nvSpPr>
+          <p:cNvPr id="25" name="Text 20"/>
+          <p:cNvSpPr txBox="1"/>
+          <p:nvPr/>
+        </p:nvSpPr>
+        <p:spPr>
+          <a:xfrm>
+            <a:off x="8791397" y="91440"/>
+            <a:ext cx="752602" cy="274320"/>
+          </a:xfrm>
+          <a:prstGeom prst="rect">
+            <a:avLst/>
+          </a:prstGeom>
+          <a:noFill/>
+          <a:ln/>
+        </p:spPr>
+        <p:txBody>
+          <a:bodyPr wrap="square" lIns="0" tIns="0" rIns="0" bIns="0" rtlCol="0" anchor="ctr"/>
+          <a:lstStyle/>
+          <a:p>
+            <a:pPr indent="0" marL="0">
+              <a:buNone/>
+            </a:pPr>
+            <a:r>
+              <a:rPr lang="en-US" sz="1100" b="1" dirty="0">
+                <a:solidFill>
+                  <a:srgbClr val="92400E"/>
+                </a:solidFill>
+                <a:latin typeface="Calibri" pitchFamily="34" charset="0"/>
+                <a:ea typeface="Calibri" pitchFamily="34" charset="-122"/>
+                <a:cs typeface="Calibri" pitchFamily="34" charset="-120"/>
+              </a:rPr>
+              <a:t>USE NOW</a:t>
+            </a:r>
+            <a:endParaRPr lang="en-US" sz="1100" dirty="0"/>
+          </a:p>
+        </p:txBody>
+      </p:sp>
+      <p:sp>
+        <p:nvSpPr>
+          <p:cNvPr id="26" name="Shape 21"/>
+          <p:cNvSpPr/>
+          <p:nvPr/>
+        </p:nvSpPr>
+        <p:spPr>
+          <a:xfrm>
+            <a:off x="6518097" y="91440"/>
+            <a:ext cx="1779524" cy="274320"/>
+          </a:xfrm>
+          <a:prstGeom prst="rect">
+            <a:avLst/>
+          </a:prstGeom>
+          <a:solidFill>
+            <a:srgbClr val="E0F2FE"/>
+          </a:solidFill>
+          <a:ln w="12700">
+            <a:solidFill>
+              <a:srgbClr val="0369A1"/>
+            </a:solidFill>
+            <a:prstDash val="solid"/>
+          </a:ln>
+        </p:spPr>
+      </p:sp>
+      <p:sp>
+        <p:nvSpPr>
+          <p:cNvPr id="27" name="Shape 22"/>
+          <p:cNvSpPr/>
+          <p:nvPr/>
+        </p:nvSpPr>
+        <p:spPr>
+          <a:xfrm>
+            <a:off x="6518097" y="91440"/>
+            <a:ext cx="73152" cy="274320"/>
+          </a:xfrm>
+          <a:prstGeom prst="rect">
+            <a:avLst/>
+          </a:prstGeom>
+          <a:solidFill>
+            <a:srgbClr val="0369A1"/>
+          </a:solidFill>
+          <a:ln w="12700">
+            <a:solidFill>
+              <a:srgbClr val="0369A1"/>
+            </a:solidFill>
+            <a:prstDash val="solid"/>
+          </a:ln>
+        </p:spPr>
+      </p:sp>
+      <p:pic>
+        <p:nvPicPr>
+          <p:cNvPr id="28" name="Image 3" descr="preencoded.png">    </p:cNvPr>
+          <p:cNvPicPr>
+            <a:picLocks noChangeAspect="1"/>
+          </p:cNvPicPr>
+          <p:nvPr/>
+        </p:nvPicPr>
+        <p:blipFill>
+          <a:blip r:embed="rId4"/>
+          <a:stretch>
+            <a:fillRect/>
+          </a:stretch>
+        </p:blipFill>
+        <p:spPr>
+          <a:xfrm>
+            <a:off x="6646113" y="128016"/>
+            <a:ext cx="201168" cy="201168"/>
+          </a:xfrm>
+          <a:prstGeom prst="rect">
+            <a:avLst/>
+          </a:prstGeom>
+        </p:spPr>
+      </p:pic>
+      <p:sp>
+        <p:nvSpPr>
+          <p:cNvPr id="29" name="Text 23"/>
+          <p:cNvSpPr txBox="1"/>
+          <p:nvPr/>
+        </p:nvSpPr>
+        <p:spPr>
+          <a:xfrm>
+            <a:off x="6902145" y="91440"/>
+            <a:ext cx="1358900" cy="274320"/>
+          </a:xfrm>
+          <a:prstGeom prst="rect">
+            <a:avLst/>
+          </a:prstGeom>
+          <a:noFill/>
+          <a:ln/>
+        </p:spPr>
+        <p:txBody>
+          <a:bodyPr wrap="square" lIns="0" tIns="0" rIns="0" bIns="0" rtlCol="0" anchor="ctr"/>
+          <a:lstStyle/>
+          <a:p>
+            <a:pPr indent="0" marL="0">
+              <a:buNone/>
+            </a:pPr>
+            <a:r>
+              <a:rPr lang="en-US" sz="1100" b="1" dirty="0">
+                <a:solidFill>
+                  <a:srgbClr val="075985"/>
+                </a:solidFill>
+                <a:latin typeface="Calibri" pitchFamily="34" charset="0"/>
+                <a:ea typeface="Calibri" pitchFamily="34" charset="-122"/>
+                <a:cs typeface="Calibri" pitchFamily="34" charset="-120"/>
+              </a:rPr>
+              <a:t>UNDERSTAND NOW</a:t>
+            </a:r>
+            <a:endParaRPr lang="en-US" sz="1100" dirty="0"/>
+          </a:p>
+        </p:txBody>
+      </p:sp>
+      <p:sp>
+        <p:nvSpPr>
           <p:cNvPr id="25" name="Slide Number Placeholder 0"/>
           <p:cNvSpPr>
             <a:spLocks noGrp="1"/>
@@ -4280,6 +4708,324 @@
       </p:sp>
       <p:sp>
         <p:nvSpPr>
+          <p:cNvPr id="27" name="Shape 25"/>
+          <p:cNvSpPr/>
+          <p:nvPr/>
+        </p:nvSpPr>
+        <p:spPr>
+          <a:xfrm>
+            <a:off x="7283272" y="91440"/>
+            <a:ext cx="4359783" cy="274320"/>
+          </a:xfrm>
+          <a:prstGeom prst="rect">
+            <a:avLst/>
+          </a:prstGeom>
+          <a:solidFill>
+            <a:srgbClr val="F3E8FF"/>
+          </a:solidFill>
+          <a:ln w="12700">
+            <a:solidFill>
+              <a:srgbClr val="7E22CE"/>
+            </a:solidFill>
+            <a:prstDash val="dash"/>
+          </a:ln>
+        </p:spPr>
+      </p:sp>
+      <p:sp>
+        <p:nvSpPr>
+          <p:cNvPr id="28" name="Shape 26"/>
+          <p:cNvSpPr/>
+          <p:nvPr/>
+        </p:nvSpPr>
+        <p:spPr>
+          <a:xfrm>
+            <a:off x="7310704" y="128016"/>
+            <a:ext cx="45720" cy="45720"/>
+          </a:xfrm>
+          <a:prstGeom prst="rect">
+            <a:avLst/>
+          </a:prstGeom>
+          <a:solidFill>
+            <a:srgbClr val="7E22CE"/>
+          </a:solidFill>
+          <a:ln w="12700">
+            <a:solidFill>
+              <a:srgbClr val="7E22CE"/>
+            </a:solidFill>
+            <a:prstDash val="solid"/>
+          </a:ln>
+        </p:spPr>
+      </p:sp>
+      <p:sp>
+        <p:nvSpPr>
+          <p:cNvPr id="29" name="Shape 27"/>
+          <p:cNvSpPr/>
+          <p:nvPr/>
+        </p:nvSpPr>
+        <p:spPr>
+          <a:xfrm>
+            <a:off x="7310704" y="205740"/>
+            <a:ext cx="45720" cy="45720"/>
+          </a:xfrm>
+          <a:prstGeom prst="rect">
+            <a:avLst/>
+          </a:prstGeom>
+          <a:solidFill>
+            <a:srgbClr val="7E22CE"/>
+          </a:solidFill>
+          <a:ln w="12700">
+            <a:solidFill>
+              <a:srgbClr val="7E22CE"/>
+            </a:solidFill>
+            <a:prstDash val="solid"/>
+          </a:ln>
+        </p:spPr>
+      </p:sp>
+      <p:sp>
+        <p:nvSpPr>
+          <p:cNvPr id="30" name="Shape 28"/>
+          <p:cNvSpPr/>
+          <p:nvPr/>
+        </p:nvSpPr>
+        <p:spPr>
+          <a:xfrm>
+            <a:off x="7310704" y="283464"/>
+            <a:ext cx="45720" cy="45720"/>
+          </a:xfrm>
+          <a:prstGeom prst="rect">
+            <a:avLst/>
+          </a:prstGeom>
+          <a:solidFill>
+            <a:srgbClr val="7E22CE"/>
+          </a:solidFill>
+          <a:ln w="12700">
+            <a:solidFill>
+              <a:srgbClr val="7E22CE"/>
+            </a:solidFill>
+            <a:prstDash val="solid"/>
+          </a:ln>
+        </p:spPr>
+      </p:sp>
+      <p:pic>
+        <p:nvPicPr>
+          <p:cNvPr id="31" name="Image 0" descr="preencoded.png">    </p:cNvPr>
+          <p:cNvPicPr>
+            <a:picLocks noChangeAspect="1"/>
+          </p:cNvPicPr>
+          <p:nvPr/>
+        </p:nvPicPr>
+        <p:blipFill>
+          <a:blip r:embed="rId1"/>
+          <a:stretch>
+            <a:fillRect/>
+          </a:stretch>
+        </p:blipFill>
+        <p:spPr>
+          <a:xfrm>
+            <a:off x="7411288" y="128016"/>
+            <a:ext cx="201168" cy="201168"/>
+          </a:xfrm>
+          <a:prstGeom prst="rect">
+            <a:avLst/>
+          </a:prstGeom>
+        </p:spPr>
+      </p:pic>
+      <p:sp>
+        <p:nvSpPr>
+          <p:cNvPr id="32" name="Text 29"/>
+          <p:cNvSpPr txBox="1"/>
+          <p:nvPr/>
+        </p:nvSpPr>
+        <p:spPr>
+          <a:xfrm>
+            <a:off x="7667320" y="91440"/>
+            <a:ext cx="3939159" cy="274320"/>
+          </a:xfrm>
+          <a:prstGeom prst="rect">
+            <a:avLst/>
+          </a:prstGeom>
+          <a:noFill/>
+          <a:ln/>
+        </p:spPr>
+        <p:txBody>
+          <a:bodyPr wrap="square" lIns="0" tIns="0" rIns="0" bIns="0" rtlCol="0" anchor="ctr"/>
+          <a:lstStyle/>
+          <a:p>
+            <a:pPr indent="0" marL="0">
+              <a:buNone/>
+            </a:pPr>
+            <a:r>
+              <a:rPr lang="en-US" sz="1100" b="1" dirty="0">
+                <a:solidFill>
+                  <a:srgbClr val="6B21A8"/>
+                </a:solidFill>
+                <a:latin typeface="Calibri" pitchFamily="34" charset="0"/>
+                <a:ea typeface="Calibri" pitchFamily="34" charset="-122"/>
+                <a:cs typeface="Calibri" pitchFamily="34" charset="-120"/>
+              </a:rPr>
+              <a:t>UNDERSTAND LATER</a:t>
+            </a:r>
+            <a:pPr indent="0" marL="0">
+              <a:buNone/>
+            </a:pPr>
+            <a:r>
+              <a:rPr lang="en-US" sz="1100" dirty="0">
+                <a:solidFill>
+                  <a:srgbClr val="6B21A8"/>
+                </a:solidFill>
+                <a:latin typeface="Calibri" pitchFamily="34" charset="0"/>
+                <a:ea typeface="Calibri" pitchFamily="34" charset="-122"/>
+                <a:cs typeface="Calibri" pitchFamily="34" charset="-120"/>
+              </a:rPr>
+              <a:t> · instruction formats</a:t>
+            </a:r>
+            <a:pPr indent="0" marL="0">
+              <a:buNone/>
+            </a:pPr>
+            <a:r>
+              <a:rPr lang="en-US" sz="1100" b="1" dirty="0">
+                <a:solidFill>
+                  <a:srgbClr val="6B21A8"/>
+                </a:solidFill>
+                <a:latin typeface="Calibri" pitchFamily="34" charset="0"/>
+                <a:ea typeface="Calibri" pitchFamily="34" charset="-122"/>
+                <a:cs typeface="Calibri" pitchFamily="34" charset="-120"/>
+              </a:rPr>
+              <a:t> → Lecture 19</a:t>
+            </a:r>
+            <a:endParaRPr lang="en-US" sz="1100" dirty="0"/>
+          </a:p>
+        </p:txBody>
+      </p:sp>
+      <p:sp>
+        <p:nvSpPr>
+          <p:cNvPr id="33" name="Shape 30"/>
+          <p:cNvSpPr/>
+          <p:nvPr/>
+        </p:nvSpPr>
+        <p:spPr>
+          <a:xfrm>
+            <a:off x="3489909" y="91440"/>
+            <a:ext cx="3683635" cy="274320"/>
+          </a:xfrm>
+          <a:prstGeom prst="rect">
+            <a:avLst/>
+          </a:prstGeom>
+          <a:solidFill>
+            <a:srgbClr val="E0F2FE"/>
+          </a:solidFill>
+          <a:ln w="12700">
+            <a:solidFill>
+              <a:srgbClr val="0369A1"/>
+            </a:solidFill>
+            <a:prstDash val="solid"/>
+          </a:ln>
+        </p:spPr>
+      </p:sp>
+      <p:sp>
+        <p:nvSpPr>
+          <p:cNvPr id="34" name="Shape 31"/>
+          <p:cNvSpPr/>
+          <p:nvPr/>
+        </p:nvSpPr>
+        <p:spPr>
+          <a:xfrm>
+            <a:off x="3489909" y="91440"/>
+            <a:ext cx="73152" cy="274320"/>
+          </a:xfrm>
+          <a:prstGeom prst="rect">
+            <a:avLst/>
+          </a:prstGeom>
+          <a:solidFill>
+            <a:srgbClr val="0369A1"/>
+          </a:solidFill>
+          <a:ln w="12700">
+            <a:solidFill>
+              <a:srgbClr val="0369A1"/>
+            </a:solidFill>
+            <a:prstDash val="solid"/>
+          </a:ln>
+        </p:spPr>
+      </p:sp>
+      <p:pic>
+        <p:nvPicPr>
+          <p:cNvPr id="35" name="Image 1" descr="preencoded.png">    </p:cNvPr>
+          <p:cNvPicPr>
+            <a:picLocks noChangeAspect="1"/>
+          </p:cNvPicPr>
+          <p:nvPr/>
+        </p:nvPicPr>
+        <p:blipFill>
+          <a:blip r:embed="rId2"/>
+          <a:stretch>
+            <a:fillRect/>
+          </a:stretch>
+        </p:blipFill>
+        <p:spPr>
+          <a:xfrm>
+            <a:off x="3617925" y="128016"/>
+            <a:ext cx="201168" cy="201168"/>
+          </a:xfrm>
+          <a:prstGeom prst="rect">
+            <a:avLst/>
+          </a:prstGeom>
+        </p:spPr>
+      </p:pic>
+      <p:sp>
+        <p:nvSpPr>
+          <p:cNvPr id="36" name="Text 32"/>
+          <p:cNvSpPr txBox="1"/>
+          <p:nvPr/>
+        </p:nvSpPr>
+        <p:spPr>
+          <a:xfrm>
+            <a:off x="3873957" y="91440"/>
+            <a:ext cx="3263011" cy="274320"/>
+          </a:xfrm>
+          <a:prstGeom prst="rect">
+            <a:avLst/>
+          </a:prstGeom>
+          <a:noFill/>
+          <a:ln/>
+        </p:spPr>
+        <p:txBody>
+          <a:bodyPr wrap="square" lIns="0" tIns="0" rIns="0" bIns="0" rtlCol="0" anchor="ctr"/>
+          <a:lstStyle/>
+          <a:p>
+            <a:pPr indent="0" marL="0">
+              <a:buNone/>
+            </a:pPr>
+            <a:r>
+              <a:rPr lang="en-US" sz="1100" b="1" dirty="0">
+                <a:solidFill>
+                  <a:srgbClr val="075985"/>
+                </a:solidFill>
+                <a:latin typeface="Calibri" pitchFamily="34" charset="0"/>
+                <a:ea typeface="Calibri" pitchFamily="34" charset="-122"/>
+                <a:cs typeface="Calibri" pitchFamily="34" charset="-120"/>
+              </a:rPr>
+              <a:t>UNDERSTAND NOW</a:t>
+            </a:r>
+            <a:pPr indent="0" marL="0">
+              <a:buNone/>
+            </a:pPr>
+            <a:r>
+              <a:rPr lang="en-US" sz="1100" dirty="0">
+                <a:solidFill>
+                  <a:srgbClr val="075985"/>
+                </a:solidFill>
+                <a:latin typeface="Calibri" pitchFamily="34" charset="0"/>
+                <a:ea typeface="Calibri" pitchFamily="34" charset="-122"/>
+                <a:cs typeface="Calibri" pitchFamily="34" charset="-120"/>
+              </a:rPr>
+              <a:t> · an instruction is a number</a:t>
+            </a:r>
+            <a:endParaRPr lang="en-US" sz="1100" dirty="0"/>
+          </a:p>
+        </p:txBody>
+      </p:sp>
+      <p:sp>
+        <p:nvSpPr>
           <p:cNvPr id="25" name="Slide Number Placeholder 0"/>
           <p:cNvSpPr>
             <a:spLocks noGrp="1"/>
@@ -4720,6 +5466,158 @@
               <a:t>The PRG32-QT debugger: source, registers, memory</a:t>
             </a:r>
             <a:endParaRPr lang="en-US" sz="1200" dirty="0"/>
+          </a:p>
+        </p:txBody>
+      </p:sp>
+      <p:sp>
+        <p:nvSpPr>
+          <p:cNvPr id="13" name="Shape 10"/>
+          <p:cNvSpPr/>
+          <p:nvPr/>
+        </p:nvSpPr>
+        <p:spPr>
+          <a:xfrm>
+            <a:off x="8894013" y="91440"/>
+            <a:ext cx="2749042" cy="274320"/>
+          </a:xfrm>
+          <a:prstGeom prst="rect">
+            <a:avLst/>
+          </a:prstGeom>
+          <a:solidFill>
+            <a:srgbClr val="FEF3C7"/>
+          </a:solidFill>
+          <a:ln w="12700">
+            <a:solidFill>
+              <a:srgbClr val="B45309"/>
+            </a:solidFill>
+            <a:prstDash val="solid"/>
+          </a:ln>
+        </p:spPr>
+      </p:sp>
+      <p:sp>
+        <p:nvSpPr>
+          <p:cNvPr id="14" name="Shape 11"/>
+          <p:cNvSpPr/>
+          <p:nvPr/>
+        </p:nvSpPr>
+        <p:spPr>
+          <a:xfrm>
+            <a:off x="8894013" y="91440"/>
+            <a:ext cx="27432" cy="274320"/>
+          </a:xfrm>
+          <a:prstGeom prst="rect">
+            <a:avLst/>
+          </a:prstGeom>
+          <a:solidFill>
+            <a:srgbClr val="B45309"/>
+          </a:solidFill>
+          <a:ln w="12700">
+            <a:solidFill>
+              <a:srgbClr val="B45309"/>
+            </a:solidFill>
+            <a:prstDash val="solid"/>
+          </a:ln>
+        </p:spPr>
+      </p:sp>
+      <p:sp>
+        <p:nvSpPr>
+          <p:cNvPr id="15" name="Shape 12"/>
+          <p:cNvSpPr/>
+          <p:nvPr/>
+        </p:nvSpPr>
+        <p:spPr>
+          <a:xfrm>
+            <a:off x="8948877" y="91440"/>
+            <a:ext cx="27432" cy="274320"/>
+          </a:xfrm>
+          <a:prstGeom prst="rect">
+            <a:avLst/>
+          </a:prstGeom>
+          <a:solidFill>
+            <a:srgbClr val="B45309"/>
+          </a:solidFill>
+          <a:ln w="12700">
+            <a:solidFill>
+              <a:srgbClr val="B45309"/>
+            </a:solidFill>
+            <a:prstDash val="solid"/>
+          </a:ln>
+        </p:spPr>
+      </p:sp>
+      <p:pic>
+        <p:nvPicPr>
+          <p:cNvPr id="16" name="Image 1" descr="preencoded.png">    </p:cNvPr>
+          <p:cNvPicPr>
+            <a:picLocks noChangeAspect="1"/>
+          </p:cNvPicPr>
+          <p:nvPr/>
+        </p:nvPicPr>
+        <p:blipFill>
+          <a:blip r:embed="rId2"/>
+          <a:stretch>
+            <a:fillRect/>
+          </a:stretch>
+        </p:blipFill>
+        <p:spPr>
+          <a:xfrm>
+            <a:off x="9022029" y="128016"/>
+            <a:ext cx="201168" cy="201168"/>
+          </a:xfrm>
+          <a:prstGeom prst="rect">
+            <a:avLst/>
+          </a:prstGeom>
+        </p:spPr>
+      </p:pic>
+      <p:sp>
+        <p:nvSpPr>
+          <p:cNvPr id="17" name="Text 13"/>
+          <p:cNvSpPr txBox="1"/>
+          <p:nvPr/>
+        </p:nvSpPr>
+        <p:spPr>
+          <a:xfrm>
+            <a:off x="9278061" y="91440"/>
+            <a:ext cx="2328418" cy="274320"/>
+          </a:xfrm>
+          <a:prstGeom prst="rect">
+            <a:avLst/>
+          </a:prstGeom>
+          <a:noFill/>
+          <a:ln/>
+        </p:spPr>
+        <p:txBody>
+          <a:bodyPr wrap="square" lIns="0" tIns="0" rIns="0" bIns="0" rtlCol="0" anchor="ctr"/>
+          <a:lstStyle/>
+          <a:p>
+            <a:pPr indent="0" marL="0">
+              <a:buNone/>
+            </a:pPr>
+            <a:r>
+              <a:rPr lang="en-US" sz="1100" b="1" dirty="0">
+                <a:solidFill>
+                  <a:srgbClr val="92400E"/>
+                </a:solidFill>
+                <a:latin typeface="Calibri" pitchFamily="34" charset="0"/>
+                <a:ea typeface="Calibri" pitchFamily="34" charset="-122"/>
+                <a:cs typeface="Calibri" pitchFamily="34" charset="-120"/>
+              </a:rPr>
+              <a:t>USE NOW</a:t>
+            </a:r>
+            <a:pPr indent="0" marL="0">
+              <a:buNone/>
+            </a:pPr>
+            <a:r>
+              <a:rPr lang="en-US" sz="1100" dirty="0">
+                <a:solidFill>
+                  <a:srgbClr val="92400E"/>
+                </a:solidFill>
+                <a:latin typeface="Calibri" pitchFamily="34" charset="0"/>
+                <a:ea typeface="Calibri" pitchFamily="34" charset="-122"/>
+                <a:cs typeface="Calibri" pitchFamily="34" charset="-120"/>
+              </a:rPr>
+              <a:t> · the PRG32-QT debugger</a:t>
+            </a:r>
+            <a:endParaRPr lang="en-US" sz="1100" dirty="0"/>
           </a:p>
         </p:txBody>
       </p:sp>
@@ -6621,6 +7519,133 @@
       </p:sp>
       <p:sp>
         <p:nvSpPr>
+          <p:cNvPr id="5" name="Shape 2"/>
+          <p:cNvSpPr/>
+          <p:nvPr/>
+        </p:nvSpPr>
+        <p:spPr>
+          <a:xfrm>
+            <a:off x="8681669" y="91440"/>
+            <a:ext cx="2961386" cy="274320"/>
+          </a:xfrm>
+          <a:prstGeom prst="rect">
+            <a:avLst/>
+          </a:prstGeom>
+          <a:solidFill>
+            <a:srgbClr val="E0F2FE"/>
+          </a:solidFill>
+          <a:ln w="12700">
+            <a:solidFill>
+              <a:srgbClr val="0369A1"/>
+            </a:solidFill>
+            <a:prstDash val="solid"/>
+          </a:ln>
+        </p:spPr>
+      </p:sp>
+      <p:sp>
+        <p:nvSpPr>
+          <p:cNvPr id="6" name="Shape 3"/>
+          <p:cNvSpPr/>
+          <p:nvPr/>
+        </p:nvSpPr>
+        <p:spPr>
+          <a:xfrm>
+            <a:off x="8681669" y="91440"/>
+            <a:ext cx="73152" cy="274320"/>
+          </a:xfrm>
+          <a:prstGeom prst="rect">
+            <a:avLst/>
+          </a:prstGeom>
+          <a:solidFill>
+            <a:srgbClr val="0369A1"/>
+          </a:solidFill>
+          <a:ln w="12700">
+            <a:solidFill>
+              <a:srgbClr val="0369A1"/>
+            </a:solidFill>
+            <a:prstDash val="solid"/>
+          </a:ln>
+        </p:spPr>
+      </p:sp>
+      <p:pic>
+        <p:nvPicPr>
+          <p:cNvPr id="7" name="Image 0" descr="preencoded.png">    </p:cNvPr>
+          <p:cNvPicPr>
+            <a:picLocks noChangeAspect="1"/>
+          </p:cNvPicPr>
+          <p:nvPr/>
+        </p:nvPicPr>
+        <p:blipFill>
+          <a:blip r:embed="rId1"/>
+          <a:stretch>
+            <a:fillRect/>
+          </a:stretch>
+        </p:blipFill>
+        <p:spPr>
+          <a:xfrm>
+            <a:off x="8809685" y="128016"/>
+            <a:ext cx="201168" cy="201168"/>
+          </a:xfrm>
+          <a:prstGeom prst="rect">
+            <a:avLst/>
+          </a:prstGeom>
+        </p:spPr>
+      </p:pic>
+      <p:sp>
+        <p:nvSpPr>
+          <p:cNvPr id="8" name="Text 4"/>
+          <p:cNvSpPr txBox="1"/>
+          <p:nvPr/>
+        </p:nvSpPr>
+        <p:spPr>
+          <a:xfrm>
+            <a:off x="9065717" y="91440"/>
+            <a:ext cx="2540762" cy="274320"/>
+          </a:xfrm>
+          <a:prstGeom prst="rect">
+            <a:avLst/>
+          </a:prstGeom>
+          <a:noFill/>
+          <a:ln/>
+        </p:spPr>
+        <p:txBody>
+          <a:bodyPr wrap="square" lIns="0" tIns="0" rIns="0" bIns="0" rtlCol="0" anchor="ctr"/>
+          <a:lstStyle/>
+          <a:p>
+            <a:pPr indent="0" marL="0">
+              <a:buNone/>
+            </a:pPr>
+            <a:r>
+              <a:rPr lang="en-US" sz="1100" b="1" dirty="0">
+                <a:solidFill>
+                  <a:srgbClr val="075985"/>
+                </a:solidFill>
+                <a:latin typeface="Calibri" pitchFamily="34" charset="0"/>
+                <a:ea typeface="Calibri" pitchFamily="34" charset="-122"/>
+                <a:cs typeface="Calibri" pitchFamily="34" charset="-120"/>
+              </a:rPr>
+              <a:t>UNDERSTAND NOW</a:t>
+            </a:r>
+            <a:pPr indent="0" marL="0">
+              <a:buNone/>
+            </a:pPr>
+            <a:r>
+              <a:rPr lang="en-US" sz="1100" dirty="0">
+                <a:solidFill>
+                  <a:srgbClr val="075985"/>
+                </a:solidFill>
+                <a:latin typeface="Calibri" pitchFamily="34" charset="0"/>
+                <a:ea typeface="Calibri" pitchFamily="34" charset="-122"/>
+                <a:cs typeface="Calibri" pitchFamily="34" charset="-120"/>
+              </a:rPr>
+              <a:t> · tracing by hand</a:t>
+            </a:r>
+            <a:endParaRPr lang="en-US" sz="1100" dirty="0"/>
+          </a:p>
+        </p:txBody>
+      </p:sp>
+      <p:sp>
+        <p:nvSpPr>
           <p:cNvPr id="25" name="Slide Number Placeholder 0"/>
           <p:cNvSpPr>
             <a:spLocks noGrp="1"/>
@@ -8824,6 +9849,183 @@
           </a:graphicData>
         </a:graphic>
       </p:graphicFrame>
+      <p:sp>
+        <p:nvSpPr>
+          <p:cNvPr id="4" name="Shape 1"/>
+          <p:cNvSpPr/>
+          <p:nvPr/>
+        </p:nvSpPr>
+        <p:spPr>
+          <a:xfrm>
+            <a:off x="8431606" y="91440"/>
+            <a:ext cx="3211449" cy="274320"/>
+          </a:xfrm>
+          <a:prstGeom prst="rect">
+            <a:avLst/>
+          </a:prstGeom>
+          <a:solidFill>
+            <a:srgbClr val="F3E8FF"/>
+          </a:solidFill>
+          <a:ln w="12700">
+            <a:solidFill>
+              <a:srgbClr val="7E22CE"/>
+            </a:solidFill>
+            <a:prstDash val="dash"/>
+          </a:ln>
+        </p:spPr>
+      </p:sp>
+      <p:sp>
+        <p:nvSpPr>
+          <p:cNvPr id="5" name="Shape 2"/>
+          <p:cNvSpPr/>
+          <p:nvPr/>
+        </p:nvSpPr>
+        <p:spPr>
+          <a:xfrm>
+            <a:off x="8459038" y="128016"/>
+            <a:ext cx="45720" cy="45720"/>
+          </a:xfrm>
+          <a:prstGeom prst="rect">
+            <a:avLst/>
+          </a:prstGeom>
+          <a:solidFill>
+            <a:srgbClr val="7E22CE"/>
+          </a:solidFill>
+          <a:ln w="12700">
+            <a:solidFill>
+              <a:srgbClr val="7E22CE"/>
+            </a:solidFill>
+            <a:prstDash val="solid"/>
+          </a:ln>
+        </p:spPr>
+      </p:sp>
+      <p:sp>
+        <p:nvSpPr>
+          <p:cNvPr id="6" name="Shape 3"/>
+          <p:cNvSpPr/>
+          <p:nvPr/>
+        </p:nvSpPr>
+        <p:spPr>
+          <a:xfrm>
+            <a:off x="8459038" y="205740"/>
+            <a:ext cx="45720" cy="45720"/>
+          </a:xfrm>
+          <a:prstGeom prst="rect">
+            <a:avLst/>
+          </a:prstGeom>
+          <a:solidFill>
+            <a:srgbClr val="7E22CE"/>
+          </a:solidFill>
+          <a:ln w="12700">
+            <a:solidFill>
+              <a:srgbClr val="7E22CE"/>
+            </a:solidFill>
+            <a:prstDash val="solid"/>
+          </a:ln>
+        </p:spPr>
+      </p:sp>
+      <p:sp>
+        <p:nvSpPr>
+          <p:cNvPr id="7" name="Shape 4"/>
+          <p:cNvSpPr/>
+          <p:nvPr/>
+        </p:nvSpPr>
+        <p:spPr>
+          <a:xfrm>
+            <a:off x="8459038" y="283464"/>
+            <a:ext cx="45720" cy="45720"/>
+          </a:xfrm>
+          <a:prstGeom prst="rect">
+            <a:avLst/>
+          </a:prstGeom>
+          <a:solidFill>
+            <a:srgbClr val="7E22CE"/>
+          </a:solidFill>
+          <a:ln w="12700">
+            <a:solidFill>
+              <a:srgbClr val="7E22CE"/>
+            </a:solidFill>
+            <a:prstDash val="solid"/>
+          </a:ln>
+        </p:spPr>
+      </p:sp>
+      <p:pic>
+        <p:nvPicPr>
+          <p:cNvPr id="8" name="Image 0" descr="preencoded.png">    </p:cNvPr>
+          <p:cNvPicPr>
+            <a:picLocks noChangeAspect="1"/>
+          </p:cNvPicPr>
+          <p:nvPr/>
+        </p:nvPicPr>
+        <p:blipFill>
+          <a:blip r:embed="rId1"/>
+          <a:stretch>
+            <a:fillRect/>
+          </a:stretch>
+        </p:blipFill>
+        <p:spPr>
+          <a:xfrm>
+            <a:off x="8559622" y="128016"/>
+            <a:ext cx="201168" cy="201168"/>
+          </a:xfrm>
+          <a:prstGeom prst="rect">
+            <a:avLst/>
+          </a:prstGeom>
+        </p:spPr>
+      </p:pic>
+      <p:sp>
+        <p:nvSpPr>
+          <p:cNvPr id="9" name="Text 5"/>
+          <p:cNvSpPr txBox="1"/>
+          <p:nvPr/>
+        </p:nvSpPr>
+        <p:spPr>
+          <a:xfrm>
+            <a:off x="8815654" y="91440"/>
+            <a:ext cx="2790825" cy="274320"/>
+          </a:xfrm>
+          <a:prstGeom prst="rect">
+            <a:avLst/>
+          </a:prstGeom>
+          <a:noFill/>
+          <a:ln/>
+        </p:spPr>
+        <p:txBody>
+          <a:bodyPr wrap="square" lIns="0" tIns="0" rIns="0" bIns="0" rtlCol="0" anchor="ctr"/>
+          <a:lstStyle/>
+          <a:p>
+            <a:pPr indent="0" marL="0">
+              <a:buNone/>
+            </a:pPr>
+            <a:r>
+              <a:rPr lang="en-US" sz="1100" b="1" dirty="0">
+                <a:solidFill>
+                  <a:srgbClr val="6B21A8"/>
+                </a:solidFill>
+                <a:latin typeface="Calibri" pitchFamily="34" charset="0"/>
+                <a:ea typeface="Calibri" pitchFamily="34" charset="-122"/>
+                <a:cs typeface="Calibri" pitchFamily="34" charset="-120"/>
+              </a:rPr>
+              <a:t>UNDERSTAND LATER</a:t>
+            </a:r>
+            <a:pPr indent="0" marL="0">
+              <a:buNone/>
+            </a:pPr>
+            <a:r>
+              <a:rPr lang="en-US" sz="1100" b="1" dirty="0">
+                <a:solidFill>
+                  <a:srgbClr val="6B21A8"/>
+                </a:solidFill>
+                <a:latin typeface="Calibri" pitchFamily="34" charset="0"/>
+                <a:ea typeface="Calibri" pitchFamily="34" charset="-122"/>
+                <a:cs typeface="Calibri" pitchFamily="34" charset="-120"/>
+              </a:rPr>
+              <a:t> → Lectures 04–19</a:t>
+            </a:r>
+            <a:endParaRPr lang="en-US" sz="1100" dirty="0"/>
+          </a:p>
+        </p:txBody>
+      </p:sp>
       <p:sp>
         <p:nvSpPr>
           <p:cNvPr id="25" name="Slide Number Placeholder 0"/>
@@ -14564,6 +15766,133 @@
       </p:sp>
       <p:sp>
         <p:nvSpPr>
+          <p:cNvPr id="19" name="Shape 17"/>
+          <p:cNvSpPr/>
+          <p:nvPr/>
+        </p:nvSpPr>
+        <p:spPr>
+          <a:xfrm>
+            <a:off x="7696784" y="91440"/>
+            <a:ext cx="3946271" cy="274320"/>
+          </a:xfrm>
+          <a:prstGeom prst="rect">
+            <a:avLst/>
+          </a:prstGeom>
+          <a:solidFill>
+            <a:srgbClr val="E0F2FE"/>
+          </a:solidFill>
+          <a:ln w="12700">
+            <a:solidFill>
+              <a:srgbClr val="0369A1"/>
+            </a:solidFill>
+            <a:prstDash val="solid"/>
+          </a:ln>
+        </p:spPr>
+      </p:sp>
+      <p:sp>
+        <p:nvSpPr>
+          <p:cNvPr id="20" name="Shape 18"/>
+          <p:cNvSpPr/>
+          <p:nvPr/>
+        </p:nvSpPr>
+        <p:spPr>
+          <a:xfrm>
+            <a:off x="7696784" y="91440"/>
+            <a:ext cx="73152" cy="274320"/>
+          </a:xfrm>
+          <a:prstGeom prst="rect">
+            <a:avLst/>
+          </a:prstGeom>
+          <a:solidFill>
+            <a:srgbClr val="0369A1"/>
+          </a:solidFill>
+          <a:ln w="12700">
+            <a:solidFill>
+              <a:srgbClr val="0369A1"/>
+            </a:solidFill>
+            <a:prstDash val="solid"/>
+          </a:ln>
+        </p:spPr>
+      </p:sp>
+      <p:pic>
+        <p:nvPicPr>
+          <p:cNvPr id="21" name="Image 0" descr="preencoded.png">    </p:cNvPr>
+          <p:cNvPicPr>
+            <a:picLocks noChangeAspect="1"/>
+          </p:cNvPicPr>
+          <p:nvPr/>
+        </p:nvPicPr>
+        <p:blipFill>
+          <a:blip r:embed="rId1"/>
+          <a:stretch>
+            <a:fillRect/>
+          </a:stretch>
+        </p:blipFill>
+        <p:spPr>
+          <a:xfrm>
+            <a:off x="7824800" y="128016"/>
+            <a:ext cx="201168" cy="201168"/>
+          </a:xfrm>
+          <a:prstGeom prst="rect">
+            <a:avLst/>
+          </a:prstGeom>
+        </p:spPr>
+      </p:pic>
+      <p:sp>
+        <p:nvSpPr>
+          <p:cNvPr id="22" name="Text 19"/>
+          <p:cNvSpPr txBox="1"/>
+          <p:nvPr/>
+        </p:nvSpPr>
+        <p:spPr>
+          <a:xfrm>
+            <a:off x="8080832" y="91440"/>
+            <a:ext cx="3525647" cy="274320"/>
+          </a:xfrm>
+          <a:prstGeom prst="rect">
+            <a:avLst/>
+          </a:prstGeom>
+          <a:noFill/>
+          <a:ln/>
+        </p:spPr>
+        <p:txBody>
+          <a:bodyPr wrap="square" lIns="0" tIns="0" rIns="0" bIns="0" rtlCol="0" anchor="ctr"/>
+          <a:lstStyle/>
+          <a:p>
+            <a:pPr indent="0" marL="0">
+              <a:buNone/>
+            </a:pPr>
+            <a:r>
+              <a:rPr lang="en-US" sz="1100" b="1" dirty="0">
+                <a:solidFill>
+                  <a:srgbClr val="075985"/>
+                </a:solidFill>
+                <a:latin typeface="Calibri" pitchFamily="34" charset="0"/>
+                <a:ea typeface="Calibri" pitchFamily="34" charset="-122"/>
+                <a:cs typeface="Calibri" pitchFamily="34" charset="-120"/>
+              </a:rPr>
+              <a:t>UNDERSTAND NOW</a:t>
+            </a:r>
+            <a:pPr indent="0" marL="0">
+              <a:buNone/>
+            </a:pPr>
+            <a:r>
+              <a:rPr lang="en-US" sz="1100" dirty="0">
+                <a:solidFill>
+                  <a:srgbClr val="075985"/>
+                </a:solidFill>
+                <a:latin typeface="Calibri" pitchFamily="34" charset="0"/>
+                <a:ea typeface="Calibri" pitchFamily="34" charset="-122"/>
+                <a:cs typeface="Calibri" pitchFamily="34" charset="-120"/>
+              </a:rPr>
+              <a:t> · registers, compute, move, jump</a:t>
+            </a:r>
+            <a:endParaRPr lang="en-US" sz="1100" dirty="0"/>
+          </a:p>
+        </p:txBody>
+      </p:sp>
+      <p:sp>
+        <p:nvSpPr>
           <p:cNvPr id="25" name="Slide Number Placeholder 0"/>
           <p:cNvSpPr>
             <a:spLocks noGrp="1"/>
@@ -16667,6 +17996,299 @@
       </p:sp>
       <p:sp>
         <p:nvSpPr>
+          <p:cNvPr id="5" name="Shape 2"/>
+          <p:cNvSpPr/>
+          <p:nvPr/>
+        </p:nvSpPr>
+        <p:spPr>
+          <a:xfrm>
+            <a:off x="7865821" y="91440"/>
+            <a:ext cx="3777234" cy="274320"/>
+          </a:xfrm>
+          <a:prstGeom prst="rect">
+            <a:avLst/>
+          </a:prstGeom>
+          <a:solidFill>
+            <a:srgbClr val="FEF3C7"/>
+          </a:solidFill>
+          <a:ln w="12700">
+            <a:solidFill>
+              <a:srgbClr val="B45309"/>
+            </a:solidFill>
+            <a:prstDash val="solid"/>
+          </a:ln>
+        </p:spPr>
+      </p:sp>
+      <p:sp>
+        <p:nvSpPr>
+          <p:cNvPr id="6" name="Shape 3"/>
+          <p:cNvSpPr/>
+          <p:nvPr/>
+        </p:nvSpPr>
+        <p:spPr>
+          <a:xfrm>
+            <a:off x="7865821" y="91440"/>
+            <a:ext cx="27432" cy="274320"/>
+          </a:xfrm>
+          <a:prstGeom prst="rect">
+            <a:avLst/>
+          </a:prstGeom>
+          <a:solidFill>
+            <a:srgbClr val="B45309"/>
+          </a:solidFill>
+          <a:ln w="12700">
+            <a:solidFill>
+              <a:srgbClr val="B45309"/>
+            </a:solidFill>
+            <a:prstDash val="solid"/>
+          </a:ln>
+        </p:spPr>
+      </p:sp>
+      <p:sp>
+        <p:nvSpPr>
+          <p:cNvPr id="7" name="Shape 4"/>
+          <p:cNvSpPr/>
+          <p:nvPr/>
+        </p:nvSpPr>
+        <p:spPr>
+          <a:xfrm>
+            <a:off x="7920685" y="91440"/>
+            <a:ext cx="27432" cy="274320"/>
+          </a:xfrm>
+          <a:prstGeom prst="rect">
+            <a:avLst/>
+          </a:prstGeom>
+          <a:solidFill>
+            <a:srgbClr val="B45309"/>
+          </a:solidFill>
+          <a:ln w="12700">
+            <a:solidFill>
+              <a:srgbClr val="B45309"/>
+            </a:solidFill>
+            <a:prstDash val="solid"/>
+          </a:ln>
+        </p:spPr>
+      </p:sp>
+      <p:pic>
+        <p:nvPicPr>
+          <p:cNvPr id="8" name="Image 0" descr="preencoded.png">    </p:cNvPr>
+          <p:cNvPicPr>
+            <a:picLocks noChangeAspect="1"/>
+          </p:cNvPicPr>
+          <p:nvPr/>
+        </p:nvPicPr>
+        <p:blipFill>
+          <a:blip r:embed="rId1"/>
+          <a:stretch>
+            <a:fillRect/>
+          </a:stretch>
+        </p:blipFill>
+        <p:spPr>
+          <a:xfrm>
+            <a:off x="7993837" y="128016"/>
+            <a:ext cx="201168" cy="201168"/>
+          </a:xfrm>
+          <a:prstGeom prst="rect">
+            <a:avLst/>
+          </a:prstGeom>
+        </p:spPr>
+      </p:pic>
+      <p:sp>
+        <p:nvSpPr>
+          <p:cNvPr id="9" name="Text 5"/>
+          <p:cNvSpPr txBox="1"/>
+          <p:nvPr/>
+        </p:nvSpPr>
+        <p:spPr>
+          <a:xfrm>
+            <a:off x="8249869" y="91440"/>
+            <a:ext cx="3356610" cy="274320"/>
+          </a:xfrm>
+          <a:prstGeom prst="rect">
+            <a:avLst/>
+          </a:prstGeom>
+          <a:noFill/>
+          <a:ln/>
+        </p:spPr>
+        <p:txBody>
+          <a:bodyPr wrap="square" lIns="0" tIns="0" rIns="0" bIns="0" rtlCol="0" anchor="ctr"/>
+          <a:lstStyle/>
+          <a:p>
+            <a:pPr indent="0" marL="0">
+              <a:buNone/>
+            </a:pPr>
+            <a:r>
+              <a:rPr lang="en-US" sz="1100" b="1" dirty="0">
+                <a:solidFill>
+                  <a:srgbClr val="92400E"/>
+                </a:solidFill>
+                <a:latin typeface="Calibri" pitchFamily="34" charset="0"/>
+                <a:ea typeface="Calibri" pitchFamily="34" charset="-122"/>
+                <a:cs typeface="Calibri" pitchFamily="34" charset="-120"/>
+              </a:rPr>
+              <a:t>USE NOW</a:t>
+            </a:r>
+            <a:pPr indent="0" marL="0">
+              <a:buNone/>
+            </a:pPr>
+            <a:r>
+              <a:rPr lang="en-US" sz="1100" dirty="0">
+                <a:solidFill>
+                  <a:srgbClr val="92400E"/>
+                </a:solidFill>
+                <a:latin typeface="Calibri" pitchFamily="34" charset="0"/>
+                <a:ea typeface="Calibri" pitchFamily="34" charset="-122"/>
+                <a:cs typeface="Calibri" pitchFamily="34" charset="-120"/>
+              </a:rPr>
+              <a:t> · the calling convention</a:t>
+            </a:r>
+            <a:pPr indent="0" marL="0">
+              <a:buNone/>
+            </a:pPr>
+            <a:r>
+              <a:rPr lang="en-US" sz="1100" b="1" dirty="0">
+                <a:solidFill>
+                  <a:srgbClr val="92400E"/>
+                </a:solidFill>
+                <a:latin typeface="Calibri" pitchFamily="34" charset="0"/>
+                <a:ea typeface="Calibri" pitchFamily="34" charset="-122"/>
+                <a:cs typeface="Calibri" pitchFamily="34" charset="-120"/>
+              </a:rPr>
+              <a:t> → Lecture 18</a:t>
+            </a:r>
+            <a:endParaRPr lang="en-US" sz="1100" dirty="0"/>
+          </a:p>
+        </p:txBody>
+      </p:sp>
+      <p:sp>
+        <p:nvSpPr>
+          <p:cNvPr id="10" name="Shape 6"/>
+          <p:cNvSpPr/>
+          <p:nvPr/>
+        </p:nvSpPr>
+        <p:spPr>
+          <a:xfrm>
+            <a:off x="5188661" y="91440"/>
+            <a:ext cx="2567432" cy="274320"/>
+          </a:xfrm>
+          <a:prstGeom prst="rect">
+            <a:avLst/>
+          </a:prstGeom>
+          <a:solidFill>
+            <a:srgbClr val="E0F2FE"/>
+          </a:solidFill>
+          <a:ln w="12700">
+            <a:solidFill>
+              <a:srgbClr val="0369A1"/>
+            </a:solidFill>
+            <a:prstDash val="solid"/>
+          </a:ln>
+        </p:spPr>
+      </p:sp>
+      <p:sp>
+        <p:nvSpPr>
+          <p:cNvPr id="11" name="Shape 7"/>
+          <p:cNvSpPr/>
+          <p:nvPr/>
+        </p:nvSpPr>
+        <p:spPr>
+          <a:xfrm>
+            <a:off x="5188661" y="91440"/>
+            <a:ext cx="73152" cy="274320"/>
+          </a:xfrm>
+          <a:prstGeom prst="rect">
+            <a:avLst/>
+          </a:prstGeom>
+          <a:solidFill>
+            <a:srgbClr val="0369A1"/>
+          </a:solidFill>
+          <a:ln w="12700">
+            <a:solidFill>
+              <a:srgbClr val="0369A1"/>
+            </a:solidFill>
+            <a:prstDash val="solid"/>
+          </a:ln>
+        </p:spPr>
+      </p:sp>
+      <p:pic>
+        <p:nvPicPr>
+          <p:cNvPr id="12" name="Image 1" descr="preencoded.png">    </p:cNvPr>
+          <p:cNvPicPr>
+            <a:picLocks noChangeAspect="1"/>
+          </p:cNvPicPr>
+          <p:nvPr/>
+        </p:nvPicPr>
+        <p:blipFill>
+          <a:blip r:embed="rId2"/>
+          <a:stretch>
+            <a:fillRect/>
+          </a:stretch>
+        </p:blipFill>
+        <p:spPr>
+          <a:xfrm>
+            <a:off x="5316677" y="128016"/>
+            <a:ext cx="201168" cy="201168"/>
+          </a:xfrm>
+          <a:prstGeom prst="rect">
+            <a:avLst/>
+          </a:prstGeom>
+        </p:spPr>
+      </p:pic>
+      <p:sp>
+        <p:nvSpPr>
+          <p:cNvPr id="13" name="Text 8"/>
+          <p:cNvSpPr txBox="1"/>
+          <p:nvPr/>
+        </p:nvSpPr>
+        <p:spPr>
+          <a:xfrm>
+            <a:off x="5572709" y="91440"/>
+            <a:ext cx="2146808" cy="274320"/>
+          </a:xfrm>
+          <a:prstGeom prst="rect">
+            <a:avLst/>
+          </a:prstGeom>
+          <a:noFill/>
+          <a:ln/>
+        </p:spPr>
+        <p:txBody>
+          <a:bodyPr wrap="square" lIns="0" tIns="0" rIns="0" bIns="0" rtlCol="0" anchor="ctr"/>
+          <a:lstStyle/>
+          <a:p>
+            <a:pPr indent="0" marL="0">
+              <a:buNone/>
+            </a:pPr>
+            <a:r>
+              <a:rPr lang="en-US" sz="1100" b="1" dirty="0">
+                <a:solidFill>
+                  <a:srgbClr val="075985"/>
+                </a:solidFill>
+                <a:latin typeface="Calibri" pitchFamily="34" charset="0"/>
+                <a:ea typeface="Calibri" pitchFamily="34" charset="-122"/>
+                <a:cs typeface="Calibri" pitchFamily="34" charset="-120"/>
+              </a:rPr>
+              <a:t>UNDERSTAND NOW</a:t>
+            </a:r>
+            <a:pPr indent="0" marL="0">
+              <a:buNone/>
+            </a:pPr>
+            <a:r>
+              <a:rPr lang="en-US" sz="1100" dirty="0">
+                <a:solidFill>
+                  <a:srgbClr val="075985"/>
+                </a:solidFill>
+                <a:latin typeface="Calibri" pitchFamily="34" charset="0"/>
+                <a:ea typeface="Calibri" pitchFamily="34" charset="-122"/>
+                <a:cs typeface="Calibri" pitchFamily="34" charset="-120"/>
+              </a:rPr>
+              <a:t> · registers</a:t>
+            </a:r>
+            <a:endParaRPr lang="en-US" sz="1100" dirty="0"/>
+          </a:p>
+        </p:txBody>
+      </p:sp>
+      <p:sp>
+        <p:nvSpPr>
           <p:cNvPr id="25" name="Slide Number Placeholder 0"/>
           <p:cNvSpPr>
             <a:spLocks noGrp="1"/>
@@ -17231,6 +18853,133 @@
               <a:t>The firmware finds the three functions by name: a prefix that you choose, followed by _init, _update and _draw. That is the whole contract between your game and the machine.</a:t>
             </a:r>
             <a:endParaRPr lang="en-US" sz="2000" dirty="0"/>
+          </a:p>
+        </p:txBody>
+      </p:sp>
+      <p:sp>
+        <p:nvSpPr>
+          <p:cNvPr id="16" name="Shape 14"/>
+          <p:cNvSpPr/>
+          <p:nvPr/>
+        </p:nvSpPr>
+        <p:spPr>
+          <a:xfrm>
+            <a:off x="7631125" y="91440"/>
+            <a:ext cx="4011930" cy="274320"/>
+          </a:xfrm>
+          <a:prstGeom prst="rect">
+            <a:avLst/>
+          </a:prstGeom>
+          <a:solidFill>
+            <a:srgbClr val="E0F2FE"/>
+          </a:solidFill>
+          <a:ln w="12700">
+            <a:solidFill>
+              <a:srgbClr val="0369A1"/>
+            </a:solidFill>
+            <a:prstDash val="solid"/>
+          </a:ln>
+        </p:spPr>
+      </p:sp>
+      <p:sp>
+        <p:nvSpPr>
+          <p:cNvPr id="17" name="Shape 15"/>
+          <p:cNvSpPr/>
+          <p:nvPr/>
+        </p:nvSpPr>
+        <p:spPr>
+          <a:xfrm>
+            <a:off x="7631125" y="91440"/>
+            <a:ext cx="73152" cy="274320"/>
+          </a:xfrm>
+          <a:prstGeom prst="rect">
+            <a:avLst/>
+          </a:prstGeom>
+          <a:solidFill>
+            <a:srgbClr val="0369A1"/>
+          </a:solidFill>
+          <a:ln w="12700">
+            <a:solidFill>
+              <a:srgbClr val="0369A1"/>
+            </a:solidFill>
+            <a:prstDash val="solid"/>
+          </a:ln>
+        </p:spPr>
+      </p:sp>
+      <p:pic>
+        <p:nvPicPr>
+          <p:cNvPr id="18" name="Image 0" descr="preencoded.png">    </p:cNvPr>
+          <p:cNvPicPr>
+            <a:picLocks noChangeAspect="1"/>
+          </p:cNvPicPr>
+          <p:nvPr/>
+        </p:nvPicPr>
+        <p:blipFill>
+          <a:blip r:embed="rId1"/>
+          <a:stretch>
+            <a:fillRect/>
+          </a:stretch>
+        </p:blipFill>
+        <p:spPr>
+          <a:xfrm>
+            <a:off x="7759141" y="128016"/>
+            <a:ext cx="201168" cy="201168"/>
+          </a:xfrm>
+          <a:prstGeom prst="rect">
+            <a:avLst/>
+          </a:prstGeom>
+        </p:spPr>
+      </p:pic>
+      <p:sp>
+        <p:nvSpPr>
+          <p:cNvPr id="19" name="Text 16"/>
+          <p:cNvSpPr txBox="1"/>
+          <p:nvPr/>
+        </p:nvSpPr>
+        <p:spPr>
+          <a:xfrm>
+            <a:off x="8015173" y="91440"/>
+            <a:ext cx="3591306" cy="274320"/>
+          </a:xfrm>
+          <a:prstGeom prst="rect">
+            <a:avLst/>
+          </a:prstGeom>
+          <a:noFill/>
+          <a:ln/>
+        </p:spPr>
+        <p:txBody>
+          <a:bodyPr wrap="square" lIns="0" tIns="0" rIns="0" bIns="0" rtlCol="0" anchor="ctr"/>
+          <a:lstStyle/>
+          <a:p>
+            <a:pPr indent="0" marL="0">
+              <a:buNone/>
+            </a:pPr>
+            <a:r>
+              <a:rPr lang="en-US" sz="1100" b="1" dirty="0">
+                <a:solidFill>
+                  <a:srgbClr val="075985"/>
+                </a:solidFill>
+                <a:latin typeface="Calibri" pitchFamily="34" charset="0"/>
+                <a:ea typeface="Calibri" pitchFamily="34" charset="-122"/>
+                <a:cs typeface="Calibri" pitchFamily="34" charset="-120"/>
+              </a:rPr>
+              <a:t>UNDERSTAND NOW</a:t>
+            </a:r>
+            <a:pPr indent="0" marL="0">
+              <a:buNone/>
+            </a:pPr>
+            <a:r>
+              <a:rPr lang="en-US" sz="1100" dirty="0">
+                <a:solidFill>
+                  <a:srgbClr val="075985"/>
+                </a:solidFill>
+                <a:latin typeface="Calibri" pitchFamily="34" charset="0"/>
+                <a:ea typeface="Calibri" pitchFamily="34" charset="-122"/>
+                <a:cs typeface="Calibri" pitchFamily="34" charset="-120"/>
+              </a:rPr>
+              <a:t> · the init, update, draw contract</a:t>
+            </a:r>
+            <a:endParaRPr lang="en-US" sz="1100" dirty="0"/>
           </a:p>
         </p:txBody>
       </p:sp>
@@ -18340,6 +20089,324 @@
               <a:t>The stack grows downward: subtract from sp to allocate, add to release.</a:t>
             </a:r>
             <a:endParaRPr lang="en-US" sz="1400" dirty="0"/>
+          </a:p>
+        </p:txBody>
+      </p:sp>
+      <p:sp>
+        <p:nvSpPr>
+          <p:cNvPr id="28" name="Shape 26"/>
+          <p:cNvSpPr/>
+          <p:nvPr/>
+        </p:nvSpPr>
+        <p:spPr>
+          <a:xfrm>
+            <a:off x="7939862" y="91440"/>
+            <a:ext cx="3703193" cy="274320"/>
+          </a:xfrm>
+          <a:prstGeom prst="rect">
+            <a:avLst/>
+          </a:prstGeom>
+          <a:solidFill>
+            <a:srgbClr val="F3E8FF"/>
+          </a:solidFill>
+          <a:ln w="12700">
+            <a:solidFill>
+              <a:srgbClr val="7E22CE"/>
+            </a:solidFill>
+            <a:prstDash val="dash"/>
+          </a:ln>
+        </p:spPr>
+      </p:sp>
+      <p:sp>
+        <p:nvSpPr>
+          <p:cNvPr id="29" name="Shape 27"/>
+          <p:cNvSpPr/>
+          <p:nvPr/>
+        </p:nvSpPr>
+        <p:spPr>
+          <a:xfrm>
+            <a:off x="7967294" y="128016"/>
+            <a:ext cx="45720" cy="45720"/>
+          </a:xfrm>
+          <a:prstGeom prst="rect">
+            <a:avLst/>
+          </a:prstGeom>
+          <a:solidFill>
+            <a:srgbClr val="7E22CE"/>
+          </a:solidFill>
+          <a:ln w="12700">
+            <a:solidFill>
+              <a:srgbClr val="7E22CE"/>
+            </a:solidFill>
+            <a:prstDash val="solid"/>
+          </a:ln>
+        </p:spPr>
+      </p:sp>
+      <p:sp>
+        <p:nvSpPr>
+          <p:cNvPr id="30" name="Shape 28"/>
+          <p:cNvSpPr/>
+          <p:nvPr/>
+        </p:nvSpPr>
+        <p:spPr>
+          <a:xfrm>
+            <a:off x="7967294" y="205740"/>
+            <a:ext cx="45720" cy="45720"/>
+          </a:xfrm>
+          <a:prstGeom prst="rect">
+            <a:avLst/>
+          </a:prstGeom>
+          <a:solidFill>
+            <a:srgbClr val="7E22CE"/>
+          </a:solidFill>
+          <a:ln w="12700">
+            <a:solidFill>
+              <a:srgbClr val="7E22CE"/>
+            </a:solidFill>
+            <a:prstDash val="solid"/>
+          </a:ln>
+        </p:spPr>
+      </p:sp>
+      <p:sp>
+        <p:nvSpPr>
+          <p:cNvPr id="31" name="Shape 29"/>
+          <p:cNvSpPr/>
+          <p:nvPr/>
+        </p:nvSpPr>
+        <p:spPr>
+          <a:xfrm>
+            <a:off x="7967294" y="283464"/>
+            <a:ext cx="45720" cy="45720"/>
+          </a:xfrm>
+          <a:prstGeom prst="rect">
+            <a:avLst/>
+          </a:prstGeom>
+          <a:solidFill>
+            <a:srgbClr val="7E22CE"/>
+          </a:solidFill>
+          <a:ln w="12700">
+            <a:solidFill>
+              <a:srgbClr val="7E22CE"/>
+            </a:solidFill>
+            <a:prstDash val="solid"/>
+          </a:ln>
+        </p:spPr>
+      </p:sp>
+      <p:pic>
+        <p:nvPicPr>
+          <p:cNvPr id="32" name="Image 0" descr="preencoded.png">    </p:cNvPr>
+          <p:cNvPicPr>
+            <a:picLocks noChangeAspect="1"/>
+          </p:cNvPicPr>
+          <p:nvPr/>
+        </p:nvPicPr>
+        <p:blipFill>
+          <a:blip r:embed="rId1"/>
+          <a:stretch>
+            <a:fillRect/>
+          </a:stretch>
+        </p:blipFill>
+        <p:spPr>
+          <a:xfrm>
+            <a:off x="8067878" y="128016"/>
+            <a:ext cx="201168" cy="201168"/>
+          </a:xfrm>
+          <a:prstGeom prst="rect">
+            <a:avLst/>
+          </a:prstGeom>
+        </p:spPr>
+      </p:pic>
+      <p:sp>
+        <p:nvSpPr>
+          <p:cNvPr id="33" name="Text 30"/>
+          <p:cNvSpPr txBox="1"/>
+          <p:nvPr/>
+        </p:nvSpPr>
+        <p:spPr>
+          <a:xfrm>
+            <a:off x="8323910" y="91440"/>
+            <a:ext cx="3282569" cy="274320"/>
+          </a:xfrm>
+          <a:prstGeom prst="rect">
+            <a:avLst/>
+          </a:prstGeom>
+          <a:noFill/>
+          <a:ln/>
+        </p:spPr>
+        <p:txBody>
+          <a:bodyPr wrap="square" lIns="0" tIns="0" rIns="0" bIns="0" rtlCol="0" anchor="ctr"/>
+          <a:lstStyle/>
+          <a:p>
+            <a:pPr indent="0" marL="0">
+              <a:buNone/>
+            </a:pPr>
+            <a:r>
+              <a:rPr lang="en-US" sz="1100" b="1" dirty="0">
+                <a:solidFill>
+                  <a:srgbClr val="6B21A8"/>
+                </a:solidFill>
+                <a:latin typeface="Calibri" pitchFamily="34" charset="0"/>
+                <a:ea typeface="Calibri" pitchFamily="34" charset="-122"/>
+                <a:cs typeface="Calibri" pitchFamily="34" charset="-120"/>
+              </a:rPr>
+              <a:t>UNDERSTAND LATER</a:t>
+            </a:r>
+            <a:pPr indent="0" marL="0">
+              <a:buNone/>
+            </a:pPr>
+            <a:r>
+              <a:rPr lang="en-US" sz="1100" dirty="0">
+                <a:solidFill>
+                  <a:srgbClr val="6B21A8"/>
+                </a:solidFill>
+                <a:latin typeface="Calibri" pitchFamily="34" charset="0"/>
+                <a:ea typeface="Calibri" pitchFamily="34" charset="-122"/>
+                <a:cs typeface="Calibri" pitchFamily="34" charset="-120"/>
+              </a:rPr>
+              <a:t> · the stack</a:t>
+            </a:r>
+            <a:pPr indent="0" marL="0">
+              <a:buNone/>
+            </a:pPr>
+            <a:r>
+              <a:rPr lang="en-US" sz="1100" b="1" dirty="0">
+                <a:solidFill>
+                  <a:srgbClr val="6B21A8"/>
+                </a:solidFill>
+                <a:latin typeface="Calibri" pitchFamily="34" charset="0"/>
+                <a:ea typeface="Calibri" pitchFamily="34" charset="-122"/>
+                <a:cs typeface="Calibri" pitchFamily="34" charset="-120"/>
+              </a:rPr>
+              <a:t> → Lecture 18</a:t>
+            </a:r>
+            <a:endParaRPr lang="en-US" sz="1100" dirty="0"/>
+          </a:p>
+        </p:txBody>
+      </p:sp>
+      <p:sp>
+        <p:nvSpPr>
+          <p:cNvPr id="34" name="Shape 31"/>
+          <p:cNvSpPr/>
+          <p:nvPr/>
+        </p:nvSpPr>
+        <p:spPr>
+          <a:xfrm>
+            <a:off x="4868748" y="91440"/>
+            <a:ext cx="2961386" cy="274320"/>
+          </a:xfrm>
+          <a:prstGeom prst="rect">
+            <a:avLst/>
+          </a:prstGeom>
+          <a:solidFill>
+            <a:srgbClr val="E0F2FE"/>
+          </a:solidFill>
+          <a:ln w="12700">
+            <a:solidFill>
+              <a:srgbClr val="0369A1"/>
+            </a:solidFill>
+            <a:prstDash val="solid"/>
+          </a:ln>
+        </p:spPr>
+      </p:sp>
+      <p:sp>
+        <p:nvSpPr>
+          <p:cNvPr id="35" name="Shape 32"/>
+          <p:cNvSpPr/>
+          <p:nvPr/>
+        </p:nvSpPr>
+        <p:spPr>
+          <a:xfrm>
+            <a:off x="4868748" y="91440"/>
+            <a:ext cx="73152" cy="274320"/>
+          </a:xfrm>
+          <a:prstGeom prst="rect">
+            <a:avLst/>
+          </a:prstGeom>
+          <a:solidFill>
+            <a:srgbClr val="0369A1"/>
+          </a:solidFill>
+          <a:ln w="12700">
+            <a:solidFill>
+              <a:srgbClr val="0369A1"/>
+            </a:solidFill>
+            <a:prstDash val="solid"/>
+          </a:ln>
+        </p:spPr>
+      </p:sp>
+      <p:pic>
+        <p:nvPicPr>
+          <p:cNvPr id="36" name="Image 1" descr="preencoded.png">    </p:cNvPr>
+          <p:cNvPicPr>
+            <a:picLocks noChangeAspect="1"/>
+          </p:cNvPicPr>
+          <p:nvPr/>
+        </p:nvPicPr>
+        <p:blipFill>
+          <a:blip r:embed="rId2"/>
+          <a:stretch>
+            <a:fillRect/>
+          </a:stretch>
+        </p:blipFill>
+        <p:spPr>
+          <a:xfrm>
+            <a:off x="4996764" y="128016"/>
+            <a:ext cx="201168" cy="201168"/>
+          </a:xfrm>
+          <a:prstGeom prst="rect">
+            <a:avLst/>
+          </a:prstGeom>
+        </p:spPr>
+      </p:pic>
+      <p:sp>
+        <p:nvSpPr>
+          <p:cNvPr id="37" name="Text 33"/>
+          <p:cNvSpPr txBox="1"/>
+          <p:nvPr/>
+        </p:nvSpPr>
+        <p:spPr>
+          <a:xfrm>
+            <a:off x="5252796" y="91440"/>
+            <a:ext cx="2540762" cy="274320"/>
+          </a:xfrm>
+          <a:prstGeom prst="rect">
+            <a:avLst/>
+          </a:prstGeom>
+          <a:noFill/>
+          <a:ln/>
+        </p:spPr>
+        <p:txBody>
+          <a:bodyPr wrap="square" lIns="0" tIns="0" rIns="0" bIns="0" rtlCol="0" anchor="ctr"/>
+          <a:lstStyle/>
+          <a:p>
+            <a:pPr indent="0" marL="0">
+              <a:buNone/>
+            </a:pPr>
+            <a:r>
+              <a:rPr lang="en-US" sz="1100" b="1" dirty="0">
+                <a:solidFill>
+                  <a:srgbClr val="075985"/>
+                </a:solidFill>
+                <a:latin typeface="Calibri" pitchFamily="34" charset="0"/>
+                <a:ea typeface="Calibri" pitchFamily="34" charset="-122"/>
+                <a:cs typeface="Calibri" pitchFamily="34" charset="-120"/>
+              </a:rPr>
+              <a:t>UNDERSTAND NOW</a:t>
+            </a:r>
+            <a:pPr indent="0" marL="0">
+              <a:buNone/>
+            </a:pPr>
+            <a:r>
+              <a:rPr lang="en-US" sz="1100" dirty="0">
+                <a:solidFill>
+                  <a:srgbClr val="075985"/>
+                </a:solidFill>
+                <a:latin typeface="Calibri" pitchFamily="34" charset="0"/>
+                <a:ea typeface="Calibri" pitchFamily="34" charset="-122"/>
+                <a:cs typeface="Calibri" pitchFamily="34" charset="-120"/>
+              </a:rPr>
+              <a:t> · why ra is saved</a:t>
+            </a:r>
+            <a:endParaRPr lang="en-US" sz="1100" dirty="0"/>
           </a:p>
         </p:txBody>
       </p:sp>
@@ -19205,6 +21272,324 @@
       </p:sp>
       <p:sp>
         <p:nvSpPr>
+          <p:cNvPr id="20" name="Shape 18"/>
+          <p:cNvSpPr/>
+          <p:nvPr/>
+        </p:nvSpPr>
+        <p:spPr>
+          <a:xfrm>
+            <a:off x="7480249" y="91440"/>
+            <a:ext cx="4162806" cy="274320"/>
+          </a:xfrm>
+          <a:prstGeom prst="rect">
+            <a:avLst/>
+          </a:prstGeom>
+          <a:solidFill>
+            <a:srgbClr val="F3E8FF"/>
+          </a:solidFill>
+          <a:ln w="12700">
+            <a:solidFill>
+              <a:srgbClr val="7E22CE"/>
+            </a:solidFill>
+            <a:prstDash val="dash"/>
+          </a:ln>
+        </p:spPr>
+      </p:sp>
+      <p:sp>
+        <p:nvSpPr>
+          <p:cNvPr id="21" name="Shape 19"/>
+          <p:cNvSpPr/>
+          <p:nvPr/>
+        </p:nvSpPr>
+        <p:spPr>
+          <a:xfrm>
+            <a:off x="7507681" y="128016"/>
+            <a:ext cx="45720" cy="45720"/>
+          </a:xfrm>
+          <a:prstGeom prst="rect">
+            <a:avLst/>
+          </a:prstGeom>
+          <a:solidFill>
+            <a:srgbClr val="7E22CE"/>
+          </a:solidFill>
+          <a:ln w="12700">
+            <a:solidFill>
+              <a:srgbClr val="7E22CE"/>
+            </a:solidFill>
+            <a:prstDash val="solid"/>
+          </a:ln>
+        </p:spPr>
+      </p:sp>
+      <p:sp>
+        <p:nvSpPr>
+          <p:cNvPr id="22" name="Shape 20"/>
+          <p:cNvSpPr/>
+          <p:nvPr/>
+        </p:nvSpPr>
+        <p:spPr>
+          <a:xfrm>
+            <a:off x="7507681" y="205740"/>
+            <a:ext cx="45720" cy="45720"/>
+          </a:xfrm>
+          <a:prstGeom prst="rect">
+            <a:avLst/>
+          </a:prstGeom>
+          <a:solidFill>
+            <a:srgbClr val="7E22CE"/>
+          </a:solidFill>
+          <a:ln w="12700">
+            <a:solidFill>
+              <a:srgbClr val="7E22CE"/>
+            </a:solidFill>
+            <a:prstDash val="solid"/>
+          </a:ln>
+        </p:spPr>
+      </p:sp>
+      <p:sp>
+        <p:nvSpPr>
+          <p:cNvPr id="23" name="Shape 21"/>
+          <p:cNvSpPr/>
+          <p:nvPr/>
+        </p:nvSpPr>
+        <p:spPr>
+          <a:xfrm>
+            <a:off x="7507681" y="283464"/>
+            <a:ext cx="45720" cy="45720"/>
+          </a:xfrm>
+          <a:prstGeom prst="rect">
+            <a:avLst/>
+          </a:prstGeom>
+          <a:solidFill>
+            <a:srgbClr val="7E22CE"/>
+          </a:solidFill>
+          <a:ln w="12700">
+            <a:solidFill>
+              <a:srgbClr val="7E22CE"/>
+            </a:solidFill>
+            <a:prstDash val="solid"/>
+          </a:ln>
+        </p:spPr>
+      </p:sp>
+      <p:pic>
+        <p:nvPicPr>
+          <p:cNvPr id="24" name="Image 0" descr="preencoded.png">    </p:cNvPr>
+          <p:cNvPicPr>
+            <a:picLocks noChangeAspect="1"/>
+          </p:cNvPicPr>
+          <p:nvPr/>
+        </p:nvPicPr>
+        <p:blipFill>
+          <a:blip r:embed="rId1"/>
+          <a:stretch>
+            <a:fillRect/>
+          </a:stretch>
+        </p:blipFill>
+        <p:spPr>
+          <a:xfrm>
+            <a:off x="7608265" y="128016"/>
+            <a:ext cx="201168" cy="201168"/>
+          </a:xfrm>
+          <a:prstGeom prst="rect">
+            <a:avLst/>
+          </a:prstGeom>
+        </p:spPr>
+      </p:pic>
+      <p:sp>
+        <p:nvSpPr>
+          <p:cNvPr id="25" name="Text 22"/>
+          <p:cNvSpPr txBox="1"/>
+          <p:nvPr/>
+        </p:nvSpPr>
+        <p:spPr>
+          <a:xfrm>
+            <a:off x="7864297" y="91440"/>
+            <a:ext cx="3742182" cy="274320"/>
+          </a:xfrm>
+          <a:prstGeom prst="rect">
+            <a:avLst/>
+          </a:prstGeom>
+          <a:noFill/>
+          <a:ln/>
+        </p:spPr>
+        <p:txBody>
+          <a:bodyPr wrap="square" lIns="0" tIns="0" rIns="0" bIns="0" rtlCol="0" anchor="ctr"/>
+          <a:lstStyle/>
+          <a:p>
+            <a:pPr indent="0" marL="0">
+              <a:buNone/>
+            </a:pPr>
+            <a:r>
+              <a:rPr lang="en-US" sz="1100" b="1" dirty="0">
+                <a:solidFill>
+                  <a:srgbClr val="6B21A8"/>
+                </a:solidFill>
+                <a:latin typeface="Calibri" pitchFamily="34" charset="0"/>
+                <a:ea typeface="Calibri" pitchFamily="34" charset="-122"/>
+                <a:cs typeface="Calibri" pitchFamily="34" charset="-120"/>
+              </a:rPr>
+              <a:t>UNDERSTAND LATER</a:t>
+            </a:r>
+            <a:pPr indent="0" marL="0">
+              <a:buNone/>
+            </a:pPr>
+            <a:r>
+              <a:rPr lang="en-US" sz="1100" dirty="0">
+                <a:solidFill>
+                  <a:srgbClr val="6B21A8"/>
+                </a:solidFill>
+                <a:latin typeface="Calibri" pitchFamily="34" charset="0"/>
+                <a:ea typeface="Calibri" pitchFamily="34" charset="-122"/>
+                <a:cs typeface="Calibri" pitchFamily="34" charset="-120"/>
+              </a:rPr>
+              <a:t> · addressing modes</a:t>
+            </a:r>
+            <a:pPr indent="0" marL="0">
+              <a:buNone/>
+            </a:pPr>
+            <a:r>
+              <a:rPr lang="en-US" sz="1100" b="1" dirty="0">
+                <a:solidFill>
+                  <a:srgbClr val="6B21A8"/>
+                </a:solidFill>
+                <a:latin typeface="Calibri" pitchFamily="34" charset="0"/>
+                <a:ea typeface="Calibri" pitchFamily="34" charset="-122"/>
+                <a:cs typeface="Calibri" pitchFamily="34" charset="-120"/>
+              </a:rPr>
+              <a:t> → Lecture 19</a:t>
+            </a:r>
+            <a:endParaRPr lang="en-US" sz="1100" dirty="0"/>
+          </a:p>
+        </p:txBody>
+      </p:sp>
+      <p:sp>
+        <p:nvSpPr>
+          <p:cNvPr id="26" name="Shape 23"/>
+          <p:cNvSpPr/>
+          <p:nvPr/>
+        </p:nvSpPr>
+        <p:spPr>
+          <a:xfrm>
+            <a:off x="3621227" y="91440"/>
+            <a:ext cx="3749294" cy="274320"/>
+          </a:xfrm>
+          <a:prstGeom prst="rect">
+            <a:avLst/>
+          </a:prstGeom>
+          <a:solidFill>
+            <a:srgbClr val="E0F2FE"/>
+          </a:solidFill>
+          <a:ln w="12700">
+            <a:solidFill>
+              <a:srgbClr val="0369A1"/>
+            </a:solidFill>
+            <a:prstDash val="solid"/>
+          </a:ln>
+        </p:spPr>
+      </p:sp>
+      <p:sp>
+        <p:nvSpPr>
+          <p:cNvPr id="27" name="Shape 24"/>
+          <p:cNvSpPr/>
+          <p:nvPr/>
+        </p:nvSpPr>
+        <p:spPr>
+          <a:xfrm>
+            <a:off x="3621227" y="91440"/>
+            <a:ext cx="73152" cy="274320"/>
+          </a:xfrm>
+          <a:prstGeom prst="rect">
+            <a:avLst/>
+          </a:prstGeom>
+          <a:solidFill>
+            <a:srgbClr val="0369A1"/>
+          </a:solidFill>
+          <a:ln w="12700">
+            <a:solidFill>
+              <a:srgbClr val="0369A1"/>
+            </a:solidFill>
+            <a:prstDash val="solid"/>
+          </a:ln>
+        </p:spPr>
+      </p:sp>
+      <p:pic>
+        <p:nvPicPr>
+          <p:cNvPr id="28" name="Image 1" descr="preencoded.png">    </p:cNvPr>
+          <p:cNvPicPr>
+            <a:picLocks noChangeAspect="1"/>
+          </p:cNvPicPr>
+          <p:nvPr/>
+        </p:nvPicPr>
+        <p:blipFill>
+          <a:blip r:embed="rId2"/>
+          <a:stretch>
+            <a:fillRect/>
+          </a:stretch>
+        </p:blipFill>
+        <p:spPr>
+          <a:xfrm>
+            <a:off x="3749243" y="128016"/>
+            <a:ext cx="201168" cy="201168"/>
+          </a:xfrm>
+          <a:prstGeom prst="rect">
+            <a:avLst/>
+          </a:prstGeom>
+        </p:spPr>
+      </p:pic>
+      <p:sp>
+        <p:nvSpPr>
+          <p:cNvPr id="29" name="Text 25"/>
+          <p:cNvSpPr txBox="1"/>
+          <p:nvPr/>
+        </p:nvSpPr>
+        <p:spPr>
+          <a:xfrm>
+            <a:off x="4005275" y="91440"/>
+            <a:ext cx="3328670" cy="274320"/>
+          </a:xfrm>
+          <a:prstGeom prst="rect">
+            <a:avLst/>
+          </a:prstGeom>
+          <a:noFill/>
+          <a:ln/>
+        </p:spPr>
+        <p:txBody>
+          <a:bodyPr wrap="square" lIns="0" tIns="0" rIns="0" bIns="0" rtlCol="0" anchor="ctr"/>
+          <a:lstStyle/>
+          <a:p>
+            <a:pPr indent="0" marL="0">
+              <a:buNone/>
+            </a:pPr>
+            <a:r>
+              <a:rPr lang="en-US" sz="1100" b="1" dirty="0">
+                <a:solidFill>
+                  <a:srgbClr val="075985"/>
+                </a:solidFill>
+                <a:latin typeface="Calibri" pitchFamily="34" charset="0"/>
+                <a:ea typeface="Calibri" pitchFamily="34" charset="-122"/>
+                <a:cs typeface="Calibri" pitchFamily="34" charset="-120"/>
+              </a:rPr>
+              <a:t>UNDERSTAND NOW</a:t>
+            </a:r>
+            <a:pPr indent="0" marL="0">
+              <a:buNone/>
+            </a:pPr>
+            <a:r>
+              <a:rPr lang="en-US" sz="1100" dirty="0">
+                <a:solidFill>
+                  <a:srgbClr val="075985"/>
+                </a:solidFill>
+                <a:latin typeface="Calibri" pitchFamily="34" charset="0"/>
+                <a:ea typeface="Calibri" pitchFamily="34" charset="-122"/>
+                <a:cs typeface="Calibri" pitchFamily="34" charset="-120"/>
+              </a:rPr>
+              <a:t> · address, value, load, store</a:t>
+            </a:r>
+            <a:endParaRPr lang="en-US" sz="1100" dirty="0"/>
+          </a:p>
+        </p:txBody>
+      </p:sp>
+      <p:sp>
+        <p:nvSpPr>
           <p:cNvPr id="25" name="Slide Number Placeholder 0"/>
           <p:cNvSpPr>
             <a:spLocks noGrp="1"/>
@@ -20995,6 +23380,133 @@
       </p:graphicFrame>
       <p:sp>
         <p:nvSpPr>
+          <p:cNvPr id="4" name="Shape 1"/>
+          <p:cNvSpPr/>
+          <p:nvPr/>
+        </p:nvSpPr>
+        <p:spPr>
+          <a:xfrm>
+            <a:off x="8287715" y="91440"/>
+            <a:ext cx="3355340" cy="274320"/>
+          </a:xfrm>
+          <a:prstGeom prst="rect">
+            <a:avLst/>
+          </a:prstGeom>
+          <a:solidFill>
+            <a:srgbClr val="E0F2FE"/>
+          </a:solidFill>
+          <a:ln w="12700">
+            <a:solidFill>
+              <a:srgbClr val="0369A1"/>
+            </a:solidFill>
+            <a:prstDash val="solid"/>
+          </a:ln>
+        </p:spPr>
+      </p:sp>
+      <p:sp>
+        <p:nvSpPr>
+          <p:cNvPr id="5" name="Shape 2"/>
+          <p:cNvSpPr/>
+          <p:nvPr/>
+        </p:nvSpPr>
+        <p:spPr>
+          <a:xfrm>
+            <a:off x="8287715" y="91440"/>
+            <a:ext cx="73152" cy="274320"/>
+          </a:xfrm>
+          <a:prstGeom prst="rect">
+            <a:avLst/>
+          </a:prstGeom>
+          <a:solidFill>
+            <a:srgbClr val="0369A1"/>
+          </a:solidFill>
+          <a:ln w="12700">
+            <a:solidFill>
+              <a:srgbClr val="0369A1"/>
+            </a:solidFill>
+            <a:prstDash val="solid"/>
+          </a:ln>
+        </p:spPr>
+      </p:sp>
+      <p:pic>
+        <p:nvPicPr>
+          <p:cNvPr id="6" name="Image 0" descr="preencoded.png">    </p:cNvPr>
+          <p:cNvPicPr>
+            <a:picLocks noChangeAspect="1"/>
+          </p:cNvPicPr>
+          <p:nvPr/>
+        </p:nvPicPr>
+        <p:blipFill>
+          <a:blip r:embed="rId1"/>
+          <a:stretch>
+            <a:fillRect/>
+          </a:stretch>
+        </p:blipFill>
+        <p:spPr>
+          <a:xfrm>
+            <a:off x="8415731" y="128016"/>
+            <a:ext cx="201168" cy="201168"/>
+          </a:xfrm>
+          <a:prstGeom prst="rect">
+            <a:avLst/>
+          </a:prstGeom>
+        </p:spPr>
+      </p:pic>
+      <p:sp>
+        <p:nvSpPr>
+          <p:cNvPr id="7" name="Text 3"/>
+          <p:cNvSpPr txBox="1"/>
+          <p:nvPr/>
+        </p:nvSpPr>
+        <p:spPr>
+          <a:xfrm>
+            <a:off x="8671763" y="91440"/>
+            <a:ext cx="2934716" cy="274320"/>
+          </a:xfrm>
+          <a:prstGeom prst="rect">
+            <a:avLst/>
+          </a:prstGeom>
+          <a:noFill/>
+          <a:ln/>
+        </p:spPr>
+        <p:txBody>
+          <a:bodyPr wrap="square" lIns="0" tIns="0" rIns="0" bIns="0" rtlCol="0" anchor="ctr"/>
+          <a:lstStyle/>
+          <a:p>
+            <a:pPr indent="0" marL="0">
+              <a:buNone/>
+            </a:pPr>
+            <a:r>
+              <a:rPr lang="en-US" sz="1100" b="1" dirty="0">
+                <a:solidFill>
+                  <a:srgbClr val="075985"/>
+                </a:solidFill>
+                <a:latin typeface="Calibri" pitchFamily="34" charset="0"/>
+                <a:ea typeface="Calibri" pitchFamily="34" charset="-122"/>
+                <a:cs typeface="Calibri" pitchFamily="34" charset="-120"/>
+              </a:rPr>
+              <a:t>UNDERSTAND NOW</a:t>
+            </a:r>
+            <a:pPr indent="0" marL="0">
+              <a:buNone/>
+            </a:pPr>
+            <a:r>
+              <a:rPr lang="en-US" sz="1100" dirty="0">
+                <a:solidFill>
+                  <a:srgbClr val="075985"/>
+                </a:solidFill>
+                <a:latin typeface="Calibri" pitchFamily="34" charset="0"/>
+                <a:ea typeface="Calibri" pitchFamily="34" charset="-122"/>
+                <a:cs typeface="Calibri" pitchFamily="34" charset="-120"/>
+              </a:rPr>
+              <a:t> · the base instructions</a:t>
+            </a:r>
+            <a:endParaRPr lang="en-US" sz="1100" dirty="0"/>
+          </a:p>
+        </p:txBody>
+      </p:sp>
+      <p:sp>
+        <p:nvSpPr>
           <p:cNvPr id="25" name="Slide Number Placeholder 0"/>
           <p:cNvSpPr>
             <a:spLocks noGrp="1"/>
@@ -22580,6 +25092,133 @@
           </a:graphicData>
         </a:graphic>
       </p:graphicFrame>
+      <p:sp>
+        <p:nvSpPr>
+          <p:cNvPr id="4" name="Shape 1"/>
+          <p:cNvSpPr/>
+          <p:nvPr/>
+        </p:nvSpPr>
+        <p:spPr>
+          <a:xfrm>
+            <a:off x="8419033" y="91440"/>
+            <a:ext cx="3224022" cy="274320"/>
+          </a:xfrm>
+          <a:prstGeom prst="rect">
+            <a:avLst/>
+          </a:prstGeom>
+          <a:solidFill>
+            <a:srgbClr val="E0F2FE"/>
+          </a:solidFill>
+          <a:ln w="12700">
+            <a:solidFill>
+              <a:srgbClr val="0369A1"/>
+            </a:solidFill>
+            <a:prstDash val="solid"/>
+          </a:ln>
+        </p:spPr>
+      </p:sp>
+      <p:sp>
+        <p:nvSpPr>
+          <p:cNvPr id="5" name="Shape 2"/>
+          <p:cNvSpPr/>
+          <p:nvPr/>
+        </p:nvSpPr>
+        <p:spPr>
+          <a:xfrm>
+            <a:off x="8419033" y="91440"/>
+            <a:ext cx="73152" cy="274320"/>
+          </a:xfrm>
+          <a:prstGeom prst="rect">
+            <a:avLst/>
+          </a:prstGeom>
+          <a:solidFill>
+            <a:srgbClr val="0369A1"/>
+          </a:solidFill>
+          <a:ln w="12700">
+            <a:solidFill>
+              <a:srgbClr val="0369A1"/>
+            </a:solidFill>
+            <a:prstDash val="solid"/>
+          </a:ln>
+        </p:spPr>
+      </p:sp>
+      <p:pic>
+        <p:nvPicPr>
+          <p:cNvPr id="6" name="Image 0" descr="preencoded.png">    </p:cNvPr>
+          <p:cNvPicPr>
+            <a:picLocks noChangeAspect="1"/>
+          </p:cNvPicPr>
+          <p:nvPr/>
+        </p:nvPicPr>
+        <p:blipFill>
+          <a:blip r:embed="rId1"/>
+          <a:stretch>
+            <a:fillRect/>
+          </a:stretch>
+        </p:blipFill>
+        <p:spPr>
+          <a:xfrm>
+            <a:off x="8547049" y="128016"/>
+            <a:ext cx="201168" cy="201168"/>
+          </a:xfrm>
+          <a:prstGeom prst="rect">
+            <a:avLst/>
+          </a:prstGeom>
+        </p:spPr>
+      </p:pic>
+      <p:sp>
+        <p:nvSpPr>
+          <p:cNvPr id="7" name="Text 3"/>
+          <p:cNvSpPr txBox="1"/>
+          <p:nvPr/>
+        </p:nvSpPr>
+        <p:spPr>
+          <a:xfrm>
+            <a:off x="8803081" y="91440"/>
+            <a:ext cx="2803398" cy="274320"/>
+          </a:xfrm>
+          <a:prstGeom prst="rect">
+            <a:avLst/>
+          </a:prstGeom>
+          <a:noFill/>
+          <a:ln/>
+        </p:spPr>
+        <p:txBody>
+          <a:bodyPr wrap="square" lIns="0" tIns="0" rIns="0" bIns="0" rtlCol="0" anchor="ctr"/>
+          <a:lstStyle/>
+          <a:p>
+            <a:pPr indent="0" marL="0">
+              <a:buNone/>
+            </a:pPr>
+            <a:r>
+              <a:rPr lang="en-US" sz="1100" b="1" dirty="0">
+                <a:solidFill>
+                  <a:srgbClr val="075985"/>
+                </a:solidFill>
+                <a:latin typeface="Calibri" pitchFamily="34" charset="0"/>
+                <a:ea typeface="Calibri" pitchFamily="34" charset="-122"/>
+                <a:cs typeface="Calibri" pitchFamily="34" charset="-120"/>
+              </a:rPr>
+              <a:t>UNDERSTAND NOW</a:t>
+            </a:r>
+            <a:pPr indent="0" marL="0">
+              <a:buNone/>
+            </a:pPr>
+            <a:r>
+              <a:rPr lang="en-US" sz="1100" dirty="0">
+                <a:solidFill>
+                  <a:srgbClr val="075985"/>
+                </a:solidFill>
+                <a:latin typeface="Calibri" pitchFamily="34" charset="0"/>
+                <a:ea typeface="Calibri" pitchFamily="34" charset="-122"/>
+                <a:cs typeface="Calibri" pitchFamily="34" charset="-120"/>
+              </a:rPr>
+              <a:t> · pseudo-instructions</a:t>
+            </a:r>
+            <a:endParaRPr lang="en-US" sz="1100" dirty="0"/>
+          </a:p>
+        </p:txBody>
+      </p:sp>
       <p:sp>
         <p:nvSpPr>
           <p:cNvPr id="25" name="Slide Number Placeholder 0"/>

--- a/en/slides/02-Computer_Architecture-First_Contact_with_RISC-V_Assembly.pptx
+++ b/en/slides/02-Computer_Architecture-First_Contact_with_RISC-V_Assembly.pptx
@@ -123,26 +123,26 @@
   <p:extLst>
     <p:ext uri="{521415D9-36F7-43E2-AB2F-B90AF26B5E84}">
       <p14:sectionLst xmlns:p14="http://schemas.microsoft.com/office/powerpoint/2010/main">
-        <p14:section name="Opening" id="{9294287b-2c89-3184-0768-aa35baa74bed}">
+        <p14:section name="Opening" id="{04c64692-c87c-1833-d59d-803abe57e6e3}">
           <p14:sldIdLst>
             <p14:sldId id="256"/>
             <p14:sldId id="257"/>
           </p14:sldIdLst>
         </p14:section>
-        <p14:section name="The machine" id="{b8d38fc7-c8f3-0225-5962-75aaf7131914}">
+        <p14:section name="The machine" id="{bafde92e-0d36-8dcb-8f9b-b926ba0b10fe}">
           <p14:sldIdLst>
             <p14:sldId id="258"/>
             <p14:sldId id="259"/>
             <p14:sldId id="260"/>
           </p14:sldIdLst>
         </p14:section>
-        <p14:section name="Your first cartridge" id="{7c8ba8b8-44ed-1083-1c93-7286f65752de}">
+        <p14:section name="Your first cartridge" id="{1a6ac1b0-995c-0abf-b0da-c83603472caa}">
           <p14:sldIdLst>
             <p14:sldId id="261"/>
             <p14:sldId id="262"/>
           </p14:sldIdLst>
         </p14:section>
-        <p14:section name="Reading what you wrote" id="{ac0f44cc-3462-8508-f3f7-2aae209b440f}">
+        <p14:section name="Reading what you wrote" id="{7fd30a14-c174-a2ba-f514-2f1edd8efc07}">
           <p14:sldIdLst>
             <p14:sldId id="263"/>
             <p14:sldId id="264"/>
@@ -151,7 +151,7 @@
             <p14:sldId id="267"/>
           </p14:sldIdLst>
         </p14:section>
-        <p14:section name="What comes next" id="{294f027b-8176-402c-d707-593113daa329}">
+        <p14:section name="What comes next" id="{5c5f8063-a51e-8709-34d1-ba6bb37395b4}">
           <p14:sldIdLst>
             <p14:sldId id="268"/>
             <p14:sldId id="269"/>
@@ -1734,7 +1734,7 @@
               <a:rPr lang="en-US" dirty="0"/>
               <a:t>Why save ra? The instruction call writes into ra the address to return to. But the function you call may make calls of its own, and each of them overwrites ra. So a function that calls another must first save its own ra in memory: it lowers sp by 16 to make room, the stack frame, and stores ra at 12(sp). After the call it does the reverse. The drawing shows the frame: the stack grows towards lower addresses. Forgetting this pair of operations is the classic first bug: the function returns to the wrong place.
 UNDERSTAND NOW: why ra is saved. UNDERSTAND LATER: the stack (studied in Lecture 18).
-For the lecturer: The convention requires sp to stay 16-byte aligned across calls, which is why the frame is 16 bytes even though only 4 are used. The stack is treated formally in the lectures on memory and on subroutines.</a:t>
+For the lecturer: The convention requires sp to stay 16-byte aligned across calls, which is why the frame is 16 bytes even though only 4 are used. The stack, with push and pop, is treated formally in Lecture 18.</a:t>
             </a:r>
             <a:endParaRPr lang="en-US" dirty="0"/>
           </a:p>

--- a/en/slides/02-Computer_Architecture-First_Contact_with_RISC-V_Assembly.pptx
+++ b/en/slides/02-Computer_Architecture-First_Contact_with_RISC-V_Assembly.pptx
@@ -123,26 +123,26 @@
   <p:extLst>
     <p:ext uri="{521415D9-36F7-43E2-AB2F-B90AF26B5E84}">
       <p14:sectionLst xmlns:p14="http://schemas.microsoft.com/office/powerpoint/2010/main">
-        <p14:section name="Opening" id="{04c64692-c87c-1833-d59d-803abe57e6e3}">
+        <p14:section name="Opening" id="{524e5298-06f0-f541-0919-6c86e1c033d3}">
           <p14:sldIdLst>
             <p14:sldId id="256"/>
             <p14:sldId id="257"/>
           </p14:sldIdLst>
         </p14:section>
-        <p14:section name="The machine" id="{bafde92e-0d36-8dcb-8f9b-b926ba0b10fe}">
+        <p14:section name="The machine" id="{53d5ccb3-342b-0936-bcab-48aa5a2848e9}">
           <p14:sldIdLst>
             <p14:sldId id="258"/>
             <p14:sldId id="259"/>
             <p14:sldId id="260"/>
           </p14:sldIdLst>
         </p14:section>
-        <p14:section name="Your first cartridge" id="{1a6ac1b0-995c-0abf-b0da-c83603472caa}">
+        <p14:section name="Your first cartridge" id="{dcbee4dd-011b-1323-3725-2402edcecd95}">
           <p14:sldIdLst>
             <p14:sldId id="261"/>
             <p14:sldId id="262"/>
           </p14:sldIdLst>
         </p14:section>
-        <p14:section name="Reading what you wrote" id="{7fd30a14-c174-a2ba-f514-2f1edd8efc07}">
+        <p14:section name="Reading what you wrote" id="{7e85c99b-b8cc-1daf-7a9c-3d91dbd69610}">
           <p14:sldIdLst>
             <p14:sldId id="263"/>
             <p14:sldId id="264"/>
@@ -151,7 +151,7 @@
             <p14:sldId id="267"/>
           </p14:sldIdLst>
         </p14:section>
-        <p14:section name="What comes next" id="{5c5f8063-a51e-8709-34d1-ba6bb37395b4}">
+        <p14:section name="What comes next" id="{38229497-29bf-018e-4290-7ff5ab891ac3}">
           <p14:sldIdLst>
             <p14:sldId id="268"/>
             <p14:sldId id="269"/>
@@ -564,7 +564,7 @@
           <a:p>
             <a:r>
               <a:rPr lang="en-US" dirty="0"/>
-              <a:t>This is the first lecture in which you write a program, and it comes before any theory on purpose. In two hours you build four small cartridges, each a complete program that runs. You will not understand every detail today, and you are not expected to: the aim is to see registers, memory and a function call at work, so that the lectures that follow have something concrete to explain. The quotation sets the tone: less talk, more code.
+              <a:t>This is the first lecture in which a program is written, and it deliberately precedes any theory. Over two hours the student builds four small cartridges, each a complete program that runs. Full understanding of every detail is neither expected nor required today. The aim is to observe registers, memory and a procedure call at work, so that the lectures that follow have concrete phenomena to explain. The epigraph sets the register of the session: fewer words, more code.
 Learning status: UNDERSTAND NOW, by the end of this lecture you explain it, trace it and apply it on your own; USE NOW, you follow and use the recipe today; how it works inside is explained later, or is not part of the course; UNDERSTAND LATER, recognise the name and what it is for; a later lecture explains it. A slide without a badge is context: a story, an example, a question, an exercise.
 Learning status of this lecture. UNDERSTAND NOW: registers, compute, move, jump; registers; the init, update, draw contract; arguments in a0 to a7; why ra is saved; address, value, load, store; the base instructions; pseudo-instructions; an instruction is a number; tracing by hand. USE NOW: the calling convention (Lecture 18); bit masks (Lecture 08) and, used without being studied in this course, the assembler directives, the PRG32 tools, the PRG32 runtime calls, the PRG32-QT debugger, the complete program. UNDERSTAND LATER: the stack (Lecture 18); addressing modes (Lecture 19); instruction formats (Lecture 19); hexadecimal (Lecture 04); two's complement (Lecture 05); fixed point (Lecture 06); Boolean algebra (Lecture 08); the adder (Lecture 09); from volts to bits (Lecture 10); latches and flip-flops (Lecture 13); the processor cycle (Lecture 19); the Verm1 project (Lecture 07). A slide without a badge is context: a story, an example, a question, an exercise.
 For the lecturer: New lecture for 2026/27. It is the 'play' turn of the spiral for the whole first half of the course: every later lecture points back to something typed here. The four steps are the verified steps of the textbook lab 05-asm-first-contact; run them live (labs/run.sh 05-asm-first-contact/stepN_....S first).</a:t>
@@ -655,7 +655,7 @@
           <a:p>
             <a:r>
               <a:rPr lang="en-US" dirty="0"/>
-              <a:t>An instruction is a number. addi t1, t1, 1 is the 32-bit word 0x00130313, and the coloured strip shows its fields: twelve bits for the constant 1, five for the source register (t1 is register number 6), three that say "add", five for the destination, seven for the kind of instruction. You do not need to learn the format now. Keep the idea: assembly is a readable spelling of machine code, and the processor reads these fields with circuits that you will learn to design.
+              <a:t>An instruction is a number. addi t1, t1, 1 is the 32-bit word 0x00130313, and the coloured strip shows its fields: twelve bits for the constant 1, five for the source register (t1 is register number 6), three that select the addition, five for the destination register and seven for the opcode, which identifies the class of instruction. The format need not be memorised now; it is the subject of Lecture 19. What matters today is the principle: assembly is a readable notation for machine code, and an instruction stored in memory is data like any other. This is the stored-program idea that the next lecture places in its historical context.
 UNDERSTAND NOW: an instruction is a number. UNDERSTAND LATER: instruction formats (studied in Lecture 19).
 For the lecturer: Check: 0000 0000 0001 | 00110 | 000 | 00110 | 0010011 = 0000 0000 0001 0011 0000 0011 0001 0011 = 0x00130313. Do not explain the formats now; the point is only that an instruction is data. Lecture 04 (digital information) and the lectures on the processor come back to this slide.</a:t>
             </a:r>
@@ -745,7 +745,7 @@
           <a:p>
             <a:r>
               <a:rPr lang="en-US" dirty="0"/>
-              <a:t>PRG32-QT runs the same cartridge on your laptop and can stop between any two instructions, showing every register. Use it now on the third step: go to update, pause, and execute the four instructions of first_update one at a time, watching t0 and t1. Before each press, say aloud what will change. The last line is a rule to remember: the board tells the truth about time, PRG32-QT tells the truth about a register.
+              <a:t>PRG32-QT executes the same cartridge on the laptop and can halt between any two instructions, displaying every register. It should be used now on the third step: navigate to update, pause, and execute the four instructions of first_update one at a time while observing t0 and t1. Before each step, the expected change should be stated aloud; a prediction made explicit is a prediction that can be wrong, and therefore informative. The final line is a principle worth retaining: the board is the authority on time, PRG32-QT the authority on the content of a register.
 USE NOW: the PRG32-QT debugger (used, not studied, in this course).
 For the lecturer: Demonstrate live: load step 3, break at first_update, single-step four times. Ask the students to predict each register before pressing the key.</a:t>
             </a:r>
@@ -835,7 +835,7 @@
           <a:p>
             <a:r>
               <a:rPr lang="en-US" dirty="0"/>
-              <a:t>A trace by hand: for each frame, write what each instruction leaves in t1 and in memory. In the first frames nothing surprising happens. Look at the highlighted row: at frame 256 the counter becomes 256, yet the width of the bar is 0, because andi with 255 keeps only the low eight bits, and 256 in binary is a one followed by eight zeros. Tracing by hand is slow and unglamorous, and it is the most useful debugging skill you will learn in this course.
+              <a:t>A trace by hand records, frame by frame, what each instruction leaves in t1 and in memory. The early frames hold no surprise. The highlighted row does: at frame 256 the counter reaches 256 and yet the width of the bar is 0, because andi with 255 retains only the eight least significant bits, and 256 in binary is a one followed by eight zeros. The mask operation thus computes the remainder modulo 256, a fact used today and explained in Lecture 08. Tracing by hand is slow and unglamorous, and it is the most valuable debugging skill this course teaches.
 UNDERSTAND NOW: tracing by hand.
 For the lecturer: The by-hand trace is the most valuable debugging skill of the course. 256 = 1 0000 0000 in binary: the low eight bits are all zero, so the bar restarts.</a:t>
             </a:r>
@@ -925,7 +925,7 @@
           <a:p>
             <a:r>
               <a:rPr lang="en-US" dirty="0"/>
-              <a:t>Each row is something you saw today, the question it raises and where the answer is. Why hexadecimal? Lectures 04 and 05. How does a register hold a negative number? Lecture 05. What does AND do to thirty-two bits at once? Lectures 08 and 09. How does a circuit remember a bit? Lectures 13 and 15. How is 0x00130313 decoded and executed? Lectures 18 and 19. The last row is the project: from three functions and a rectangle, a whole game. Keep this table: it is the map of the course seen from your own program.
+              <a:t>Each row of the table records something observed today, the question it raises, and the lecture that answers it. Why hexadecimal? Lectures 04 and 05. How does a register hold a negative number? Lecture 05. What does AND do to thirty-two bits at once? Lectures 08 and 09. How does a circuit remember a bit? Lectures 13 and 15. How is 0x00130313 decoded and executed? Lectures 18 and 19. The last row is the project: from three functions and a rectangle to a complete game. The table is the map of the course drawn from the student's own program, and it is worth keeping at hand.
 UNDERSTAND LATER: hexadecimal (studied in Lecture 04); two's complement (studied in Lecture 05); fixed point (studied in Lecture 06); Boolean algebra (studied in Lecture 08); the adder (studied in Lecture 09); from volts to bits (studied in Lecture 10); latches and flip-flops (studied in Lecture 13); the processor cycle (studied in Lecture 19); the Verm1 project (studied in Lecture 07).
 For the lecturer: This is the forward map of the course. Keep a copy: each later deck opens by pointing at one of these rows. The last row is the project: Verm1 starts in Lecture 07 from exactly the skeleton of today.</a:t>
             </a:r>
@@ -1015,8 +1015,8 @@
           <a:p>
             <a:r>
               <a:rPr lang="en-US" dirty="0"/>
-              <a:t>Apply the distinction between address and value. la loads the address of the label into t0; lw then uses t0 to find the location and copies its content into t1, without changing t0. So t0 still holds the address. If you chose "the value", go back to the slide with the two arrows.
-The key is what call does: it writes the return address into ra. If your function has to return to its own caller afterwards, it needs the old ra, which the call has just overwritten. a0 is meant to be overwritten, sp is restored by the callee, and t0 is a temporary that nobody promised to keep.
+              <a:t>The first question tests the distinction between address and value. la loads the address of the label into t0; lw then uses t0 to locate the word and copies its content into t1, leaving t0 unchanged. t0 therefore still holds the address. Anyone who chose "the value" should return to the slide with the two arrows.
+The second question turns on the effect of call, which writes the return address into ra. A function that must later return to its own caller needs its original ra, which the call has just overwritten. a0 is intended to be overwritten, sp is restored by the callee, and t0 is a temporary that no one has undertaken to preserve.
 For the lecturer: 1. Answer: B. la loads the address of the label; lw then reads the value stored at that address into t1.
 2. Answer: C. call writes the return address in ra. The callee's own calls would overwrite it, so a non-leaf function saves ra on the stack and restores it before ret.</a:t>
             </a:r>
@@ -1106,7 +1106,7 @@
           <a:p>
             <a:r>
               <a:rPr lang="en-US" dirty="0"/>
-              <a:t>Do the calculation in binary. 300 is 256 + 44, that is a one in position 8 followed by the eight bits of 44. The mask 255 is eight ones: AND keeps the low eight bits and clears the rest. What remains is 44. Subtracting 255 from 300 gives 45, a tempting wrong answer: AND is not a subtraction.
+              <a:t>The calculation is best done in binary. 300 equals 256 + 44: a one in bit position 8 followed by the eight bits of 44. The mask 255 consists of eight ones, so the AND retains the eight least significant bits and clears all others. The result is 44. Subtracting 255 from 300 yields 45, a plausible but wrong answer: a bitwise AND is not a subtraction, and the distinction between arithmetic and logical operations on the same bits recurs throughout the course.
 For the lecturer: Answer: D. 300 = 256 + 44 = 1 0010 1100 in binary. AND with 1111 1111 keeps the low eight bits: 0010 1100 = 44.</a:t>
             </a:r>
             <a:endParaRPr lang="en-US" dirty="0"/>
@@ -1195,7 +1195,7 @@
           <a:p>
             <a:r>
               <a:rPr lang="en-US" dirty="0"/>
-              <a:t>Twelve terms of this lecture, with the Italian used in class. Load and store are always seen from the processor: load brings a value from memory into a register, store sends it back. An immediate is a constant written inside the instruction itself. A branch is a jump that is taken only if a condition holds. The calling convention is the agreement on the roles of the registers.
+              <a:t>Twelve terms of the lecture, with the Italian used in class. Load and store are always named from the processor's point of view: a load brings a value from memory into a register, a store sends it back. An immediate is a constant encoded within the instruction itself. A branch is a jump taken only if a condition holds. The calling convention is the agreement governing the roles of the registers across procedure calls.
 For the lecturer: The course is taught in Italian; slides, notes and textbook exist in English and in Italian, and the technical documentation of PRG32 is in English. This table is repeated, topic by topic, in every deck.</a:t>
             </a:r>
             <a:endParaRPr lang="en-US" dirty="0"/>
@@ -1284,7 +1284,7 @@
           <a:p>
             <a:r>
               <a:rPr lang="en-US" dirty="0"/>
-              <a:t>Four sentences contain the lecture. A RISC-V processor is thirty-two registers and a small set of instructions that compute, move and jump. A PRG32 game is three functions, with arguments in a0 to a7, and a function that calls another saves ra. Variables live in memory: la for the address, lw and sw for the value. An instruction is a 32-bit number, and assembly is its readable spelling. The next lecture steps back and tells the history that led to this machine.
+              <a:t>Four propositions summarise the lecture. A RISC-V processor consists of thirty-two registers and a small set of instructions that compute, move data and alter control flow. A PRG32 game consists of three functions; arguments travel in a0 to a7, and a function that calls another must save ra. Variables reside in memory: la yields the address, lw and sw the value. An instruction is a 32-bit number, and assembly is its readable notation. The next lecture steps back to trace the history that produced this machine.
 Learning status, recap. UNDERSTAND NOW: registers, compute, move, jump; registers; the init, update, draw contract; arguments in a0 to a7; why ra is saved; address, value, load, store; the base instructions; pseudo-instructions; an instruction is a number; tracing by hand. USE NOW: the calling convention (Lecture 18); bit masks (Lecture 08) and, used without being studied in this course, the assembler directives, the PRG32 tools, the PRG32 runtime calls, the PRG32-QT debugger, the complete program. UNDERSTAND LATER: the stack (Lecture 18); addressing modes (Lecture 19); instruction formats (Lecture 19); hexadecimal (Lecture 04); two's complement (Lecture 05); fixed point (Lecture 06); Boolean algebra (Lecture 08); the adder (Lecture 09); from volts to bits (Lecture 10); latches and flip-flops (Lecture 13); the processor cycle (Lecture 19); the Verm1 project (Lecture 07). A slide without a badge is context: a story, an example, a question, an exercise.
 For the lecturer: Next lecture: the history that led to this machine.</a:t>
             </a:r>
@@ -1374,7 +1374,7 @@
           <a:p>
             <a:r>
               <a:rPr lang="en-US" dirty="0"/>
-              <a:t>Six things you will be able to do at the end. The first four are practical: build and run a cartridge, name the registers, call a function with its arguments, keep a value in memory between frames. The fifth is a change of point of view: an instruction is a 32-bit number. The sixth is the most important for the course: you will leave with a list of questions, and each of them is the subject of a later lecture.
+              <a:t>Six learning outcomes. The first four are operational: building and running a cartridge, naming the registers, calling a function with its arguments, and preserving a value in memory between frames. The fifth is a change of perspective with lasting consequences: an instruction is a 32-bit number. The sixth is the most important for the course as a whole: the student leaves with a list of questions, each of which is the subject of a later lecture. Today's lecture is therefore as much an inventory of problems as a body of answers.
 For the lecturer: Tell the students explicitly that they are not expected to understand everything today. Today is for seeing; the next lectures are for explaining.</a:t>
             </a:r>
             <a:endParaRPr lang="en-US" dirty="0"/>
@@ -1463,7 +1463,7 @@
           <a:p>
             <a:r>
               <a:rPr lang="en-US" dirty="0"/>
-              <a:t>The whole machine in four cards. There are 32 registers, each holding one 32-bit value, and the processor can compute only on what is in them. There are three kinds of instruction. Compute: arithmetic and logic between registers, such as add or addi. Move: transfers between a register and memory, lw to load a word and sw to store one; nothing else touches memory. Jump: changes of the instruction that runs next. Everything a computer does is a long sequence of these three kinds.
+              <a:t>The whole machine is described by four cards. There are 32 registers, each holding a 32-bit value, and the processor can operate only on values held in registers. Instructions fall into three classes. Compute: arithmetic and logical operations between registers, such as add or addi. Move: transfers between a register and memory, lw to load a word and sw to store one; no other instruction accesses memory. Jump: instructions that alter which instruction executes next. This is the load-store discipline of RISC-V, and every computation a computer performs is a long sequence of these three kinds.
 UNDERSTAND NOW: registers, compute, move, jump.
 For the lecturer: That is very nearly the whole machine. The richness of computing comes not from a large instruction set but from combining a small one in long sequences.</a:t>
             </a:r>
@@ -1553,7 +1553,7 @@
           <a:p>
             <a:r>
               <a:rPr lang="en-US" dirty="0"/>
-              <a:t>The registers have names that say how they are used. a0 to a7 carry the arguments of a call, and a0 carries the result back. t0 to t6 are temporaries, free to use and not preserved by a call. s0 to s11 are preserved. ra holds the return address, sp the top of the stack, and zero always reads as 0. Read the caption carefully: these roles are not built into the hardware. They are an agreement, the calling convention, and it is what lets your assembly and the C code of the framework call each other.
+              <a:t>The registers carry names that reflect their use. a0 to a7 pass the arguments of a call, and a0 also returns the result. t0 to t6 are temporaries, freely usable and not preserved across calls. s0 to s11 are preserved across calls. ra holds the return address, sp the top of the stack, and zero always reads as 0. The caption contains the essential point: these roles are not imposed by the hardware, which treats x1 to x31 identically. They are an agreement, the calling convention, and it is this agreement that allows assembly written by the student and C code of the framework to call one another. It is used today and studied formally in Lecture 18.
 UNDERSTAND NOW: registers. USE NOW: the calling convention (studied in Lecture 18).
 For the lecturer: The roles are fixed not by the hardware but by an agreement: the calling convention, or ABI. Following it is what lets your assembly and the framework's C code call each other.</a:t>
             </a:r>
@@ -1643,7 +1643,7 @@
           <a:p>
             <a:r>
               <a:rPr lang="en-US" dirty="0"/>
-              <a:t>The contract with PRG32 is three functions that you write. init is called once, when the cartridge starts, to set up the state. update is called once per frame, to read the input and change the state. draw is called once per frame, to turn the state into a picture. The firmware finds them by name: a prefix chosen by you, followed by _init, _update and _draw. Keep the division of labour in mind from the first day: update decides, draw shows.
+              <a:t>The interface between a game and PRG32 is a contract of three functions supplied by the programmer. init is called once, when the cartridge starts, to establish the initial state. update is called once per frame, to read the input and modify the state. draw is called once per frame, to render the state as an image. The firmware locates them by name: a prefix chosen by the programmer followed by _init, _update and _draw. The separation of responsibilities should be adopted from the first day: update decides, draw displays, and neither does the other's work.
 UNDERSTAND NOW: the init, update, draw contract.</a:t>
             </a:r>
             <a:endParaRPr lang="en-US" dirty="0"/>
@@ -1732,7 +1732,7 @@
           <a:p>
             <a:r>
               <a:rPr lang="en-US" dirty="0"/>
-              <a:t>Why save ra? The instruction call writes into ra the address to return to. But the function you call may make calls of its own, and each of them overwrites ra. So a function that calls another must first save its own ra in memory: it lowers sp by 16 to make room, the stack frame, and stores ra at 12(sp). After the call it does the reverse. The drawing shows the frame: the stack grows towards lower addresses. Forgetting this pair of operations is the classic first bug: the function returns to the wrong place.
+              <a:t>Why must ra be saved? The instruction call writes into ra the address to which control must return. The callee, however, may itself make calls, each of which overwrites ra. A function that calls another must therefore first preserve its own return address in memory: it decrements sp by 16 to reserve space, the stack frame, and stores ra at 12(sp); after the call it performs the inverse operations. The diagram shows the frame, with the stack growing towards lower addresses; the 16-byte size follows from the alignment that the convention requires of sp. Omitting this pair of operations is the classic first error: the function returns to the wrong place. Why ra is saved must be understood today; the stack as a data structure is treated formally in Lecture 18.
 UNDERSTAND NOW: why ra is saved. UNDERSTAND LATER: the stack (studied in Lecture 18).
 For the lecturer: The convention requires sp to stay 16-byte aligned across calls, which is why the frame is 16 bytes even though only 4 are used. The stack, with push and pop, is treated formally in Lecture 18.</a:t>
             </a:r>
@@ -1822,7 +1822,7 @@
           <a:p>
             <a:r>
               <a:rPr lang="en-US" dirty="0"/>
-              <a:t>This slide separates two ideas that beginners confuse: the address and the value. After la, t0 contains where the counter lives. After lw, t1 contains what is stored there, 41 in the drawing. addi changes the copy in the register to 42, and memory still says 41 until sw writes it back. Follow the two arrows. A practical habit from the box on the right: in your comments, write for every register whether it holds an ADDRESS or a VALUE. It prevents the most common error of the first month.
+              <a:t>This slide separates two notions that beginners routinely conflate: an address and a value. After la, t0 contains where the counter is stored; after lw, t1 contains what is stored there, 41 in the diagram. addi modifies the copy in the register to 42, while memory continues to hold 41 until sw writes the new value back. The two arrows should be followed carefully. The box on the right recommends a habit worth adopting at once: annotate every register in the comments as holding either an ADDRESS or a VALUE. This simple discipline prevents the most frequent error of the first month. The ways in which an instruction can designate its operands, the addressing modes, are studied in Lecture 19.
 UNDERSTAND NOW: address, value, load, store. UNDERSTAND LATER: addressing modes (studied in Lecture 19).
 For the lecturer: A label names a location. la gives the location, lw gives the contents. This is how every variable in every program ultimately works; we return to it formally with addressing modes.</a:t>
             </a:r>
@@ -1912,7 +1912,7 @@
           <a:p>
             <a:r>
               <a:rPr lang="en-US" dirty="0"/>
-              <a:t>Five families cover everything you have typed: arithmetic (add, sub), logic (and, or, xor), the immediate forms that take a small constant (addi, andi), memory (lw, sw) and control (call, ret). In every instruction the result goes in the first register named: add t0, t1, t2 puts t1 + t2 in t0. The base instruction set has about forty instructions, and you have already met a quarter of them.
+              <a:t>Five families account for every instruction written today: arithmetic (add, sub), logical (and, or, xor), immediate forms taking a small constant (addi, andi), memory (lw, sw) and control (call, ret). In every instruction the result is written to the first register named: add t0, t1, t2 places t1 + t2 in t0. The base integer instruction set, RV32I, comprises about forty instructions; a quarter of them have already been used.
 UNDERSTAND NOW: the base instructions.
 For the lecturer: The result goes in the first register. The base RISC-V integer instruction set (RV32I) has about forty instructions; you have already met a quarter of them.</a:t>
             </a:r>
@@ -2002,7 +2002,7 @@
           <a:p>
             <a:r>
               <a:rPr lang="en-US" dirty="0"/>
-              <a:t>Some of the instructions you wrote do not exist in the processor: they are pseudo-instructions, shortcuts that the assembler expands. li t0, 42 becomes addi t0, zero, 42; mv is an addi with 0; ret is a jump to the address in ra; beqz is a comparison with the register zero. Notice how often zero appears in the middle column: a register that is always 0 lets a small instruction set do the work of a larger one.
+              <a:t>Several of the instructions written today do not exist in the hardware: they are pseudo-instructions, notational conveniences that the assembler expands into real instructions. li t0, 42 becomes addi t0, zero, 42; mv is an addi with constant 0; ret is an indirect jump to the address in ra; beqz is a comparison with the register zero. The frequency with which zero appears in the middle column is instructive: a register hard-wired to 0 allows a small instruction set to do the work of a much larger one, a characteristic economy of RISC design.
 UNDERSTAND NOW: pseudo-instructions.
 For the lecturer: A pseudo-instruction is not a separate hardware operation. The register zero is what makes many of them possible: a small instruction set, reused with care.</a:t>
             </a:r>
@@ -3082,7 +3082,7 @@
                 <a:ea typeface="Calibri" pitchFamily="34" charset="-122"/>
                 <a:cs typeface="Calibri" pitchFamily="34" charset="-120"/>
               </a:rPr>
-              <a:t>02-Computer_Architecture-First_Contact_with_RISC-V_Assembly-Code.pptx</a:t>
+              <a:t>02-Computer_Architecture-First_Contact_with_RISC-V_Assembly-Lab.pptx</a:t>
             </a:r>
             <a:endParaRPr lang="en-US" sz="1300" dirty="0"/>
           </a:p>

--- a/en/slides/02-Computer_Architecture-First_Contact_with_RISC-V_Assembly.pptx
+++ b/en/slides/02-Computer_Architecture-First_Contact_with_RISC-V_Assembly.pptx
@@ -126,39 +126,39 @@
   <p:extLst>
     <p:ext uri="{521415D9-36F7-43E2-AB2F-B90AF26B5E84}">
       <p14:sectionLst xmlns:p14="http://schemas.microsoft.com/office/powerpoint/2010/main">
-        <p14:section name="Opening" id="{00bf89b4-8ebb-93c7-4ccf-88ca9d9ea802}">
+        <p14:section name="Opening" id="{c0deced6-d4d7-cebd-d9f9-3743d5b485a8}">
           <p14:sldIdLst>
             <p14:sldId id="256"/>
             <p14:sldId id="257"/>
           </p14:sldIdLst>
         </p14:section>
-        <p14:section name="The machine" id="{c811ebdb-2699-9485-0176-2b3ff4d45754}">
+        <p14:section name="The machine" id="{93e9677b-f8f0-2299-eff8-1c8e79c2dce7}">
           <p14:sldIdLst>
             <p14:sldId id="258"/>
             <p14:sldId id="259"/>
             <p14:sldId id="260"/>
             <p14:sldId id="261"/>
             <p14:sldId id="262"/>
+            <p14:sldId id="263"/>
           </p14:sldIdLst>
         </p14:section>
-        <p14:section name="Your first cartridge" id="{a452e722-52cb-f4bc-be98-45be8b981172}">
+        <p14:section name="Your first cartridge" id="{e0c9c6be-c294-7d28-f3f0-c42b38df86ae}">
           <p14:sldIdLst>
-            <p14:sldId id="263"/>
             <p14:sldId id="264"/>
             <p14:sldId id="265"/>
           </p14:sldIdLst>
         </p14:section>
-        <p14:section name="Reading what you wrote" id="{da60ad07-127d-b209-4d96-78f048155888}">
+        <p14:section name="Reading what you wrote" id="{ab938c26-270f-dea8-9a88-fdff0b020291}">
           <p14:sldIdLst>
             <p14:sldId id="266"/>
             <p14:sldId id="267"/>
             <p14:sldId id="268"/>
             <p14:sldId id="269"/>
-            <p14:sldId id="270"/>
           </p14:sldIdLst>
         </p14:section>
-        <p14:section name="What comes next" id="{fb2d2c20-cd7f-796e-54f6-998f4a6d6640}">
+        <p14:section name="What comes next" id="{7fab3fe2-8324-f812-3691-5f122e347839}">
           <p14:sldIdLst>
+            <p14:sldId id="270"/>
             <p14:sldId id="271"/>
             <p14:sldId id="272"/>
             <p14:sldId id="273"/>
@@ -573,6 +573,7 @@
               <a:t>This is the first lecture in which a program is written, and it deliberately precedes any theory. Over two hours the student builds four small cartridges, each a complete program that runs. Full understanding of every detail is neither expected nor required today. The aim is to observe registers, memory and a procedure call at work, so that the lectures that follow have concrete phenomena to explain. The epigraph sets the register of the session: fewer words, more code.
 Learning status: UNDERSTAND NOW, by the end of this lecture you explain it, trace it and apply it on your own; USE NOW, you follow and use the recipe today; how it works inside is explained later, or is not part of the course; UNDERSTAND LATER, recognise the name and what it is for; a later lecture explains it. A slide without a badge is context: a story, an example, a question, an exercise.
 Learning status of this lecture. UNDERSTAND NOW: registers, compute, move, jump; registers; functions, call and return; the init, update, draw contract; reading a line of assembly; arguments in a0 to a7; why ra is saved; address, value, load, store; the base instructions; pseudo-instructions; an instruction is a number; tracing by hand. USE NOW: hexadecimal (Lecture 04); bit, byte, word (Lecture 04); the calling convention (Lecture 18); bit masks (Lecture 08) and, used without being studied in this course, the assembler directives, the PRG32 tools, the PRG32 runtime calls, the PRG32-QT debugger, the complete program. UNDERSTAND LATER: the stack (Lecture 18); addressing modes (Lecture 19); instruction formats (Lecture 19); two's complement (Lecture 05); fixed point (Lecture 06); Boolean algebra (Lecture 08); the adder (Lecture 09); from volts to bits (Lecture 10); latches and flip-flops (Lecture 13); the processor cycle (Lecture 19); the Verm1 project (Lecture 07). A slide without a badge is context: a story, an example, a question, an exercise.
+Roadmap. Today's outcomes: (1) build and run a cartridge, and say when the runtime calls init, update and draw; (2) read a line of assembly: label, instruction, operands, comment; (3) tell an address from a value, and trace what la, lw, addi and sw leave in registers and memory. Builds on: only what Lecture 01 set up. Next: Lecture 03, History of Computing.
 For the lecturer: New lecture for 2026/27. It is the 'play' turn of the spiral for the whole first half of the course: every later lecture points back to something typed here. The four steps are the verified steps of the textbook lab 05-asm-first-contact; run them live (labs/run.sh 05-asm-first-contact/stepN_....S first).</a:t>
             </a:r>
             <a:endParaRPr lang="en-US" dirty="0"/>
@@ -1021,9 +1022,9 @@
           <a:p>
             <a:r>
               <a:rPr lang="en-US" dirty="0"/>
-              <a:t>PRG32-QT executes the same cartridge on the laptop and can halt between any two instructions, displaying every register. It should be used now on the third step: navigate to update, pause, and execute the four instructions of first_update one at a time while observing t0 and t1. Before each step, the expected change should be stated aloud; a prediction made explicit is a prediction that can be wrong, and therefore informative. The final line is a principle worth retaining: the board is the authority on time, PRG32-QT the authority on the content of a register.
-USE NOW: the PRG32-QT debugger (used, not studied, in this course).
-For the lecturer: Demonstrate live: load step 3, break at first_update, single-step four times. Ask the students to predict each register before pressing the key.</a:t>
+              <a:t>The second checkpoint is a trace by hand: a record, frame by frame, of what each instruction leaves in t1 and in memory. The first two rows are worked out; students fill in the rows marked ? for three minutes, and the answers are then revealed by stepping in PRG32-QT. Frame 256: lw gives 255, addi 256, sw stores 256, and the width is 0. Frame 257: 256, 257, 257 and a width of 1. The surprise is the width: andi with 255 keeps only the eight least significant bits, and 256 in binary is a one followed by eight zeros, so the mask computes the remainder modulo 256, a fact used today and explained in Lecture 08. Students who wrote 256 for the width have traced the counter correctly and forgotten the mask: the most instructive mistake of the day. Tracing by hand is slow and unglamorous, and it is the most valuable debugging skill this course teaches.
+UNDERSTAND NOW: tracing by hand.
+For the lecturer: The by-hand trace is the most valuable debugging skill of the course. Give three minutes to fill in the two rows, then reveal them in PRG32-QT: 255, 256, 256, 0 and 256, 257, 257, 1. 256 = 1 0000 0000 in binary: the low eight bits are all zero, so the bar restarts.</a:t>
             </a:r>
             <a:endParaRPr lang="en-US" dirty="0"/>
           </a:p>
@@ -1111,9 +1112,9 @@
           <a:p>
             <a:r>
               <a:rPr lang="en-US" dirty="0"/>
-              <a:t>A trace by hand records, frame by frame, what each instruction leaves in t1 and in memory. The early frames hold no surprise. The highlighted row does: at frame 256 the counter reaches 256 and yet the width of the bar is 0, because andi with 255 retains only the eight least significant bits, and 256 in binary is a one followed by eight zeros. The mask operation thus computes the remainder modulo 256, a fact used today and explained in Lecture 08. Tracing by hand is slow and unglamorous, and it is the most valuable debugging skill this course teaches.
-UNDERSTAND NOW: tracing by hand.
-For the lecturer: The by-hand trace is the most valuable debugging skill of the course. 256 = 1 0000 0000 in binary: the low eight bits are all zero, so the bar restarts.</a:t>
+              <a:t>This table states what the student is not expected to understand yet. Each row records something observed or used today, the question it raises, and the lecture that answers it. Why hexadecimal? Lectures 04 and 05. How does a register hold a negative number? Lecture 05. What does AND do to thirty-two bits at once? Lectures 08 and 09. How does a circuit remember a bit? Lectures 13 and 15. How is 0x00130313 decoded and executed? Lectures 18 and 19, which also explain the stack frame used in step 2. The last row is the project: from three functions and a rectangle to a complete game. Using these things today without understanding them is not a failure; it is the method of the course, and the table is the map that says when each question will be answered.
+UNDERSTAND LATER: hexadecimal (studied in Lecture 04); two's complement (studied in Lecture 05); fixed point (studied in Lecture 06); Boolean algebra (studied in Lecture 08); the adder (studied in Lecture 09); from volts to bits (studied in Lecture 10); latches and flip-flops (studied in Lecture 13); the processor cycle (studied in Lecture 19); the Verm1 project (studied in Lecture 07).
+For the lecturer: This is the forward map of the course. Keep a copy: each later deck opens by pointing at one of these rows. The last row is the project: Verm1 starts in Lecture 07 from exactly the skeleton of today.</a:t>
             </a:r>
             <a:endParaRPr lang="en-US" dirty="0"/>
           </a:p>
@@ -1201,9 +1202,7 @@
           <a:p>
             <a:r>
               <a:rPr lang="en-US" dirty="0"/>
-              <a:t>Each row of the table records something observed today, the question it raises, and the lecture that answers it. Why hexadecimal? Lectures 04 and 05. How does a register hold a negative number? Lecture 05. What does AND do to thirty-two bits at once? Lectures 08 and 09. How does a circuit remember a bit? Lectures 13 and 15. How is 0x00130313 decoded and executed? Lectures 18 and 19. The last row is the project: from three functions and a rectangle to a complete game. The table is the map of the course drawn from the student's own program, and it is worth keeping at hand.
-UNDERSTAND LATER: hexadecimal (studied in Lecture 04); two's complement (studied in Lecture 05); fixed point (studied in Lecture 06); Boolean algebra (studied in Lecture 08); the adder (studied in Lecture 09); from volts to bits (studied in Lecture 10); latches and flip-flops (studied in Lecture 13); the processor cycle (studied in Lecture 19); the Verm1 project (studied in Lecture 07).
-For the lecturer: This is the forward map of the course. Keep a copy: each later deck opens by pointing at one of these rows. The last row is the project: Verm1 starts in Lecture 07 from exactly the skeleton of today.</a:t>
+              <a:t>The closing map reconstructs the thread of the lecture in five boxes. A cartridge is three functions that the runtime calls: init once, update and draw at every frame. While the program computes, values are in registers. Between frames they live in memory, at addresses, as variables. The pattern la, lw, addi, sw moves a value from memory to a register, changes it and stores it back. And a trace lets one predict the screen before running the program. The caption says where each idea goes next. A good closing question for the class: which box would you need to explain to a friend why the green bar starts again at frame 256?</a:t>
             </a:r>
             <a:endParaRPr lang="en-US" dirty="0"/>
           </a:p>
@@ -1291,7 +1290,7 @@
           <a:p>
             <a:r>
               <a:rPr lang="en-US" dirty="0"/>
-              <a:t>The first question tests the distinction between address and value. la loads the address of the label into t0; lw then uses t0 to locate the word and copies its content into t1, leaving t0 unchanged. t0 therefore still holds the address. Anyone who chose "the value" should return to the slide with the two arrows.
+              <a:t>The first question tests the distinction between address and value. la loads the address of the label into t0; lw then uses t0 to locate the word and copies its content into t1, leaving t0 unchanged. t0 therefore still holds the address. Anyone who chose "the value" should return to slide 10, with the two arrows.
 The second question turns on the effect of call, which writes the return address into ra. A function that must later return to its own caller needs its original ra, which the call has just overwritten. a0 is intended to be overwritten, sp is restored by the callee, and t0 is a temporary that no one has undertaken to preserve.
 For the lecturer: 1. Answer: B. la loads the address of the label; lw then reads the value stored at that address into t1.
 2. Answer: C. call writes the return address in ra. The callee's own calls would overwrite it, so a non-leaf function saves ra on the stack and restores it before ret.</a:t>
@@ -1562,8 +1561,8 @@
           <a:p>
             <a:r>
               <a:rPr lang="en-US" dirty="0"/>
-              <a:t>Six learning outcomes. The first four are operational: building and running a cartridge, naming the registers, calling a function with its arguments, and preserving a value in memory between frames. The fifth is a change of perspective with lasting consequences: an instruction is a 32-bit number. The sixth is the most important for the course as a whole: the student leaves with a list of questions, each of which is the subject of a later lecture. Today's lecture is therefore as much an inventory of problems as a body of answers.
-For the lecturer: Tell the students explicitly that they are not expected to understand everything today. Today is for seeing; the next lectures are for explaining.</a:t>
+              <a:t>This is the contract of the lecture, and it is deliberately short. Three outcomes, each with a check that the student can see (a label, in the second, is a name that marks a place in the program; slide 9 shows one): checkpoint 1 tests the first, the exit ticket the second, and checkpoint 2, the trace, the third. The only prerequisites are those of Lecture 01: knowing what a program is, using the terminal, and having PRG32-QT running. Today's program also contains things that are used without being understood: the stack frame that saves ra, the calling convention, the encoding of an instruction as a number. They are needed to make the program run, and the last slides of the lecture say which lecture explains each of them. A student who can do the three things on this slide by the end has met the goal of the day, even if much else remains unclear.
+For the lecturer: Read the contract aloud and come back to it at the end. Three outcomes, three checks: checkpoint 1 (slide of the contract), checkpoint 2 (the trace) and the exit ticket. Anything else on the slides today is to be seen and used, not mastered.</a:t>
             </a:r>
             <a:endParaRPr lang="en-US" dirty="0"/>
           </a:p>
@@ -1652,7 +1651,7 @@
             <a:r>
               <a:rPr lang="en-US" dirty="0"/>
               <a:t>Four propositions summarise the lecture. A RISC-V processor consists of thirty-two registers and a small set of instructions that compute, move data and alter control flow. A PRG32 game consists of three functions; arguments travel in a0 to a7, and a function that calls another must save ra. Variables reside in memory: la yields the address, lw and sw the value. An instruction is a 32-bit number, and assembly is its readable notation. The next lecture steps back to trace the history that produced this machine.
-Learning status, recap. UNDERSTAND NOW: registers, compute, move, jump; registers; functions, call and return; the init, update, draw contract; reading a line of assembly; arguments in a0 to a7; why ra is saved; address, value, load, store; the base instructions; pseudo-instructions; an instruction is a number; tracing by hand. USE NOW: hexadecimal (Lecture 04); bit, byte, word (Lecture 04); the calling convention (Lecture 18); bit masks (Lecture 08) and, used without being studied in this course, the assembler directives, the PRG32 tools, the PRG32 runtime calls, the PRG32-QT debugger, the complete program. UNDERSTAND LATER: the stack (Lecture 18); addressing modes (Lecture 19); instruction formats (Lecture 19); two's complement (Lecture 05); fixed point (Lecture 06); Boolean algebra (Lecture 08); the adder (Lecture 09); from volts to bits (Lecture 10); latches and flip-flops (Lecture 13); the processor cycle (Lecture 19); the Verm1 project (Lecture 07). A slide without a badge is context: a story, an example, a question, an exercise.
+Learning status, recap. UNDERSTAND NOW: registers, compute, move, jump; registers; functions, call and return; the init, update, draw contract; reading a line of assembly; arguments in a0 to a7; why ra is saved; address, value, load, store; the base instructions; pseudo-instructions; an instruction is a number; tracing by hand. USE NOW: hexadecimal (Lecture 04); bit, byte, word (Lecture 04); the calling convention (Lecture 18); bit masks (Lecture 08) and, used without being studied in this course, the assembler directives, the PRG32 tools, the PRG32 runtime calls, the PRG32-QT debugger, the complete program. UNDERSTAND LATER: the stack (Lecture 18); addressing modes (Lecture 19); instruction formats (Lecture 19); two's complement (Lecture 05); fixed point (Lecture 06); Boolean algebra (Lecture 08); the adder (Lecture 09); from volts to bits (Lecture 10); latches and flip-flops (Lecture 13); the processor cycle (Lecture 19); the Verm1 project (Lecture 07). A slide without a badge is context: a story, an example, a question, an exercise. Closing thread: A program is a few functions that the runtime calls; each line is one instruction; values live in registers while they are computed and in memory between frames. Everything else you used today has a lecture of its own. Next: where these ideas came from. Exit ticket (two to four minutes, alone, on paper): 1. Read the line  loop:  li a0, 32   # x  aloud. Name its label, instruction, operands and comment. Is li an instruction of the processor? What does the assembler do with it? 2. The debugger shows the instruction addi t1, t1, 1 stored in memory as the word 0x00130313. What is that word, and what does it tell you about where a program lives?
 For the lecturer: Next lecture: the history that led to this machine.</a:t>
             </a:r>
             <a:endParaRPr lang="en-US" dirty="0"/>
@@ -1922,7 +1921,7 @@
           <a:p>
             <a:r>
               <a:rPr lang="en-US" dirty="0"/>
-              <a:t>The registers carry names that reflect their use. a0 to a7 pass the arguments of a call, and a0 also returns the result. t0 to t6 are temporaries, freely usable and not preserved across calls. s0 to s11 are preserved across calls. ra holds the return address, sp the top of the stack, an area of memory where functions keep values for a while (slide 9 shows how), and zero always reads as 0. The caption contains the essential point: these roles are not imposed by the hardware, which treats x1 to x31 identically. They are an agreement, the calling convention, and it is this agreement that allows assembly written by the student and C code of the framework to call one another. It is used today and studied formally in Lecture 18.
+              <a:t>The registers carry names that reflect their use. a0 to a7 pass the arguments of a call, and a0 also returns the result. t0 to t6 are temporaries, freely usable and not preserved across calls. s0 to s11 are preserved across calls. ra holds the return address, sp the top of the stack, an area of memory where functions keep values for a while (step 2, in the code deck, shows how), and zero always reads as 0. The caption contains the essential point: these roles are not imposed by the hardware, which treats x1 to x31 identically. They are an agreement, the calling convention, and it is this agreement that allows assembly written by the student and C code of the framework to call one another. It is used today and studied formally in Lecture 18.
 UNDERSTAND NOW: registers. USE NOW: the calling convention (studied in Lecture 18).
 For the lecturer: The roles are fixed not by the hardware but by an agreement: the calling convention, or ABI. Following it is what lets your assembly and the framework's C code call each other.</a:t>
             </a:r>
@@ -2192,10 +2191,8 @@
           <a:p>
             <a:r>
               <a:rPr lang="en-US" dirty="0"/>
-              <a:t>Before the first listing, a guide to reading it. A line of assembly has at most four parts, and the table names them. A label is a name followed by a colon; it marks a place in the program, often the start of a function. The instruction is the operation to perform. The operands are what the instruction works on, and in RISC-V the destination always comes first. A comment starts with # and runs to the end of the line; it is written for people, and the assembler ignores it.
-A line that begins with a dot is a directive. It is an instruction for the assembler, not for the processor: .section .text, for example, says that the code which follows is to be placed among the executable instructions. The caption shows a complete line. It is read as "put t1 plus 1 into t1", which a mathematician would write t1 = t1 + 1. Blank lines and indentation do not change the program; they only make it easier to read, and that matters too.
-UNDERSTAND NOW: reading a line of assembly.
-For the lecturer: Read the line addi t1, t1, 1 aloud as: put t1 plus 1 into t1. The destination comes first, as in the assignment t1 = t1 + 1. A line can hold a label, an instruction, a comment, or several of these; blank lines and indentation matter to the reader, not to the assembler.</a:t>
+              <a:t>The first checkpoint, after the contract of three functions. Students answer alone for one minute, then agree with a neighbour, then the class checks together. The answers: init is called once, when the cartridge starts; update and draw are called once per frame, so 2 seconds at 30 frames per second give 60 calls each. Only the move instructions, lw and sw, read or write memory; compute instructions work only on registers, and jumps change which instruction runs next. The most common wrong answer is that init runs at every frame: it is worth asking who chose 60 for init, and why. A student who cannot answer the second question should look again at the card Move on slide 4.
+For the lecturer: Pause here for two or three minutes. Collect a show of hands for init: the most common wrong answer is 60. The answers are in the slide notes.</a:t>
             </a:r>
             <a:endParaRPr lang="en-US" dirty="0"/>
           </a:p>
@@ -2283,9 +2280,10 @@
           <a:p>
             <a:r>
               <a:rPr lang="en-US" dirty="0"/>
-              <a:t>Why must ra be saved? The instruction call writes into ra the address to which control must return. The callee, however, may itself make calls, each of which overwrites ra. A function that calls another must therefore first preserve its own return address in memory: it decrements sp by 16 to reserve space, the stack frame, and stores ra at 12(sp); after the call it performs the inverse operations. The diagram shows the frame, with the stack growing towards lower addresses; the 16-byte size follows from the alignment that the convention requires of sp. Omitting this pair of operations is the classic first error: the function returns to the wrong place. Why ra is saved must be understood today; the stack as a data structure is treated formally in Lecture 18.
-UNDERSTAND NOW: why ra is saved. UNDERSTAND LATER: the stack (studied in Lecture 18).
-For the lecturer: The convention requires sp to stay 16-byte aligned across calls, which is why the frame is 16 bytes even though only 4 are used. The stack, with push and pop, is treated formally in Lecture 18.</a:t>
+              <a:t>Before the first listing, a guide to reading it. A line of assembly has at most four parts, and the table names them. A label is a name followed by a colon; it marks a place in the program, often the start of a function. The instruction is the operation to perform. The operands are what the instruction works on, and in RISC-V the destination always comes first. A comment starts with # and runs to the end of the line; it is written for people, and the assembler ignores it.
+A line that begins with a dot is a directive. It is an instruction for the assembler, not for the processor: .section .text, for example, says that the code which follows is to be placed among the executable instructions. The caption shows a complete line. It is read as "put t1 plus 1 into t1", which a mathematician would write t1 = t1 + 1. Blank lines and indentation do not change the program; they only make it easier to read, and that matters too.
+UNDERSTAND NOW: reading a line of assembly.
+For the lecturer: Read the line addi t1, t1, 1 aloud as: put t1 plus 1 into t1. The destination comes first, as in the assignment t1 = t1 + 1. A line can hold a label, an instruction, a comment, or several of these; blank lines and indentation matter to the reader, not to the assembler.</a:t>
             </a:r>
             <a:endParaRPr lang="en-US" dirty="0"/>
           </a:p>
@@ -10222,612 +10220,15 @@
                 <a:ea typeface="Cambria" pitchFamily="34" charset="-122"/>
                 <a:cs typeface="Cambria" pitchFamily="34" charset="-120"/>
               </a:rPr>
-              <a:t>PRG32-QT: a microscope for registers</a:t>
+              <a:t>Checkpoint 2: trace first_update by hand</a:t>
             </a:r>
             <a:endParaRPr lang="en-US" sz="3200" dirty="0"/>
           </a:p>
         </p:txBody>
       </p:sp>
-      <p:sp>
-        <p:nvSpPr>
-          <p:cNvPr id="3" name="Shape 1"/>
-          <p:cNvSpPr/>
-          <p:nvPr/>
-        </p:nvSpPr>
-        <p:spPr>
-          <a:xfrm>
-            <a:off x="548640" y="1557528"/>
-            <a:ext cx="146304" cy="146304"/>
-          </a:xfrm>
-          <a:prstGeom prst="rect">
-            <a:avLst/>
-          </a:prstGeom>
-          <a:solidFill>
-            <a:srgbClr val="0E7C86"/>
-          </a:solidFill>
-          <a:ln w="12700">
-            <a:solidFill>
-              <a:srgbClr val="0E7C86"/>
-            </a:solidFill>
-            <a:prstDash val="solid"/>
-          </a:ln>
-        </p:spPr>
-      </p:sp>
-      <p:sp>
-        <p:nvSpPr>
-          <p:cNvPr id="4" name="Text 2"/>
-          <p:cNvSpPr txBox="1"/>
-          <p:nvPr/>
-        </p:nvSpPr>
-        <p:spPr>
-          <a:xfrm>
-            <a:off x="932688" y="1435608"/>
-            <a:ext cx="5468112" cy="743712"/>
-          </a:xfrm>
-          <a:prstGeom prst="rect">
-            <a:avLst/>
-          </a:prstGeom>
-          <a:noFill/>
-          <a:ln/>
-        </p:spPr>
-        <p:txBody>
-          <a:bodyPr wrap="square" lIns="0" tIns="0" rIns="0" bIns="0" rtlCol="0" anchor="t"/>
-          <a:lstStyle/>
-          <a:p>
-            <a:pPr indent="0" marL="0">
-              <a:spcAft>
-                <a:spcPts val="200"/>
-              </a:spcAft>
-              <a:buNone/>
-            </a:pPr>
-            <a:r>
-              <a:rPr lang="en-US" sz="2400" dirty="0">
-                <a:solidFill>
-                  <a:srgbClr val="1B2530"/>
-                </a:solidFill>
-                <a:latin typeface="Calibri" pitchFamily="34" charset="0"/>
-                <a:ea typeface="Calibri" pitchFamily="34" charset="-122"/>
-                <a:cs typeface="Calibri" pitchFamily="34" charset="-120"/>
-              </a:rPr>
-              <a:t>Runs the same cartridge on your desktop, one instruction at a time</a:t>
-            </a:r>
-            <a:endParaRPr lang="en-US" sz="2400" dirty="0"/>
-          </a:p>
-        </p:txBody>
-      </p:sp>
-      <p:sp>
-        <p:nvSpPr>
-          <p:cNvPr id="5" name="Shape 3"/>
-          <p:cNvSpPr/>
-          <p:nvPr/>
-        </p:nvSpPr>
-        <p:spPr>
-          <a:xfrm>
-            <a:off x="548640" y="2758440"/>
-            <a:ext cx="146304" cy="146304"/>
-          </a:xfrm>
-          <a:prstGeom prst="rect">
-            <a:avLst/>
-          </a:prstGeom>
-          <a:solidFill>
-            <a:srgbClr val="C7791B"/>
-          </a:solidFill>
-          <a:ln w="12700">
-            <a:solidFill>
-              <a:srgbClr val="C7791B"/>
-            </a:solidFill>
-            <a:prstDash val="solid"/>
-          </a:ln>
-        </p:spPr>
-      </p:sp>
-      <p:sp>
-        <p:nvSpPr>
-          <p:cNvPr id="6" name="Text 4"/>
-          <p:cNvSpPr txBox="1"/>
-          <p:nvPr/>
-        </p:nvSpPr>
-        <p:spPr>
-          <a:xfrm>
-            <a:off x="932688" y="2636520"/>
-            <a:ext cx="5468112" cy="743712"/>
-          </a:xfrm>
-          <a:prstGeom prst="rect">
-            <a:avLst/>
-          </a:prstGeom>
-          <a:noFill/>
-          <a:ln/>
-        </p:spPr>
-        <p:txBody>
-          <a:bodyPr wrap="square" lIns="0" tIns="0" rIns="0" bIns="0" rtlCol="0" anchor="t"/>
-          <a:lstStyle/>
-          <a:p>
-            <a:pPr indent="0" marL="0">
-              <a:spcAft>
-                <a:spcPts val="200"/>
-              </a:spcAft>
-              <a:buNone/>
-            </a:pPr>
-            <a:r>
-              <a:rPr lang="en-US" sz="2400" dirty="0">
-                <a:solidFill>
-                  <a:srgbClr val="1B2530"/>
-                </a:solidFill>
-                <a:latin typeface="Calibri" pitchFamily="34" charset="0"/>
-                <a:ea typeface="Calibri" pitchFamily="34" charset="-122"/>
-                <a:cs typeface="Calibri" pitchFamily="34" charset="-120"/>
-              </a:rPr>
-              <a:t>Stops between any two instructions and shows every register</a:t>
-            </a:r>
-            <a:endParaRPr lang="en-US" sz="2400" dirty="0"/>
-          </a:p>
-        </p:txBody>
-      </p:sp>
-      <p:sp>
-        <p:nvSpPr>
-          <p:cNvPr id="7" name="Shape 5"/>
-          <p:cNvSpPr/>
-          <p:nvPr/>
-        </p:nvSpPr>
-        <p:spPr>
-          <a:xfrm>
-            <a:off x="548640" y="3959352"/>
-            <a:ext cx="146304" cy="146304"/>
-          </a:xfrm>
-          <a:prstGeom prst="rect">
-            <a:avLst/>
-          </a:prstGeom>
-          <a:solidFill>
-            <a:srgbClr val="0E7C86"/>
-          </a:solidFill>
-          <a:ln w="12700">
-            <a:solidFill>
-              <a:srgbClr val="0E7C86"/>
-            </a:solidFill>
-            <a:prstDash val="solid"/>
-          </a:ln>
-        </p:spPr>
-      </p:sp>
-      <p:sp>
-        <p:nvSpPr>
-          <p:cNvPr id="8" name="Text 6"/>
-          <p:cNvSpPr txBox="1"/>
-          <p:nvPr/>
-        </p:nvSpPr>
-        <p:spPr>
-          <a:xfrm>
-            <a:off x="932688" y="3837432"/>
-            <a:ext cx="5468112" cy="743712"/>
-          </a:xfrm>
-          <a:prstGeom prst="rect">
-            <a:avLst/>
-          </a:prstGeom>
-          <a:noFill/>
-          <a:ln/>
-        </p:spPr>
-        <p:txBody>
-          <a:bodyPr wrap="square" lIns="0" tIns="0" rIns="0" bIns="0" rtlCol="0" anchor="t"/>
-          <a:lstStyle/>
-          <a:p>
-            <a:pPr indent="0" marL="0">
-              <a:spcAft>
-                <a:spcPts val="200"/>
-              </a:spcAft>
-              <a:buNone/>
-            </a:pPr>
-            <a:r>
-              <a:rPr lang="en-US" sz="2400" dirty="0">
-                <a:solidFill>
-                  <a:srgbClr val="1B2530"/>
-                </a:solidFill>
-                <a:latin typeface="Calibri" pitchFamily="34" charset="0"/>
-                <a:ea typeface="Calibri" pitchFamily="34" charset="-122"/>
-                <a:cs typeface="Calibri" pitchFamily="34" charset="-120"/>
-              </a:rPr>
-              <a:t>Step through first_update and watch t0 and t1 change</a:t>
-            </a:r>
-            <a:endParaRPr lang="en-US" sz="2400" dirty="0"/>
-          </a:p>
-        </p:txBody>
-      </p:sp>
-      <p:sp>
-        <p:nvSpPr>
-          <p:cNvPr id="9" name="Shape 7"/>
-          <p:cNvSpPr/>
-          <p:nvPr/>
-        </p:nvSpPr>
-        <p:spPr>
-          <a:xfrm>
-            <a:off x="548640" y="5160264"/>
-            <a:ext cx="146304" cy="146304"/>
-          </a:xfrm>
-          <a:prstGeom prst="rect">
-            <a:avLst/>
-          </a:prstGeom>
-          <a:solidFill>
-            <a:srgbClr val="C7791B"/>
-          </a:solidFill>
-          <a:ln w="12700">
-            <a:solidFill>
-              <a:srgbClr val="C7791B"/>
-            </a:solidFill>
-            <a:prstDash val="solid"/>
-          </a:ln>
-        </p:spPr>
-      </p:sp>
-      <p:sp>
-        <p:nvSpPr>
-          <p:cNvPr id="10" name="Text 8"/>
-          <p:cNvSpPr txBox="1"/>
-          <p:nvPr/>
-        </p:nvSpPr>
-        <p:spPr>
-          <a:xfrm>
-            <a:off x="932688" y="5038344"/>
-            <a:ext cx="5468112" cy="1115568"/>
-          </a:xfrm>
-          <a:prstGeom prst="rect">
-            <a:avLst/>
-          </a:prstGeom>
-          <a:noFill/>
-          <a:ln/>
-        </p:spPr>
-        <p:txBody>
-          <a:bodyPr wrap="square" lIns="0" tIns="0" rIns="0" bIns="0" rtlCol="0" anchor="t"/>
-          <a:lstStyle/>
-          <a:p>
-            <a:pPr indent="0" marL="0">
-              <a:spcAft>
-                <a:spcPts val="200"/>
-              </a:spcAft>
-              <a:buNone/>
-            </a:pPr>
-            <a:r>
-              <a:rPr lang="en-US" sz="2400" dirty="0">
-                <a:solidFill>
-                  <a:srgbClr val="1B2530"/>
-                </a:solidFill>
-                <a:latin typeface="Calibri" pitchFamily="34" charset="0"/>
-                <a:ea typeface="Calibri" pitchFamily="34" charset="-122"/>
-                <a:cs typeface="Calibri" pitchFamily="34" charset="-120"/>
-              </a:rPr>
-              <a:t>Use the board when you want the truth about time, PRG32-QT when you want the truth about a register</a:t>
-            </a:r>
-            <a:endParaRPr lang="en-US" sz="2400" dirty="0"/>
-          </a:p>
-        </p:txBody>
-      </p:sp>
-      <p:pic>
-        <p:nvPicPr>
-          <p:cNvPr id="11" name="Image 0" descr="/Users/raffaelemontella/devel/riscv-prg32/computer-architecture-with-prg32/tools/assets/prg32qt_debugger.png">    </p:cNvPr>
-          <p:cNvPicPr>
-            <a:picLocks noChangeAspect="1"/>
-          </p:cNvPicPr>
-          <p:nvPr/>
-        </p:nvPicPr>
-        <p:blipFill>
-          <a:blip r:embed="rId1"/>
-          <a:stretch>
-            <a:fillRect/>
-          </a:stretch>
-        </p:blipFill>
-        <p:spPr>
-          <a:xfrm>
-            <a:off x="6766560" y="1882245"/>
-            <a:ext cx="4876495" cy="3367829"/>
-          </a:xfrm>
-          <a:prstGeom prst="rect">
-            <a:avLst/>
-          </a:prstGeom>
-        </p:spPr>
-      </p:pic>
-      <p:sp>
-        <p:nvSpPr>
-          <p:cNvPr id="12" name="Text 9"/>
-          <p:cNvSpPr txBox="1"/>
-          <p:nvPr/>
-        </p:nvSpPr>
-        <p:spPr>
-          <a:xfrm>
-            <a:off x="6766560" y="5788152"/>
-            <a:ext cx="4876495" cy="384048"/>
-          </a:xfrm>
-          <a:prstGeom prst="rect">
-            <a:avLst/>
-          </a:prstGeom>
-          <a:noFill/>
-          <a:ln/>
-        </p:spPr>
-        <p:txBody>
-          <a:bodyPr wrap="square" lIns="0" tIns="0" rIns="0" bIns="0" rtlCol="0" anchor="ctr"/>
-          <a:lstStyle/>
-          <a:p>
-            <a:pPr algn="ctr" indent="0" marL="0">
-              <a:buNone/>
-            </a:pPr>
-            <a:r>
-              <a:rPr lang="en-US" sz="1200" i="1" dirty="0">
-                <a:solidFill>
-                  <a:srgbClr val="5B6B78"/>
-                </a:solidFill>
-                <a:latin typeface="Calibri" pitchFamily="34" charset="0"/>
-                <a:ea typeface="Calibri" pitchFamily="34" charset="-122"/>
-                <a:cs typeface="Calibri" pitchFamily="34" charset="-120"/>
-              </a:rPr>
-              <a:t>The PRG32-QT debugger: source, registers, memory</a:t>
-            </a:r>
-            <a:endParaRPr lang="en-US" sz="1200" dirty="0"/>
-          </a:p>
-        </p:txBody>
-      </p:sp>
-      <p:sp>
-        <p:nvSpPr>
-          <p:cNvPr id="13" name="Shape 10"/>
-          <p:cNvSpPr/>
-          <p:nvPr/>
-        </p:nvSpPr>
-        <p:spPr>
-          <a:xfrm>
-            <a:off x="8894013" y="91440"/>
-            <a:ext cx="2749042" cy="274320"/>
-          </a:xfrm>
-          <a:prstGeom prst="rect">
-            <a:avLst/>
-          </a:prstGeom>
-          <a:solidFill>
-            <a:srgbClr val="FEF3C7"/>
-          </a:solidFill>
-          <a:ln w="12700">
-            <a:solidFill>
-              <a:srgbClr val="B45309"/>
-            </a:solidFill>
-            <a:prstDash val="solid"/>
-          </a:ln>
-        </p:spPr>
-      </p:sp>
-      <p:sp>
-        <p:nvSpPr>
-          <p:cNvPr id="14" name="Shape 11"/>
-          <p:cNvSpPr/>
-          <p:nvPr/>
-        </p:nvSpPr>
-        <p:spPr>
-          <a:xfrm>
-            <a:off x="8894013" y="91440"/>
-            <a:ext cx="27432" cy="274320"/>
-          </a:xfrm>
-          <a:prstGeom prst="rect">
-            <a:avLst/>
-          </a:prstGeom>
-          <a:solidFill>
-            <a:srgbClr val="B45309"/>
-          </a:solidFill>
-          <a:ln w="12700">
-            <a:solidFill>
-              <a:srgbClr val="B45309"/>
-            </a:solidFill>
-            <a:prstDash val="solid"/>
-          </a:ln>
-        </p:spPr>
-      </p:sp>
-      <p:sp>
-        <p:nvSpPr>
-          <p:cNvPr id="15" name="Shape 12"/>
-          <p:cNvSpPr/>
-          <p:nvPr/>
-        </p:nvSpPr>
-        <p:spPr>
-          <a:xfrm>
-            <a:off x="8948877" y="91440"/>
-            <a:ext cx="27432" cy="274320"/>
-          </a:xfrm>
-          <a:prstGeom prst="rect">
-            <a:avLst/>
-          </a:prstGeom>
-          <a:solidFill>
-            <a:srgbClr val="B45309"/>
-          </a:solidFill>
-          <a:ln w="12700">
-            <a:solidFill>
-              <a:srgbClr val="B45309"/>
-            </a:solidFill>
-            <a:prstDash val="solid"/>
-          </a:ln>
-        </p:spPr>
-      </p:sp>
-      <p:pic>
-        <p:nvPicPr>
-          <p:cNvPr id="16" name="Image 1" descr="preencoded.png">    </p:cNvPr>
-          <p:cNvPicPr>
-            <a:picLocks noChangeAspect="1"/>
-          </p:cNvPicPr>
-          <p:nvPr/>
-        </p:nvPicPr>
-        <p:blipFill>
-          <a:blip r:embed="rId2"/>
-          <a:stretch>
-            <a:fillRect/>
-          </a:stretch>
-        </p:blipFill>
-        <p:spPr>
-          <a:xfrm>
-            <a:off x="9022029" y="128016"/>
-            <a:ext cx="201168" cy="201168"/>
-          </a:xfrm>
-          <a:prstGeom prst="rect">
-            <a:avLst/>
-          </a:prstGeom>
-        </p:spPr>
-      </p:pic>
-      <p:sp>
-        <p:nvSpPr>
-          <p:cNvPr id="17" name="Text 13"/>
-          <p:cNvSpPr txBox="1"/>
-          <p:nvPr/>
-        </p:nvSpPr>
-        <p:spPr>
-          <a:xfrm>
-            <a:off x="9278061" y="91440"/>
-            <a:ext cx="2328418" cy="274320"/>
-          </a:xfrm>
-          <a:prstGeom prst="rect">
-            <a:avLst/>
-          </a:prstGeom>
-          <a:noFill/>
-          <a:ln/>
-        </p:spPr>
-        <p:txBody>
-          <a:bodyPr wrap="square" lIns="0" tIns="0" rIns="0" bIns="0" rtlCol="0" anchor="ctr"/>
-          <a:lstStyle/>
-          <a:p>
-            <a:pPr indent="0" marL="0">
-              <a:buNone/>
-            </a:pPr>
-            <a:r>
-              <a:rPr lang="en-US" sz="1100" b="1" dirty="0">
-                <a:solidFill>
-                  <a:srgbClr val="92400E"/>
-                </a:solidFill>
-                <a:latin typeface="Calibri" pitchFamily="34" charset="0"/>
-                <a:ea typeface="Calibri" pitchFamily="34" charset="-122"/>
-                <a:cs typeface="Calibri" pitchFamily="34" charset="-120"/>
-              </a:rPr>
-              <a:t>USE NOW</a:t>
-            </a:r>
-            <a:pPr indent="0" marL="0">
-              <a:buNone/>
-            </a:pPr>
-            <a:r>
-              <a:rPr lang="en-US" sz="1100" dirty="0">
-                <a:solidFill>
-                  <a:srgbClr val="92400E"/>
-                </a:solidFill>
-                <a:latin typeface="Calibri" pitchFamily="34" charset="0"/>
-                <a:ea typeface="Calibri" pitchFamily="34" charset="-122"/>
-                <a:cs typeface="Calibri" pitchFamily="34" charset="-120"/>
-              </a:rPr>
-              <a:t> · the PRG32-QT debugger</a:t>
-            </a:r>
-            <a:endParaRPr lang="en-US" sz="1100" dirty="0"/>
-          </a:p>
-        </p:txBody>
-      </p:sp>
-      <p:sp>
-        <p:nvSpPr>
-          <p:cNvPr id="25" name="Slide Number Placeholder 0"/>
-          <p:cNvSpPr>
-            <a:spLocks noGrp="1"/>
-          </p:cNvSpPr>
-          <p:nvPr>
-            <p:ph type="sldNum" sz="quarter" idx="4294967295"/>
-          </p:nvPr>
-        </p:nvSpPr>
-        <p:spPr>
-          <a:xfrm>
-            <a:off x="11002975" y="6419088"/>
-            <a:ext cx="640080" cy="274320"/>
-          </a:xfrm>
-          <a:prstGeom prst="rect">
-            <a:avLst/>
-          </a:prstGeom>
-          <a:extLst>
-            <a:ext uri="{C572A759-6A51-4108-AA02-DFA0A04FC94B}">
-              <ma14:wrappingTextBoxFlag xmlns:ma14="http://schemas.microsoft.com/office/mac/drawingml/2011/main" val="0"/>
-            </a:ext>
-          </a:extLst>
-        </p:spPr>
-        <p:txBody>
-          <a:bodyPr/>
-          <a:lstStyle>
-            <a:lvl1pPr>
-              <a:defRPr sz="1000">
-                <a:solidFill>
-                  <a:srgbClr val="5B6B78"/>
-                </a:solidFill>
-                <a:latin typeface="Calibri"/>
-                <a:ea typeface="Calibri"/>
-                <a:cs typeface="Calibri"/>
-              </a:defRPr>
-            </a:lvl1pPr>
-          </a:lstStyle>
-          <a:p>
-            <a:pPr algn="r"/>
-            <a:fld id="{F7021451-1387-4CA6-816F-3879F97B5CBC}" type="slidenum">
-              <a:rPr b="0" lang="en-US"/>
-              <a:t>14</a:t>
-            </a:fld>
-            <a:endParaRPr lang="en-US"/>
-          </a:p>
-        </p:txBody>
-      </p:sp>
-    </p:spTree>
-  </p:cSld>
-  <p:clrMapOvr>
-    <a:masterClrMapping/>
-  </p:clrMapOvr>
-</p:sld>
-</file>
-
-<file path=ppt/slides/slide15.xml><?xml version="1.0" encoding="utf-8"?>
-<p:sld xmlns:a="http://schemas.openxmlformats.org/drawingml/2006/main" xmlns:r="http://schemas.openxmlformats.org/officeDocument/2006/relationships" xmlns:p="http://schemas.openxmlformats.org/presentationml/2006/main">
-  <p:cSld name="Slide 15">
-    <p:spTree>
-      <p:nvGrpSpPr>
-        <p:cNvPr id="1" name=""/>
-        <p:cNvGrpSpPr/>
-        <p:nvPr/>
-      </p:nvGrpSpPr>
-      <p:grpSpPr>
-        <a:xfrm>
-          <a:off x="0" y="0"/>
-          <a:ext cx="0" cy="0"/>
-          <a:chOff x="0" y="0"/>
-          <a:chExt cx="0" cy="0"/>
-        </a:xfrm>
-      </p:grpSpPr>
-      <p:sp>
-        <p:nvSpPr>
-          <p:cNvPr id="2" name="Text 1"/>
-          <p:cNvSpPr/>
-          <p:nvPr>
-            <p:ph idx="101" type="title" hasCustomPrompt="1"/>
-          </p:nvPr>
-        </p:nvSpPr>
-        <p:spPr>
-          <a:xfrm>
-            <a:off x="548640" y="365760"/>
-            <a:ext cx="11094415" cy="868680"/>
-          </a:xfrm>
-          <a:prstGeom prst="rect">
-            <a:avLst/>
-          </a:prstGeom>
-          <a:noFill/>
-          <a:ln/>
-        </p:spPr>
-        <p:txBody>
-          <a:bodyPr wrap="square" lIns="0" tIns="0" rIns="0" bIns="0" rtlCol="0" anchor="ctr"/>
-          <a:lstStyle/>
-          <a:p>
-            <a:pPr algn="l" indent="0" marL="0">
-              <a:buNone/>
-            </a:pPr>
-            <a:r>
-              <a:rPr lang="en-US" sz="3200" b="1" dirty="0">
-                <a:solidFill>
-                  <a:srgbClr val="2E4A62"/>
-                </a:solidFill>
-                <a:latin typeface="Cambria" pitchFamily="34" charset="0"/>
-                <a:ea typeface="Cambria" pitchFamily="34" charset="-122"/>
-                <a:cs typeface="Cambria" pitchFamily="34" charset="-120"/>
-              </a:rPr>
-              <a:t>Trace it by hand: three frames of first_update</a:t>
-            </a:r>
-            <a:endParaRPr lang="en-US" sz="3200" dirty="0"/>
-          </a:p>
-        </p:txBody>
-      </p:sp>
       <p:graphicFrame>
         <p:nvGraphicFramePr>
-          <p:cNvPr id="16" name="Table 0"/>
+          <p:cNvPr id="15" name="Table 0"/>
           <p:cNvGraphicFramePr>
             <a:graphicFrameLocks noGrp="1"/>
           </p:cNvGraphicFramePr>
@@ -11966,7 +11367,7 @@
                           <a:ea typeface="Calibri" pitchFamily="34" charset="-122"/>
                           <a:cs typeface="Calibri" pitchFamily="34" charset="-120"/>
                         </a:rPr>
-                        <a:t>255</a:t>
+                        <a:t>?</a:t>
                       </a:r>
                       <a:endParaRPr lang="en-US" sz="2100" dirty="0">
                         <a:latin typeface="Calibri" charset="0"/>
@@ -12034,7 +11435,7 @@
                           <a:ea typeface="Calibri" pitchFamily="34" charset="-122"/>
                           <a:cs typeface="Calibri" pitchFamily="34" charset="-120"/>
                         </a:rPr>
-                        <a:t>256</a:t>
+                        <a:t>?</a:t>
                       </a:r>
                       <a:endParaRPr lang="en-US" sz="2100" dirty="0">
                         <a:latin typeface="Calibri" charset="0"/>
@@ -12102,7 +11503,7 @@
                           <a:ea typeface="Calibri" pitchFamily="34" charset="-122"/>
                           <a:cs typeface="Calibri" pitchFamily="34" charset="-120"/>
                         </a:rPr>
-                        <a:t>256</a:t>
+                        <a:t>?</a:t>
                       </a:r>
                       <a:endParaRPr lang="en-US" sz="2100" dirty="0">
                         <a:latin typeface="Calibri" charset="0"/>
@@ -12170,7 +11571,7 @@
                           <a:ea typeface="Calibri" pitchFamily="34" charset="-122"/>
                           <a:cs typeface="Calibri" pitchFamily="34" charset="-120"/>
                         </a:rPr>
-                        <a:t>0</a:t>
+                        <a:t>?</a:t>
                       </a:r>
                       <a:endParaRPr lang="en-US" sz="2100" dirty="0">
                         <a:latin typeface="Calibri" charset="0"/>
@@ -12308,7 +11709,7 @@
                           <a:ea typeface="Calibri" pitchFamily="34" charset="-122"/>
                           <a:cs typeface="Calibri" pitchFamily="34" charset="-120"/>
                         </a:rPr>
-                        <a:t>256</a:t>
+                        <a:t>?</a:t>
                       </a:r>
                       <a:endParaRPr lang="en-US" sz="2100" dirty="0">
                         <a:latin typeface="Calibri" charset="0"/>
@@ -12376,7 +11777,7 @@
                           <a:ea typeface="Calibri" pitchFamily="34" charset="-122"/>
                           <a:cs typeface="Calibri" pitchFamily="34" charset="-120"/>
                         </a:rPr>
-                        <a:t>257</a:t>
+                        <a:t>?</a:t>
                       </a:r>
                       <a:endParaRPr lang="en-US" sz="2100" dirty="0">
                         <a:latin typeface="Calibri" charset="0"/>
@@ -12444,7 +11845,7 @@
                           <a:ea typeface="Calibri" pitchFamily="34" charset="-122"/>
                           <a:cs typeface="Calibri" pitchFamily="34" charset="-120"/>
                         </a:rPr>
-                        <a:t>257</a:t>
+                        <a:t>?</a:t>
                       </a:r>
                       <a:endParaRPr lang="en-US" sz="2100" dirty="0">
                         <a:latin typeface="Calibri" charset="0"/>
@@ -12512,7 +11913,7 @@
                           <a:ea typeface="Calibri" pitchFamily="34" charset="-122"/>
                           <a:cs typeface="Calibri" pitchFamily="34" charset="-120"/>
                         </a:rPr>
-                        <a:t>1</a:t>
+                        <a:t>?</a:t>
                       </a:r>
                       <a:endParaRPr lang="en-US" sz="2100" dirty="0">
                         <a:latin typeface="Calibri" charset="0"/>
@@ -12601,7 +12002,7 @@
                 <a:ea typeface="Calibri" pitchFamily="34" charset="-122"/>
                 <a:cs typeface="Calibri" pitchFamily="34" charset="-120"/>
               </a:rPr>
-              <a:t>At frame 256 the counter keeps growing, but its low eight bits return to zero: the bar starts again.</a:t>
+              <a:t>Fill in the rows marked ?, then check them in PRG32-QT. What happens to the bar at frame 256, and why?</a:t>
             </a:r>
             <a:endParaRPr lang="en-US" sz="1500" dirty="0"/>
           </a:p>
@@ -12776,7 +12177,7 @@
             <a:pPr algn="r"/>
             <a:fld id="{F7021451-1387-4CA6-816F-3879F97B5CBC}" type="slidenum">
               <a:rPr b="0" lang="en-US"/>
-              <a:t>15</a:t>
+              <a:t>14</a:t>
             </a:fld>
             <a:endParaRPr lang="en-US"/>
           </a:p>
@@ -12790,9 +12191,9 @@
 </p:sld>
 </file>
 
-<file path=ppt/slides/slide16.xml><?xml version="1.0" encoding="utf-8"?>
+<file path=ppt/slides/slide15.xml><?xml version="1.0" encoding="utf-8"?>
 <p:sld xmlns:a="http://schemas.openxmlformats.org/drawingml/2006/main" xmlns:r="http://schemas.openxmlformats.org/officeDocument/2006/relationships" xmlns:p="http://schemas.openxmlformats.org/presentationml/2006/main">
-  <p:cSld name="Slide 16">
+  <p:cSld name="Slide 15">
     <p:spTree>
       <p:nvGrpSpPr>
         <p:cNvPr id="1" name=""/>
@@ -12842,7 +12243,7 @@
                 <a:ea typeface="Cambria" pitchFamily="34" charset="-122"/>
                 <a:cs typeface="Cambria" pitchFamily="34" charset="-120"/>
               </a:rPr>
-              <a:t>Questions your program has already raised</a:t>
+              <a:t>Not expected yet: what later lectures explain</a:t>
             </a:r>
             <a:endParaRPr lang="en-US" sz="3200" dirty="0"/>
           </a:p>
@@ -12850,7 +12251,7 @@
       </p:sp>
       <p:graphicFrame>
         <p:nvGraphicFramePr>
-          <p:cNvPr id="17" name="Table 0"/>
+          <p:cNvPr id="16" name="Table 0"/>
           <p:cNvGraphicFramePr>
             <a:graphicFrameLocks noGrp="1"/>
           </p:cNvGraphicFramePr>
@@ -12885,7 +12286,7 @@
                         <a:buNone/>
                       </a:pPr>
                       <a:r>
-                        <a:rPr lang="en-US" sz="1400" b="1" dirty="0">
+                        <a:rPr lang="en-US" sz="1500" b="1" dirty="0">
                           <a:solidFill>
                             <a:srgbClr val="FFFFFF"/>
                           </a:solidFill>
@@ -12895,7 +12296,7 @@
                         </a:rPr>
                         <a:t>You saw</a:t>
                       </a:r>
-                      <a:endParaRPr lang="en-US" sz="1400" dirty="0">
+                      <a:endParaRPr lang="en-US" sz="1500" dirty="0">
                         <a:latin typeface="Calibri" charset="0"/>
                         <a:ea typeface="Calibri" charset="0"/>
                         <a:cs typeface="Calibri" charset="0"/>
@@ -12953,7 +12354,7 @@
                         <a:buNone/>
                       </a:pPr>
                       <a:r>
-                        <a:rPr lang="en-US" sz="1400" b="1" dirty="0">
+                        <a:rPr lang="en-US" sz="1500" b="1" dirty="0">
                           <a:solidFill>
                             <a:srgbClr val="FFFFFF"/>
                           </a:solidFill>
@@ -12963,7 +12364,7 @@
                         </a:rPr>
                         <a:t>The question</a:t>
                       </a:r>
-                      <a:endParaRPr lang="en-US" sz="1400" dirty="0">
+                      <a:endParaRPr lang="en-US" sz="1500" dirty="0">
                         <a:latin typeface="Calibri" charset="0"/>
                         <a:ea typeface="Calibri" charset="0"/>
                         <a:cs typeface="Calibri" charset="0"/>
@@ -13021,7 +12422,7 @@
                         <a:buNone/>
                       </a:pPr>
                       <a:r>
-                        <a:rPr lang="en-US" sz="1400" b="1" dirty="0">
+                        <a:rPr lang="en-US" sz="1500" b="1" dirty="0">
                           <a:solidFill>
                             <a:srgbClr val="FFFFFF"/>
                           </a:solidFill>
@@ -13031,7 +12432,7 @@
                         </a:rPr>
                         <a:t>Answered in</a:t>
                       </a:r>
-                      <a:endParaRPr lang="en-US" sz="1400" dirty="0">
+                      <a:endParaRPr lang="en-US" sz="1500" dirty="0">
                         <a:latin typeface="Calibri" charset="0"/>
                         <a:ea typeface="Calibri" charset="0"/>
                         <a:cs typeface="Calibri" charset="0"/>
@@ -13091,20 +12492,20 @@
                         <a:buNone/>
                       </a:pPr>
                       <a:r>
-                        <a:rPr lang="en-US" sz="1400" dirty="0">
+                        <a:rPr lang="en-US" sz="1500" b="1" dirty="0">
                           <a:solidFill>
                             <a:srgbClr val="1B2530"/>
                           </a:solidFill>
-                          <a:latin typeface="Courier New" pitchFamily="34" charset="0"/>
-                          <a:ea typeface="Courier New" pitchFamily="34" charset="-122"/>
-                          <a:cs typeface="Courier New" pitchFamily="34" charset="-120"/>
+                          <a:latin typeface="Calibri" pitchFamily="34" charset="0"/>
+                          <a:ea typeface="Calibri" pitchFamily="34" charset="-122"/>
+                          <a:cs typeface="Calibri" pitchFamily="34" charset="-120"/>
                         </a:rPr>
                         <a:t>0x07e0, 0xffff, 255</a:t>
                       </a:r>
-                      <a:endParaRPr lang="en-US" sz="1400" dirty="0">
-                        <a:latin typeface="Courier New" charset="0"/>
-                        <a:ea typeface="Courier New" charset="0"/>
-                        <a:cs typeface="Courier New" charset="0"/>
+                      <a:endParaRPr lang="en-US" sz="1500" dirty="0">
+                        <a:latin typeface="Calibri" charset="0"/>
+                        <a:ea typeface="Calibri" charset="0"/>
+                        <a:cs typeface="Calibri" charset="0"/>
                       </a:endParaRPr>
                     </a:p>
                   </a:txBody>
@@ -13159,7 +12560,7 @@
                         <a:buNone/>
                       </a:pPr>
                       <a:r>
-                        <a:rPr lang="en-US" sz="1400" dirty="0">
+                        <a:rPr lang="en-US" sz="1500" dirty="0">
                           <a:solidFill>
                             <a:srgbClr val="1B2530"/>
                           </a:solidFill>
@@ -13169,7 +12570,7 @@
                         </a:rPr>
                         <a:t>Why do programmers write numbers in hexadecimal?</a:t>
                       </a:r>
-                      <a:endParaRPr lang="en-US" sz="1400" dirty="0">
+                      <a:endParaRPr lang="en-US" sz="1500" dirty="0">
                         <a:latin typeface="Calibri" charset="0"/>
                         <a:ea typeface="Calibri" charset="0"/>
                         <a:cs typeface="Calibri" charset="0"/>
@@ -13227,7 +12628,7 @@
                         <a:buNone/>
                       </a:pPr>
                       <a:r>
-                        <a:rPr lang="en-US" sz="1400" dirty="0">
+                        <a:rPr lang="en-US" sz="1500" dirty="0">
                           <a:solidFill>
                             <a:srgbClr val="1B2530"/>
                           </a:solidFill>
@@ -13237,7 +12638,7 @@
                         </a:rPr>
                         <a:t>Lectures 04 and 05</a:t>
                       </a:r>
-                      <a:endParaRPr lang="en-US" sz="1400" dirty="0">
+                      <a:endParaRPr lang="en-US" sz="1500" dirty="0">
                         <a:latin typeface="Calibri" charset="0"/>
                         <a:ea typeface="Calibri" charset="0"/>
                         <a:cs typeface="Calibri" charset="0"/>
@@ -13297,20 +12698,20 @@
                         <a:buNone/>
                       </a:pPr>
                       <a:r>
-                        <a:rPr lang="en-US" sz="1400" dirty="0">
+                        <a:rPr lang="en-US" sz="1500" b="1" dirty="0">
                           <a:solidFill>
                             <a:srgbClr val="1B2530"/>
                           </a:solidFill>
-                          <a:latin typeface="Courier New" pitchFamily="34" charset="0"/>
-                          <a:ea typeface="Courier New" pitchFamily="34" charset="-122"/>
-                          <a:cs typeface="Courier New" pitchFamily="34" charset="-120"/>
+                          <a:latin typeface="Calibri" pitchFamily="34" charset="0"/>
+                          <a:ea typeface="Calibri" pitchFamily="34" charset="-122"/>
+                          <a:cs typeface="Calibri" pitchFamily="34" charset="-120"/>
                         </a:rPr>
                         <a:t>a position below zero shown as 0xFFFFFFFF</a:t>
                       </a:r>
-                      <a:endParaRPr lang="en-US" sz="1400" dirty="0">
-                        <a:latin typeface="Courier New" charset="0"/>
-                        <a:ea typeface="Courier New" charset="0"/>
-                        <a:cs typeface="Courier New" charset="0"/>
+                      <a:endParaRPr lang="en-US" sz="1500" dirty="0">
+                        <a:latin typeface="Calibri" charset="0"/>
+                        <a:ea typeface="Calibri" charset="0"/>
+                        <a:cs typeface="Calibri" charset="0"/>
                       </a:endParaRPr>
                     </a:p>
                   </a:txBody>
@@ -13365,7 +12766,7 @@
                         <a:buNone/>
                       </a:pPr>
                       <a:r>
-                        <a:rPr lang="en-US" sz="1400" dirty="0">
+                        <a:rPr lang="en-US" sz="1500" dirty="0">
                           <a:solidFill>
                             <a:srgbClr val="1B2530"/>
                           </a:solidFill>
@@ -13375,7 +12776,7 @@
                         </a:rPr>
                         <a:t>How does a register hold a negative number?</a:t>
                       </a:r>
-                      <a:endParaRPr lang="en-US" sz="1400" dirty="0">
+                      <a:endParaRPr lang="en-US" sz="1500" dirty="0">
                         <a:latin typeface="Calibri" charset="0"/>
                         <a:ea typeface="Calibri" charset="0"/>
                         <a:cs typeface="Calibri" charset="0"/>
@@ -13433,7 +12834,7 @@
                         <a:buNone/>
                       </a:pPr>
                       <a:r>
-                        <a:rPr lang="en-US" sz="1400" dirty="0">
+                        <a:rPr lang="en-US" sz="1500" dirty="0">
                           <a:solidFill>
                             <a:srgbClr val="1B2530"/>
                           </a:solidFill>
@@ -13443,7 +12844,7 @@
                         </a:rPr>
                         <a:t>Lecture 05</a:t>
                       </a:r>
-                      <a:endParaRPr lang="en-US" sz="1400" dirty="0">
+                      <a:endParaRPr lang="en-US" sz="1500" dirty="0">
                         <a:latin typeface="Calibri" charset="0"/>
                         <a:ea typeface="Calibri" charset="0"/>
                         <a:cs typeface="Calibri" charset="0"/>
@@ -13503,20 +12904,20 @@
                         <a:buNone/>
                       </a:pPr>
                       <a:r>
-                        <a:rPr lang="en-US" sz="1400" dirty="0">
+                        <a:rPr lang="en-US" sz="1500" b="1" dirty="0">
                           <a:solidFill>
                             <a:srgbClr val="1B2530"/>
                           </a:solidFill>
-                          <a:latin typeface="Courier New" pitchFamily="34" charset="0"/>
-                          <a:ea typeface="Courier New" pitchFamily="34" charset="-122"/>
-                          <a:cs typeface="Courier New" pitchFamily="34" charset="-120"/>
+                          <a:latin typeface="Calibri" pitchFamily="34" charset="0"/>
+                          <a:ea typeface="Calibri" pitchFamily="34" charset="-122"/>
+                          <a:cs typeface="Calibri" pitchFamily="34" charset="-120"/>
                         </a:rPr>
                         <a:t>a ball that moves less than a pixel per frame</a:t>
                       </a:r>
-                      <a:endParaRPr lang="en-US" sz="1400" dirty="0">
-                        <a:latin typeface="Courier New" charset="0"/>
-                        <a:ea typeface="Courier New" charset="0"/>
-                        <a:cs typeface="Courier New" charset="0"/>
+                      <a:endParaRPr lang="en-US" sz="1500" dirty="0">
+                        <a:latin typeface="Calibri" charset="0"/>
+                        <a:ea typeface="Calibri" charset="0"/>
+                        <a:cs typeface="Calibri" charset="0"/>
                       </a:endParaRPr>
                     </a:p>
                   </a:txBody>
@@ -13571,7 +12972,7 @@
                         <a:buNone/>
                       </a:pPr>
                       <a:r>
-                        <a:rPr lang="en-US" sz="1400" dirty="0">
+                        <a:rPr lang="en-US" sz="1500" dirty="0">
                           <a:solidFill>
                             <a:srgbClr val="1B2530"/>
                           </a:solidFill>
@@ -13581,7 +12982,7 @@
                         </a:rPr>
                         <a:t>How do we represent fractions without an FPU?</a:t>
                       </a:r>
-                      <a:endParaRPr lang="en-US" sz="1400" dirty="0">
+                      <a:endParaRPr lang="en-US" sz="1500" dirty="0">
                         <a:latin typeface="Calibri" charset="0"/>
                         <a:ea typeface="Calibri" charset="0"/>
                         <a:cs typeface="Calibri" charset="0"/>
@@ -13639,7 +13040,7 @@
                         <a:buNone/>
                       </a:pPr>
                       <a:r>
-                        <a:rPr lang="en-US" sz="1400" dirty="0">
+                        <a:rPr lang="en-US" sz="1500" dirty="0">
                           <a:solidFill>
                             <a:srgbClr val="1B2530"/>
                           </a:solidFill>
@@ -13649,7 +13050,7 @@
                         </a:rPr>
                         <a:t>Lecture 06</a:t>
                       </a:r>
-                      <a:endParaRPr lang="en-US" sz="1400" dirty="0">
+                      <a:endParaRPr lang="en-US" sz="1500" dirty="0">
                         <a:latin typeface="Calibri" charset="0"/>
                         <a:ea typeface="Calibri" charset="0"/>
                         <a:cs typeface="Calibri" charset="0"/>
@@ -13709,20 +13110,20 @@
                         <a:buNone/>
                       </a:pPr>
                       <a:r>
-                        <a:rPr lang="en-US" sz="1400" dirty="0">
+                        <a:rPr lang="en-US" sz="1500" b="1" dirty="0">
                           <a:solidFill>
                             <a:srgbClr val="1B2530"/>
                           </a:solidFill>
-                          <a:latin typeface="Courier New" pitchFamily="34" charset="0"/>
-                          <a:ea typeface="Courier New" pitchFamily="34" charset="-122"/>
-                          <a:cs typeface="Courier New" pitchFamily="34" charset="-120"/>
+                          <a:latin typeface="Calibri" pitchFamily="34" charset="0"/>
+                          <a:ea typeface="Calibri" pitchFamily="34" charset="-122"/>
+                          <a:cs typeface="Calibri" pitchFamily="34" charset="-120"/>
                         </a:rPr>
                         <a:t>andi a2, t1, 255</a:t>
                       </a:r>
-                      <a:endParaRPr lang="en-US" sz="1400" dirty="0">
-                        <a:latin typeface="Courier New" charset="0"/>
-                        <a:ea typeface="Courier New" charset="0"/>
-                        <a:cs typeface="Courier New" charset="0"/>
+                      <a:endParaRPr lang="en-US" sz="1500" dirty="0">
+                        <a:latin typeface="Calibri" charset="0"/>
+                        <a:ea typeface="Calibri" charset="0"/>
+                        <a:cs typeface="Calibri" charset="0"/>
                       </a:endParaRPr>
                     </a:p>
                   </a:txBody>
@@ -13777,7 +13178,7 @@
                         <a:buNone/>
                       </a:pPr>
                       <a:r>
-                        <a:rPr lang="en-US" sz="1400" dirty="0">
+                        <a:rPr lang="en-US" sz="1500" dirty="0">
                           <a:solidFill>
                             <a:srgbClr val="1B2530"/>
                           </a:solidFill>
@@ -13787,7 +13188,7 @@
                         </a:rPr>
                         <a:t>What does AND do to thirty-two bits at once?</a:t>
                       </a:r>
-                      <a:endParaRPr lang="en-US" sz="1400" dirty="0">
+                      <a:endParaRPr lang="en-US" sz="1500" dirty="0">
                         <a:latin typeface="Calibri" charset="0"/>
                         <a:ea typeface="Calibri" charset="0"/>
                         <a:cs typeface="Calibri" charset="0"/>
@@ -13845,7 +13246,7 @@
                         <a:buNone/>
                       </a:pPr>
                       <a:r>
-                        <a:rPr lang="en-US" sz="1400" dirty="0">
+                        <a:rPr lang="en-US" sz="1500" dirty="0">
                           <a:solidFill>
                             <a:srgbClr val="1B2530"/>
                           </a:solidFill>
@@ -13855,7 +13256,7 @@
                         </a:rPr>
                         <a:t>Lectures 08 and 09</a:t>
                       </a:r>
-                      <a:endParaRPr lang="en-US" sz="1400" dirty="0">
+                      <a:endParaRPr lang="en-US" sz="1500" dirty="0">
                         <a:latin typeface="Calibri" charset="0"/>
                         <a:ea typeface="Calibri" charset="0"/>
                         <a:cs typeface="Calibri" charset="0"/>
@@ -13915,20 +13316,20 @@
                         <a:buNone/>
                       </a:pPr>
                       <a:r>
-                        <a:rPr lang="en-US" sz="1400" dirty="0">
+                        <a:rPr lang="en-US" sz="1500" b="1" dirty="0">
                           <a:solidFill>
                             <a:srgbClr val="1B2530"/>
                           </a:solidFill>
-                          <a:latin typeface="Courier New" pitchFamily="34" charset="0"/>
-                          <a:ea typeface="Courier New" pitchFamily="34" charset="-122"/>
-                          <a:cs typeface="Courier New" pitchFamily="34" charset="-120"/>
+                          <a:latin typeface="Calibri" pitchFamily="34" charset="0"/>
+                          <a:ea typeface="Calibri" pitchFamily="34" charset="-122"/>
+                          <a:cs typeface="Calibri" pitchFamily="34" charset="-120"/>
                         </a:rPr>
                         <a:t>addi t1, t1, 1</a:t>
                       </a:r>
-                      <a:endParaRPr lang="en-US" sz="1400" dirty="0">
-                        <a:latin typeface="Courier New" charset="0"/>
-                        <a:ea typeface="Courier New" charset="0"/>
-                        <a:cs typeface="Courier New" charset="0"/>
+                      <a:endParaRPr lang="en-US" sz="1500" dirty="0">
+                        <a:latin typeface="Calibri" charset="0"/>
+                        <a:ea typeface="Calibri" charset="0"/>
+                        <a:cs typeface="Calibri" charset="0"/>
                       </a:endParaRPr>
                     </a:p>
                   </a:txBody>
@@ -13983,7 +13384,7 @@
                         <a:buNone/>
                       </a:pPr>
                       <a:r>
-                        <a:rPr lang="en-US" sz="1400" dirty="0">
+                        <a:rPr lang="en-US" sz="1500" dirty="0">
                           <a:solidFill>
                             <a:srgbClr val="1B2530"/>
                           </a:solidFill>
@@ -13993,7 +13394,7 @@
                         </a:rPr>
                         <a:t>Which circuit actually adds two numbers?</a:t>
                       </a:r>
-                      <a:endParaRPr lang="en-US" sz="1400" dirty="0">
+                      <a:endParaRPr lang="en-US" sz="1500" dirty="0">
                         <a:latin typeface="Calibri" charset="0"/>
                         <a:ea typeface="Calibri" charset="0"/>
                         <a:cs typeface="Calibri" charset="0"/>
@@ -14051,7 +13452,7 @@
                         <a:buNone/>
                       </a:pPr>
                       <a:r>
-                        <a:rPr lang="en-US" sz="1400" dirty="0">
+                        <a:rPr lang="en-US" sz="1500" dirty="0">
                           <a:solidFill>
                             <a:srgbClr val="1B2530"/>
                           </a:solidFill>
@@ -14061,7 +13462,7 @@
                         </a:rPr>
                         <a:t>Lecture 09: the adders</a:t>
                       </a:r>
-                      <a:endParaRPr lang="en-US" sz="1400" dirty="0">
+                      <a:endParaRPr lang="en-US" sz="1500" dirty="0">
                         <a:latin typeface="Calibri" charset="0"/>
                         <a:ea typeface="Calibri" charset="0"/>
                         <a:cs typeface="Calibri" charset="0"/>
@@ -14121,20 +13522,20 @@
                         <a:buNone/>
                       </a:pPr>
                       <a:r>
-                        <a:rPr lang="en-US" sz="1400" dirty="0">
+                        <a:rPr lang="en-US" sz="1500" b="1" dirty="0">
                           <a:solidFill>
                             <a:srgbClr val="1B2530"/>
                           </a:solidFill>
-                          <a:latin typeface="Courier New" pitchFamily="34" charset="0"/>
-                          <a:ea typeface="Courier New" pitchFamily="34" charset="-122"/>
-                          <a:cs typeface="Courier New" pitchFamily="34" charset="-120"/>
+                          <a:latin typeface="Calibri" pitchFamily="34" charset="0"/>
+                          <a:ea typeface="Calibri" pitchFamily="34" charset="-122"/>
+                          <a:cs typeface="Calibri" pitchFamily="34" charset="-120"/>
                         </a:rPr>
                         <a:t>a pressed button is a 1</a:t>
                       </a:r>
-                      <a:endParaRPr lang="en-US" sz="1400" dirty="0">
-                        <a:latin typeface="Courier New" charset="0"/>
-                        <a:ea typeface="Courier New" charset="0"/>
-                        <a:cs typeface="Courier New" charset="0"/>
+                      <a:endParaRPr lang="en-US" sz="1500" dirty="0">
+                        <a:latin typeface="Calibri" charset="0"/>
+                        <a:ea typeface="Calibri" charset="0"/>
+                        <a:cs typeface="Calibri" charset="0"/>
                       </a:endParaRPr>
                     </a:p>
                   </a:txBody>
@@ -14189,7 +13590,7 @@
                         <a:buNone/>
                       </a:pPr>
                       <a:r>
-                        <a:rPr lang="en-US" sz="1400" dirty="0">
+                        <a:rPr lang="en-US" sz="1500" dirty="0">
                           <a:solidFill>
                             <a:srgbClr val="1B2530"/>
                           </a:solidFill>
@@ -14199,7 +13600,7 @@
                         </a:rPr>
                         <a:t>What is a bit made of, physically?</a:t>
                       </a:r>
-                      <a:endParaRPr lang="en-US" sz="1400" dirty="0">
+                      <a:endParaRPr lang="en-US" sz="1500" dirty="0">
                         <a:latin typeface="Calibri" charset="0"/>
                         <a:ea typeface="Calibri" charset="0"/>
                         <a:cs typeface="Calibri" charset="0"/>
@@ -14257,7 +13658,7 @@
                         <a:buNone/>
                       </a:pPr>
                       <a:r>
-                        <a:rPr lang="en-US" sz="1400" dirty="0">
+                        <a:rPr lang="en-US" sz="1500" dirty="0">
                           <a:solidFill>
                             <a:srgbClr val="1B2530"/>
                           </a:solidFill>
@@ -14267,7 +13668,7 @@
                         </a:rPr>
                         <a:t>Lecture 10</a:t>
                       </a:r>
-                      <a:endParaRPr lang="en-US" sz="1400" dirty="0">
+                      <a:endParaRPr lang="en-US" sz="1500" dirty="0">
                         <a:latin typeface="Calibri" charset="0"/>
                         <a:ea typeface="Calibri" charset="0"/>
                         <a:cs typeface="Calibri" charset="0"/>
@@ -14327,20 +13728,20 @@
                         <a:buNone/>
                       </a:pPr>
                       <a:r>
-                        <a:rPr lang="en-US" sz="1400" dirty="0">
+                        <a:rPr lang="en-US" sz="1500" b="1" dirty="0">
                           <a:solidFill>
                             <a:srgbClr val="1B2530"/>
                           </a:solidFill>
-                          <a:latin typeface="Courier New" pitchFamily="34" charset="0"/>
-                          <a:ea typeface="Courier New" pitchFamily="34" charset="-122"/>
-                          <a:cs typeface="Courier New" pitchFamily="34" charset="-120"/>
+                          <a:latin typeface="Calibri" pitchFamily="34" charset="0"/>
+                          <a:ea typeface="Calibri" pitchFamily="34" charset="-122"/>
+                          <a:cs typeface="Calibri" pitchFamily="34" charset="-120"/>
                         </a:rPr>
                         <a:t>counter survives between frames</a:t>
                       </a:r>
-                      <a:endParaRPr lang="en-US" sz="1400" dirty="0">
-                        <a:latin typeface="Courier New" charset="0"/>
-                        <a:ea typeface="Courier New" charset="0"/>
-                        <a:cs typeface="Courier New" charset="0"/>
+                      <a:endParaRPr lang="en-US" sz="1500" dirty="0">
+                        <a:latin typeface="Calibri" charset="0"/>
+                        <a:ea typeface="Calibri" charset="0"/>
+                        <a:cs typeface="Calibri" charset="0"/>
                       </a:endParaRPr>
                     </a:p>
                   </a:txBody>
@@ -14395,7 +13796,7 @@
                         <a:buNone/>
                       </a:pPr>
                       <a:r>
-                        <a:rPr lang="en-US" sz="1400" dirty="0">
+                        <a:rPr lang="en-US" sz="1500" dirty="0">
                           <a:solidFill>
                             <a:srgbClr val="1B2530"/>
                           </a:solidFill>
@@ -14405,7 +13806,7 @@
                         </a:rPr>
                         <a:t>How does a circuit remember a bit?</a:t>
                       </a:r>
-                      <a:endParaRPr lang="en-US" sz="1400" dirty="0">
+                      <a:endParaRPr lang="en-US" sz="1500" dirty="0">
                         <a:latin typeface="Calibri" charset="0"/>
                         <a:ea typeface="Calibri" charset="0"/>
                         <a:cs typeface="Calibri" charset="0"/>
@@ -14463,7 +13864,7 @@
                         <a:buNone/>
                       </a:pPr>
                       <a:r>
-                        <a:rPr lang="en-US" sz="1400" dirty="0">
+                        <a:rPr lang="en-US" sz="1500" dirty="0">
                           <a:solidFill>
                             <a:srgbClr val="1B2530"/>
                           </a:solidFill>
@@ -14473,7 +13874,7 @@
                         </a:rPr>
                         <a:t>Lectures 13 and 15</a:t>
                       </a:r>
-                      <a:endParaRPr lang="en-US" sz="1400" dirty="0">
+                      <a:endParaRPr lang="en-US" sz="1500" dirty="0">
                         <a:latin typeface="Calibri" charset="0"/>
                         <a:ea typeface="Calibri" charset="0"/>
                         <a:cs typeface="Calibri" charset="0"/>
@@ -14533,20 +13934,20 @@
                         <a:buNone/>
                       </a:pPr>
                       <a:r>
-                        <a:rPr lang="en-US" sz="1400" dirty="0">
+                        <a:rPr lang="en-US" sz="1500" b="1" dirty="0">
                           <a:solidFill>
                             <a:srgbClr val="1B2530"/>
                           </a:solidFill>
-                          <a:latin typeface="Courier New" pitchFamily="34" charset="0"/>
-                          <a:ea typeface="Courier New" pitchFamily="34" charset="-122"/>
-                          <a:cs typeface="Courier New" pitchFamily="34" charset="-120"/>
+                          <a:latin typeface="Calibri" pitchFamily="34" charset="0"/>
+                          <a:ea typeface="Calibri" pitchFamily="34" charset="-122"/>
+                          <a:cs typeface="Calibri" pitchFamily="34" charset="-120"/>
                         </a:rPr>
                         <a:t>0x00130313</a:t>
                       </a:r>
-                      <a:endParaRPr lang="en-US" sz="1400" dirty="0">
-                        <a:latin typeface="Courier New" charset="0"/>
-                        <a:ea typeface="Courier New" charset="0"/>
-                        <a:cs typeface="Courier New" charset="0"/>
+                      <a:endParaRPr lang="en-US" sz="1500" dirty="0">
+                        <a:latin typeface="Calibri" charset="0"/>
+                        <a:ea typeface="Calibri" charset="0"/>
+                        <a:cs typeface="Calibri" charset="0"/>
                       </a:endParaRPr>
                     </a:p>
                   </a:txBody>
@@ -14601,7 +14002,7 @@
                         <a:buNone/>
                       </a:pPr>
                       <a:r>
-                        <a:rPr lang="en-US" sz="1400" dirty="0">
+                        <a:rPr lang="en-US" sz="1500" dirty="0">
                           <a:solidFill>
                             <a:srgbClr val="1B2530"/>
                           </a:solidFill>
@@ -14611,7 +14012,7 @@
                         </a:rPr>
                         <a:t>How does the processor decode and execute it?</a:t>
                       </a:r>
-                      <a:endParaRPr lang="en-US" sz="1400" dirty="0">
+                      <a:endParaRPr lang="en-US" sz="1500" dirty="0">
                         <a:latin typeface="Calibri" charset="0"/>
                         <a:ea typeface="Calibri" charset="0"/>
                         <a:cs typeface="Calibri" charset="0"/>
@@ -14669,7 +14070,7 @@
                         <a:buNone/>
                       </a:pPr>
                       <a:r>
-                        <a:rPr lang="en-US" sz="1400" dirty="0">
+                        <a:rPr lang="en-US" sz="1500" dirty="0">
                           <a:solidFill>
                             <a:srgbClr val="1B2530"/>
                           </a:solidFill>
@@ -14679,7 +14080,7 @@
                         </a:rPr>
                         <a:t>Lectures 18 and 19</a:t>
                       </a:r>
-                      <a:endParaRPr lang="en-US" sz="1400" dirty="0">
+                      <a:endParaRPr lang="en-US" sz="1500" dirty="0">
                         <a:latin typeface="Calibri" charset="0"/>
                         <a:ea typeface="Calibri" charset="0"/>
                         <a:cs typeface="Calibri" charset="0"/>
@@ -14739,20 +14140,20 @@
                         <a:buNone/>
                       </a:pPr>
                       <a:r>
-                        <a:rPr lang="en-US" sz="1400" dirty="0">
+                        <a:rPr lang="en-US" sz="1500" b="1" dirty="0">
                           <a:solidFill>
                             <a:srgbClr val="1B2530"/>
                           </a:solidFill>
-                          <a:latin typeface="Courier New" pitchFamily="34" charset="0"/>
-                          <a:ea typeface="Courier New" pitchFamily="34" charset="-122"/>
-                          <a:cs typeface="Courier New" pitchFamily="34" charset="-120"/>
+                          <a:latin typeface="Calibri" pitchFamily="34" charset="0"/>
+                          <a:ea typeface="Calibri" pitchFamily="34" charset="-122"/>
+                          <a:cs typeface="Calibri" pitchFamily="34" charset="-120"/>
                         </a:rPr>
                         <a:t>three functions and a rectangle</a:t>
                       </a:r>
-                      <a:endParaRPr lang="en-US" sz="1400" dirty="0">
-                        <a:latin typeface="Courier New" charset="0"/>
-                        <a:ea typeface="Courier New" charset="0"/>
-                        <a:cs typeface="Courier New" charset="0"/>
+                      <a:endParaRPr lang="en-US" sz="1500" dirty="0">
+                        <a:latin typeface="Calibri" charset="0"/>
+                        <a:ea typeface="Calibri" charset="0"/>
+                        <a:cs typeface="Calibri" charset="0"/>
                       </a:endParaRPr>
                     </a:p>
                   </a:txBody>
@@ -14807,7 +14208,7 @@
                         <a:buNone/>
                       </a:pPr>
                       <a:r>
-                        <a:rPr lang="en-US" sz="1400" dirty="0">
+                        <a:rPr lang="en-US" sz="1500" dirty="0">
                           <a:solidFill>
                             <a:srgbClr val="1B2530"/>
                           </a:solidFill>
@@ -14817,7 +14218,7 @@
                         </a:rPr>
                         <a:t>Can I make a whole game out of this?</a:t>
                       </a:r>
-                      <a:endParaRPr lang="en-US" sz="1400" dirty="0">
+                      <a:endParaRPr lang="en-US" sz="1500" dirty="0">
                         <a:latin typeface="Calibri" charset="0"/>
                         <a:ea typeface="Calibri" charset="0"/>
                         <a:cs typeface="Calibri" charset="0"/>
@@ -14875,7 +14276,7 @@
                         <a:buNone/>
                       </a:pPr>
                       <a:r>
-                        <a:rPr lang="en-US" sz="1400" dirty="0">
+                        <a:rPr lang="en-US" sz="1500" dirty="0">
                           <a:solidFill>
                             <a:srgbClr val="1B2530"/>
                           </a:solidFill>
@@ -14885,7 +14286,7 @@
                         </a:rPr>
                         <a:t>Verm1: 07, 12, 17, 22</a:t>
                       </a:r>
-                      <a:endParaRPr lang="en-US" sz="1400" dirty="0">
+                      <a:endParaRPr lang="en-US" sz="1500" dirty="0">
                         <a:latin typeface="Calibri" charset="0"/>
                         <a:ea typeface="Calibri" charset="0"/>
                         <a:cs typeface="Calibri" charset="0"/>
@@ -15113,6 +14514,851 @@
               <a:t> → Lectures 04–19</a:t>
             </a:r>
             <a:endParaRPr lang="en-US" sz="1100" dirty="0"/>
+          </a:p>
+        </p:txBody>
+      </p:sp>
+      <p:sp>
+        <p:nvSpPr>
+          <p:cNvPr id="25" name="Slide Number Placeholder 0"/>
+          <p:cNvSpPr>
+            <a:spLocks noGrp="1"/>
+          </p:cNvSpPr>
+          <p:nvPr>
+            <p:ph type="sldNum" sz="quarter" idx="4294967295"/>
+          </p:nvPr>
+        </p:nvSpPr>
+        <p:spPr>
+          <a:xfrm>
+            <a:off x="11002975" y="6419088"/>
+            <a:ext cx="640080" cy="274320"/>
+          </a:xfrm>
+          <a:prstGeom prst="rect">
+            <a:avLst/>
+          </a:prstGeom>
+          <a:extLst>
+            <a:ext uri="{C572A759-6A51-4108-AA02-DFA0A04FC94B}">
+              <ma14:wrappingTextBoxFlag xmlns:ma14="http://schemas.microsoft.com/office/mac/drawingml/2011/main" val="0"/>
+            </a:ext>
+          </a:extLst>
+        </p:spPr>
+        <p:txBody>
+          <a:bodyPr/>
+          <a:lstStyle>
+            <a:lvl1pPr>
+              <a:defRPr sz="1000">
+                <a:solidFill>
+                  <a:srgbClr val="5B6B78"/>
+                </a:solidFill>
+                <a:latin typeface="Calibri"/>
+                <a:ea typeface="Calibri"/>
+                <a:cs typeface="Calibri"/>
+              </a:defRPr>
+            </a:lvl1pPr>
+          </a:lstStyle>
+          <a:p>
+            <a:pPr algn="r"/>
+            <a:fld id="{F7021451-1387-4CA6-816F-3879F97B5CBC}" type="slidenum">
+              <a:rPr b="0" lang="en-US"/>
+              <a:t>15</a:t>
+            </a:fld>
+            <a:endParaRPr lang="en-US"/>
+          </a:p>
+        </p:txBody>
+      </p:sp>
+    </p:spTree>
+  </p:cSld>
+  <p:clrMapOvr>
+    <a:masterClrMapping/>
+  </p:clrMapOvr>
+</p:sld>
+</file>
+
+<file path=ppt/slides/slide16.xml><?xml version="1.0" encoding="utf-8"?>
+<p:sld xmlns:a="http://schemas.openxmlformats.org/drawingml/2006/main" xmlns:r="http://schemas.openxmlformats.org/officeDocument/2006/relationships" xmlns:p="http://schemas.openxmlformats.org/presentationml/2006/main">
+  <p:cSld name="Slide 16">
+    <p:spTree>
+      <p:nvGrpSpPr>
+        <p:cNvPr id="1" name=""/>
+        <p:cNvGrpSpPr/>
+        <p:nvPr/>
+      </p:nvGrpSpPr>
+      <p:grpSpPr>
+        <a:xfrm>
+          <a:off x="0" y="0"/>
+          <a:ext cx="0" cy="0"/>
+          <a:chOff x="0" y="0"/>
+          <a:chExt cx="0" cy="0"/>
+        </a:xfrm>
+      </p:grpSpPr>
+      <p:sp>
+        <p:nvSpPr>
+          <p:cNvPr id="2" name="Text 1"/>
+          <p:cNvSpPr/>
+          <p:nvPr>
+            <p:ph idx="101" type="title" hasCustomPrompt="1"/>
+          </p:nvPr>
+        </p:nvSpPr>
+        <p:spPr>
+          <a:xfrm>
+            <a:off x="548640" y="365760"/>
+            <a:ext cx="11094415" cy="868680"/>
+          </a:xfrm>
+          <a:prstGeom prst="rect">
+            <a:avLst/>
+          </a:prstGeom>
+          <a:noFill/>
+          <a:ln/>
+        </p:spPr>
+        <p:txBody>
+          <a:bodyPr wrap="square" lIns="0" tIns="0" rIns="0" bIns="0" rtlCol="0" anchor="ctr"/>
+          <a:lstStyle/>
+          <a:p>
+            <a:pPr algn="l" indent="0" marL="0">
+              <a:buNone/>
+            </a:pPr>
+            <a:r>
+              <a:rPr lang="en-US" sz="3200" b="1" dirty="0">
+                <a:solidFill>
+                  <a:srgbClr val="2E4A62"/>
+                </a:solidFill>
+                <a:latin typeface="Cambria" pitchFamily="34" charset="0"/>
+                <a:ea typeface="Cambria" pitchFamily="34" charset="-122"/>
+                <a:cs typeface="Cambria" pitchFamily="34" charset="-120"/>
+              </a:rPr>
+              <a:t>Today's thread, and where it leads</a:t>
+            </a:r>
+            <a:endParaRPr lang="en-US" sz="3200" dirty="0"/>
+          </a:p>
+        </p:txBody>
+      </p:sp>
+      <p:sp>
+        <p:nvSpPr>
+          <p:cNvPr id="3" name="Shape 1"/>
+          <p:cNvSpPr/>
+          <p:nvPr/>
+        </p:nvSpPr>
+        <p:spPr>
+          <a:xfrm>
+            <a:off x="548640" y="1874520"/>
+            <a:ext cx="1926275" cy="2468880"/>
+          </a:xfrm>
+          <a:prstGeom prst="roundRect">
+            <a:avLst>
+              <a:gd name="adj" fmla="val 3798"/>
+            </a:avLst>
+          </a:prstGeom>
+          <a:solidFill>
+            <a:srgbClr val="EEF2F4"/>
+          </a:solidFill>
+          <a:ln w="12700">
+            <a:solidFill>
+              <a:srgbClr val="EEF2F4"/>
+            </a:solidFill>
+            <a:prstDash val="solid"/>
+          </a:ln>
+        </p:spPr>
+      </p:sp>
+      <p:sp>
+        <p:nvSpPr>
+          <p:cNvPr id="4" name="Text 2"/>
+          <p:cNvSpPr txBox="1"/>
+          <p:nvPr/>
+        </p:nvSpPr>
+        <p:spPr>
+          <a:xfrm>
+            <a:off x="685800" y="2057400"/>
+            <a:ext cx="1651955" cy="685800"/>
+          </a:xfrm>
+          <a:prstGeom prst="roundRect">
+            <a:avLst>
+              <a:gd name="adj" fmla="val 10667"/>
+            </a:avLst>
+          </a:prstGeom>
+          <a:solidFill>
+            <a:srgbClr val="0E7C86"/>
+          </a:solidFill>
+          <a:ln>
+            <a:solidFill>
+              <a:srgbClr val="0E7C86"/>
+            </a:solidFill>
+          </a:ln>
+        </p:spPr>
+        <p:txBody>
+          <a:bodyPr wrap="square" lIns="0" tIns="0" rIns="0" bIns="0" rtlCol="0" anchor="ctr"/>
+          <a:lstStyle/>
+          <a:p>
+            <a:pPr algn="ctr" indent="0" marL="0">
+              <a:buNone/>
+            </a:pPr>
+            <a:r>
+              <a:rPr lang="en-US" sz="1900" b="1" dirty="0">
+                <a:solidFill>
+                  <a:srgbClr val="FFFFFF"/>
+                </a:solidFill>
+                <a:latin typeface="Calibri" pitchFamily="34" charset="0"/>
+                <a:ea typeface="Calibri" pitchFamily="34" charset="-122"/>
+                <a:cs typeface="Calibri" pitchFamily="34" charset="-120"/>
+              </a:rPr>
+              <a:t>cartridge</a:t>
+            </a:r>
+            <a:endParaRPr lang="en-US" sz="1900" dirty="0"/>
+          </a:p>
+        </p:txBody>
+      </p:sp>
+      <p:sp>
+        <p:nvSpPr>
+          <p:cNvPr id="5" name="Text 3"/>
+          <p:cNvSpPr txBox="1"/>
+          <p:nvPr/>
+        </p:nvSpPr>
+        <p:spPr>
+          <a:xfrm>
+            <a:off x="685800" y="2880360"/>
+            <a:ext cx="1651955" cy="1325880"/>
+          </a:xfrm>
+          <a:prstGeom prst="rect">
+            <a:avLst/>
+          </a:prstGeom>
+          <a:noFill/>
+          <a:ln/>
+        </p:spPr>
+        <p:txBody>
+          <a:bodyPr wrap="square" lIns="0" tIns="0" rIns="0" bIns="0" rtlCol="0" anchor="ctr"/>
+          <a:lstStyle/>
+          <a:p>
+            <a:pPr algn="ctr" indent="0" marL="0">
+              <a:buNone/>
+            </a:pPr>
+            <a:r>
+              <a:rPr lang="en-US" sz="1700" dirty="0">
+                <a:solidFill>
+                  <a:srgbClr val="1B2530"/>
+                </a:solidFill>
+                <a:latin typeface="Calibri" pitchFamily="34" charset="0"/>
+                <a:ea typeface="Calibri" pitchFamily="34" charset="-122"/>
+                <a:cs typeface="Calibri" pitchFamily="34" charset="-120"/>
+              </a:rPr>
+              <a:t>init once; update and draw at every frame</a:t>
+            </a:r>
+            <a:endParaRPr lang="en-US" sz="1700" dirty="0"/>
+          </a:p>
+        </p:txBody>
+      </p:sp>
+      <p:sp>
+        <p:nvSpPr>
+          <p:cNvPr id="6" name="Shape 4"/>
+          <p:cNvSpPr/>
+          <p:nvPr/>
+        </p:nvSpPr>
+        <p:spPr>
+          <a:xfrm>
+            <a:off x="2520635" y="2962656"/>
+            <a:ext cx="274320" cy="292608"/>
+          </a:xfrm>
+          <a:prstGeom prst="rightArrow">
+            <a:avLst/>
+          </a:prstGeom>
+          <a:solidFill>
+            <a:srgbClr val="5B6B78"/>
+          </a:solidFill>
+          <a:ln w="12700">
+            <a:solidFill>
+              <a:srgbClr val="5B6B78"/>
+            </a:solidFill>
+            <a:prstDash val="solid"/>
+          </a:ln>
+        </p:spPr>
+      </p:sp>
+      <p:sp>
+        <p:nvSpPr>
+          <p:cNvPr id="7" name="Shape 5"/>
+          <p:cNvSpPr/>
+          <p:nvPr/>
+        </p:nvSpPr>
+        <p:spPr>
+          <a:xfrm>
+            <a:off x="2840675" y="1874520"/>
+            <a:ext cx="1926275" cy="2468880"/>
+          </a:xfrm>
+          <a:prstGeom prst="roundRect">
+            <a:avLst>
+              <a:gd name="adj" fmla="val 3798"/>
+            </a:avLst>
+          </a:prstGeom>
+          <a:solidFill>
+            <a:srgbClr val="EEF2F4"/>
+          </a:solidFill>
+          <a:ln w="12700">
+            <a:solidFill>
+              <a:srgbClr val="EEF2F4"/>
+            </a:solidFill>
+            <a:prstDash val="solid"/>
+          </a:ln>
+        </p:spPr>
+      </p:sp>
+      <p:sp>
+        <p:nvSpPr>
+          <p:cNvPr id="8" name="Text 6"/>
+          <p:cNvSpPr txBox="1"/>
+          <p:nvPr/>
+        </p:nvSpPr>
+        <p:spPr>
+          <a:xfrm>
+            <a:off x="2977835" y="2057400"/>
+            <a:ext cx="1651955" cy="685800"/>
+          </a:xfrm>
+          <a:prstGeom prst="roundRect">
+            <a:avLst>
+              <a:gd name="adj" fmla="val 10667"/>
+            </a:avLst>
+          </a:prstGeom>
+          <a:solidFill>
+            <a:srgbClr val="C7791B"/>
+          </a:solidFill>
+          <a:ln>
+            <a:solidFill>
+              <a:srgbClr val="C7791B"/>
+            </a:solidFill>
+          </a:ln>
+        </p:spPr>
+        <p:txBody>
+          <a:bodyPr wrap="square" lIns="0" tIns="0" rIns="0" bIns="0" rtlCol="0" anchor="ctr"/>
+          <a:lstStyle/>
+          <a:p>
+            <a:pPr algn="ctr" indent="0" marL="0">
+              <a:buNone/>
+            </a:pPr>
+            <a:r>
+              <a:rPr lang="en-US" sz="1900" b="1" dirty="0">
+                <a:solidFill>
+                  <a:srgbClr val="FFFFFF"/>
+                </a:solidFill>
+                <a:latin typeface="Calibri" pitchFamily="34" charset="0"/>
+                <a:ea typeface="Calibri" pitchFamily="34" charset="-122"/>
+                <a:cs typeface="Calibri" pitchFamily="34" charset="-120"/>
+              </a:rPr>
+              <a:t>registers</a:t>
+            </a:r>
+            <a:endParaRPr lang="en-US" sz="1900" dirty="0"/>
+          </a:p>
+        </p:txBody>
+      </p:sp>
+      <p:sp>
+        <p:nvSpPr>
+          <p:cNvPr id="9" name="Text 7"/>
+          <p:cNvSpPr txBox="1"/>
+          <p:nvPr/>
+        </p:nvSpPr>
+        <p:spPr>
+          <a:xfrm>
+            <a:off x="2977835" y="2880360"/>
+            <a:ext cx="1651955" cy="1325880"/>
+          </a:xfrm>
+          <a:prstGeom prst="rect">
+            <a:avLst/>
+          </a:prstGeom>
+          <a:noFill/>
+          <a:ln/>
+        </p:spPr>
+        <p:txBody>
+          <a:bodyPr wrap="square" lIns="0" tIns="0" rIns="0" bIns="0" rtlCol="0" anchor="ctr"/>
+          <a:lstStyle/>
+          <a:p>
+            <a:pPr algn="ctr" indent="0" marL="0">
+              <a:buNone/>
+            </a:pPr>
+            <a:r>
+              <a:rPr lang="en-US" sz="1700" dirty="0">
+                <a:solidFill>
+                  <a:srgbClr val="1B2530"/>
+                </a:solidFill>
+                <a:latin typeface="Calibri" pitchFamily="34" charset="0"/>
+                <a:ea typeface="Calibri" pitchFamily="34" charset="-122"/>
+                <a:cs typeface="Calibri" pitchFamily="34" charset="-120"/>
+              </a:rPr>
+              <a:t>values while they are computed</a:t>
+            </a:r>
+            <a:endParaRPr lang="en-US" sz="1700" dirty="0"/>
+          </a:p>
+        </p:txBody>
+      </p:sp>
+      <p:sp>
+        <p:nvSpPr>
+          <p:cNvPr id="10" name="Shape 8"/>
+          <p:cNvSpPr/>
+          <p:nvPr/>
+        </p:nvSpPr>
+        <p:spPr>
+          <a:xfrm>
+            <a:off x="4812670" y="2962656"/>
+            <a:ext cx="274320" cy="292608"/>
+          </a:xfrm>
+          <a:prstGeom prst="rightArrow">
+            <a:avLst/>
+          </a:prstGeom>
+          <a:solidFill>
+            <a:srgbClr val="5B6B78"/>
+          </a:solidFill>
+          <a:ln w="12700">
+            <a:solidFill>
+              <a:srgbClr val="5B6B78"/>
+            </a:solidFill>
+            <a:prstDash val="solid"/>
+          </a:ln>
+        </p:spPr>
+      </p:sp>
+      <p:sp>
+        <p:nvSpPr>
+          <p:cNvPr id="11" name="Shape 9"/>
+          <p:cNvSpPr/>
+          <p:nvPr/>
+        </p:nvSpPr>
+        <p:spPr>
+          <a:xfrm>
+            <a:off x="5132710" y="1874520"/>
+            <a:ext cx="1926275" cy="2468880"/>
+          </a:xfrm>
+          <a:prstGeom prst="roundRect">
+            <a:avLst>
+              <a:gd name="adj" fmla="val 3798"/>
+            </a:avLst>
+          </a:prstGeom>
+          <a:solidFill>
+            <a:srgbClr val="EEF2F4"/>
+          </a:solidFill>
+          <a:ln w="12700">
+            <a:solidFill>
+              <a:srgbClr val="EEF2F4"/>
+            </a:solidFill>
+            <a:prstDash val="solid"/>
+          </a:ln>
+        </p:spPr>
+      </p:sp>
+      <p:sp>
+        <p:nvSpPr>
+          <p:cNvPr id="12" name="Text 10"/>
+          <p:cNvSpPr txBox="1"/>
+          <p:nvPr/>
+        </p:nvSpPr>
+        <p:spPr>
+          <a:xfrm>
+            <a:off x="5269870" y="2057400"/>
+            <a:ext cx="1651955" cy="685800"/>
+          </a:xfrm>
+          <a:prstGeom prst="roundRect">
+            <a:avLst>
+              <a:gd name="adj" fmla="val 10667"/>
+            </a:avLst>
+          </a:prstGeom>
+          <a:solidFill>
+            <a:srgbClr val="6B4FA0"/>
+          </a:solidFill>
+          <a:ln>
+            <a:solidFill>
+              <a:srgbClr val="6B4FA0"/>
+            </a:solidFill>
+          </a:ln>
+        </p:spPr>
+        <p:txBody>
+          <a:bodyPr wrap="square" lIns="0" tIns="0" rIns="0" bIns="0" rtlCol="0" anchor="ctr"/>
+          <a:lstStyle/>
+          <a:p>
+            <a:pPr algn="ctr" indent="0" marL="0">
+              <a:buNone/>
+            </a:pPr>
+            <a:r>
+              <a:rPr lang="en-US" sz="1900" b="1" dirty="0">
+                <a:solidFill>
+                  <a:srgbClr val="FFFFFF"/>
+                </a:solidFill>
+                <a:latin typeface="Calibri" pitchFamily="34" charset="0"/>
+                <a:ea typeface="Calibri" pitchFamily="34" charset="-122"/>
+                <a:cs typeface="Calibri" pitchFamily="34" charset="-120"/>
+              </a:rPr>
+              <a:t>memory</a:t>
+            </a:r>
+            <a:endParaRPr lang="en-US" sz="1900" dirty="0"/>
+          </a:p>
+        </p:txBody>
+      </p:sp>
+      <p:sp>
+        <p:nvSpPr>
+          <p:cNvPr id="13" name="Text 11"/>
+          <p:cNvSpPr txBox="1"/>
+          <p:nvPr/>
+        </p:nvSpPr>
+        <p:spPr>
+          <a:xfrm>
+            <a:off x="5269870" y="2880360"/>
+            <a:ext cx="1651955" cy="1325880"/>
+          </a:xfrm>
+          <a:prstGeom prst="rect">
+            <a:avLst/>
+          </a:prstGeom>
+          <a:noFill/>
+          <a:ln/>
+        </p:spPr>
+        <p:txBody>
+          <a:bodyPr wrap="square" lIns="0" tIns="0" rIns="0" bIns="0" rtlCol="0" anchor="ctr"/>
+          <a:lstStyle/>
+          <a:p>
+            <a:pPr algn="ctr" indent="0" marL="0">
+              <a:buNone/>
+            </a:pPr>
+            <a:r>
+              <a:rPr lang="en-US" sz="1700" dirty="0">
+                <a:solidFill>
+                  <a:srgbClr val="1B2530"/>
+                </a:solidFill>
+                <a:latin typeface="Calibri" pitchFamily="34" charset="0"/>
+                <a:ea typeface="Calibri" pitchFamily="34" charset="-122"/>
+                <a:cs typeface="Calibri" pitchFamily="34" charset="-120"/>
+              </a:rPr>
+              <a:t>variables at addresses, kept between frames</a:t>
+            </a:r>
+            <a:endParaRPr lang="en-US" sz="1700" dirty="0"/>
+          </a:p>
+        </p:txBody>
+      </p:sp>
+      <p:sp>
+        <p:nvSpPr>
+          <p:cNvPr id="14" name="Shape 12"/>
+          <p:cNvSpPr/>
+          <p:nvPr/>
+        </p:nvSpPr>
+        <p:spPr>
+          <a:xfrm>
+            <a:off x="7104705" y="2962656"/>
+            <a:ext cx="274320" cy="292608"/>
+          </a:xfrm>
+          <a:prstGeom prst="rightArrow">
+            <a:avLst/>
+          </a:prstGeom>
+          <a:solidFill>
+            <a:srgbClr val="5B6B78"/>
+          </a:solidFill>
+          <a:ln w="12700">
+            <a:solidFill>
+              <a:srgbClr val="5B6B78"/>
+            </a:solidFill>
+            <a:prstDash val="solid"/>
+          </a:ln>
+        </p:spPr>
+      </p:sp>
+      <p:sp>
+        <p:nvSpPr>
+          <p:cNvPr id="15" name="Shape 13"/>
+          <p:cNvSpPr/>
+          <p:nvPr/>
+        </p:nvSpPr>
+        <p:spPr>
+          <a:xfrm>
+            <a:off x="7424745" y="1874520"/>
+            <a:ext cx="1926275" cy="2468880"/>
+          </a:xfrm>
+          <a:prstGeom prst="roundRect">
+            <a:avLst>
+              <a:gd name="adj" fmla="val 3798"/>
+            </a:avLst>
+          </a:prstGeom>
+          <a:solidFill>
+            <a:srgbClr val="EEF2F4"/>
+          </a:solidFill>
+          <a:ln w="12700">
+            <a:solidFill>
+              <a:srgbClr val="EEF2F4"/>
+            </a:solidFill>
+            <a:prstDash val="solid"/>
+          </a:ln>
+        </p:spPr>
+      </p:sp>
+      <p:sp>
+        <p:nvSpPr>
+          <p:cNvPr id="16" name="Text 14"/>
+          <p:cNvSpPr txBox="1"/>
+          <p:nvPr/>
+        </p:nvSpPr>
+        <p:spPr>
+          <a:xfrm>
+            <a:off x="7561905" y="2057400"/>
+            <a:ext cx="1651955" cy="685800"/>
+          </a:xfrm>
+          <a:prstGeom prst="roundRect">
+            <a:avLst>
+              <a:gd name="adj" fmla="val 10667"/>
+            </a:avLst>
+          </a:prstGeom>
+          <a:solidFill>
+            <a:srgbClr val="2F7D4F"/>
+          </a:solidFill>
+          <a:ln>
+            <a:solidFill>
+              <a:srgbClr val="2F7D4F"/>
+            </a:solidFill>
+          </a:ln>
+        </p:spPr>
+        <p:txBody>
+          <a:bodyPr wrap="square" lIns="0" tIns="0" rIns="0" bIns="0" rtlCol="0" anchor="ctr"/>
+          <a:lstStyle/>
+          <a:p>
+            <a:pPr algn="ctr" indent="0" marL="0">
+              <a:buNone/>
+            </a:pPr>
+            <a:r>
+              <a:rPr lang="en-US" sz="1900" b="1" dirty="0">
+                <a:solidFill>
+                  <a:srgbClr val="FFFFFF"/>
+                </a:solidFill>
+                <a:latin typeface="Calibri" pitchFamily="34" charset="0"/>
+                <a:ea typeface="Calibri" pitchFamily="34" charset="-122"/>
+                <a:cs typeface="Calibri" pitchFamily="34" charset="-120"/>
+              </a:rPr>
+              <a:t>la, lw, addi, sw</a:t>
+            </a:r>
+            <a:endParaRPr lang="en-US" sz="1900" dirty="0"/>
+          </a:p>
+        </p:txBody>
+      </p:sp>
+      <p:sp>
+        <p:nvSpPr>
+          <p:cNvPr id="17" name="Text 15"/>
+          <p:cNvSpPr txBox="1"/>
+          <p:nvPr/>
+        </p:nvSpPr>
+        <p:spPr>
+          <a:xfrm>
+            <a:off x="7561905" y="2880360"/>
+            <a:ext cx="1651955" cy="1325880"/>
+          </a:xfrm>
+          <a:prstGeom prst="rect">
+            <a:avLst/>
+          </a:prstGeom>
+          <a:noFill/>
+          <a:ln/>
+        </p:spPr>
+        <p:txBody>
+          <a:bodyPr wrap="square" lIns="0" tIns="0" rIns="0" bIns="0" rtlCol="0" anchor="ctr"/>
+          <a:lstStyle/>
+          <a:p>
+            <a:pPr algn="ctr" indent="0" marL="0">
+              <a:buNone/>
+            </a:pPr>
+            <a:r>
+              <a:rPr lang="en-US" sz="1700" dirty="0">
+                <a:solidFill>
+                  <a:srgbClr val="1B2530"/>
+                </a:solidFill>
+                <a:latin typeface="Calibri" pitchFamily="34" charset="0"/>
+                <a:ea typeface="Calibri" pitchFamily="34" charset="-122"/>
+                <a:cs typeface="Calibri" pitchFamily="34" charset="-120"/>
+              </a:rPr>
+              <a:t>load, modify, store</a:t>
+            </a:r>
+            <a:endParaRPr lang="en-US" sz="1700" dirty="0"/>
+          </a:p>
+        </p:txBody>
+      </p:sp>
+      <p:sp>
+        <p:nvSpPr>
+          <p:cNvPr id="18" name="Shape 16"/>
+          <p:cNvSpPr/>
+          <p:nvPr/>
+        </p:nvSpPr>
+        <p:spPr>
+          <a:xfrm>
+            <a:off x="9396740" y="2962656"/>
+            <a:ext cx="274320" cy="292608"/>
+          </a:xfrm>
+          <a:prstGeom prst="rightArrow">
+            <a:avLst/>
+          </a:prstGeom>
+          <a:solidFill>
+            <a:srgbClr val="5B6B78"/>
+          </a:solidFill>
+          <a:ln w="12700">
+            <a:solidFill>
+              <a:srgbClr val="5B6B78"/>
+            </a:solidFill>
+            <a:prstDash val="solid"/>
+          </a:ln>
+        </p:spPr>
+      </p:sp>
+      <p:sp>
+        <p:nvSpPr>
+          <p:cNvPr id="19" name="Shape 17"/>
+          <p:cNvSpPr/>
+          <p:nvPr/>
+        </p:nvSpPr>
+        <p:spPr>
+          <a:xfrm>
+            <a:off x="9716780" y="1874520"/>
+            <a:ext cx="1926275" cy="2468880"/>
+          </a:xfrm>
+          <a:prstGeom prst="roundRect">
+            <a:avLst>
+              <a:gd name="adj" fmla="val 3798"/>
+            </a:avLst>
+          </a:prstGeom>
+          <a:solidFill>
+            <a:srgbClr val="EEF2F4"/>
+          </a:solidFill>
+          <a:ln w="12700">
+            <a:solidFill>
+              <a:srgbClr val="EEF2F4"/>
+            </a:solidFill>
+            <a:prstDash val="solid"/>
+          </a:ln>
+        </p:spPr>
+      </p:sp>
+      <p:sp>
+        <p:nvSpPr>
+          <p:cNvPr id="20" name="Text 18"/>
+          <p:cNvSpPr txBox="1"/>
+          <p:nvPr/>
+        </p:nvSpPr>
+        <p:spPr>
+          <a:xfrm>
+            <a:off x="9853940" y="2057400"/>
+            <a:ext cx="1651955" cy="685800"/>
+          </a:xfrm>
+          <a:prstGeom prst="roundRect">
+            <a:avLst>
+              <a:gd name="adj" fmla="val 10667"/>
+            </a:avLst>
+          </a:prstGeom>
+          <a:solidFill>
+            <a:srgbClr val="B23A48"/>
+          </a:solidFill>
+          <a:ln>
+            <a:solidFill>
+              <a:srgbClr val="B23A48"/>
+            </a:solidFill>
+          </a:ln>
+        </p:spPr>
+        <p:txBody>
+          <a:bodyPr wrap="square" lIns="0" tIns="0" rIns="0" bIns="0" rtlCol="0" anchor="ctr"/>
+          <a:lstStyle/>
+          <a:p>
+            <a:pPr algn="ctr" indent="0" marL="0">
+              <a:buNone/>
+            </a:pPr>
+            <a:r>
+              <a:rPr lang="en-US" sz="1900" b="1" dirty="0">
+                <a:solidFill>
+                  <a:srgbClr val="FFFFFF"/>
+                </a:solidFill>
+                <a:latin typeface="Calibri" pitchFamily="34" charset="0"/>
+                <a:ea typeface="Calibri" pitchFamily="34" charset="-122"/>
+                <a:cs typeface="Calibri" pitchFamily="34" charset="-120"/>
+              </a:rPr>
+              <a:t>trace</a:t>
+            </a:r>
+            <a:endParaRPr lang="en-US" sz="1900" dirty="0"/>
+          </a:p>
+        </p:txBody>
+      </p:sp>
+      <p:sp>
+        <p:nvSpPr>
+          <p:cNvPr id="21" name="Text 19"/>
+          <p:cNvSpPr txBox="1"/>
+          <p:nvPr/>
+        </p:nvSpPr>
+        <p:spPr>
+          <a:xfrm>
+            <a:off x="9853940" y="2880360"/>
+            <a:ext cx="1651955" cy="1325880"/>
+          </a:xfrm>
+          <a:prstGeom prst="rect">
+            <a:avLst/>
+          </a:prstGeom>
+          <a:noFill/>
+          <a:ln/>
+        </p:spPr>
+        <p:txBody>
+          <a:bodyPr wrap="square" lIns="0" tIns="0" rIns="0" bIns="0" rtlCol="0" anchor="ctr"/>
+          <a:lstStyle/>
+          <a:p>
+            <a:pPr algn="ctr" indent="0" marL="0">
+              <a:buNone/>
+            </a:pPr>
+            <a:r>
+              <a:rPr lang="en-US" sz="1700" dirty="0">
+                <a:solidFill>
+                  <a:srgbClr val="1B2530"/>
+                </a:solidFill>
+                <a:latin typeface="Calibri" pitchFamily="34" charset="0"/>
+                <a:ea typeface="Calibri" pitchFamily="34" charset="-122"/>
+                <a:cs typeface="Calibri" pitchFamily="34" charset="-120"/>
+              </a:rPr>
+              <a:t>predict the screen before you run</a:t>
+            </a:r>
+            <a:endParaRPr lang="en-US" sz="1700" dirty="0"/>
+          </a:p>
+        </p:txBody>
+      </p:sp>
+      <p:sp>
+        <p:nvSpPr>
+          <p:cNvPr id="22" name="Shape 20"/>
+          <p:cNvSpPr/>
+          <p:nvPr/>
+        </p:nvSpPr>
+        <p:spPr>
+          <a:xfrm>
+            <a:off x="548640" y="4709160"/>
+            <a:ext cx="11094415" cy="1463040"/>
+          </a:xfrm>
+          <a:prstGeom prst="roundRect">
+            <a:avLst>
+              <a:gd name="adj" fmla="val 5000"/>
+            </a:avLst>
+          </a:prstGeom>
+          <a:solidFill>
+            <a:srgbClr val="D8ECEE"/>
+          </a:solidFill>
+          <a:ln w="12700">
+            <a:solidFill>
+              <a:srgbClr val="D8ECEE"/>
+            </a:solidFill>
+            <a:prstDash val="solid"/>
+          </a:ln>
+        </p:spPr>
+      </p:sp>
+      <p:sp>
+        <p:nvSpPr>
+          <p:cNvPr id="23" name="Text 21"/>
+          <p:cNvSpPr txBox="1"/>
+          <p:nvPr/>
+        </p:nvSpPr>
+        <p:spPr>
+          <a:xfrm>
+            <a:off x="822960" y="4800600"/>
+            <a:ext cx="10545775" cy="1280160"/>
+          </a:xfrm>
+          <a:prstGeom prst="rect">
+            <a:avLst/>
+          </a:prstGeom>
+          <a:noFill/>
+          <a:ln/>
+        </p:spPr>
+        <p:txBody>
+          <a:bodyPr wrap="square" lIns="0" tIns="0" rIns="0" bIns="0" rtlCol="0" anchor="ctr"/>
+          <a:lstStyle/>
+          <a:p>
+            <a:pPr indent="0" marL="0">
+              <a:buNone/>
+            </a:pPr>
+            <a:r>
+              <a:rPr lang="en-US" sz="2000" dirty="0">
+                <a:solidFill>
+                  <a:srgbClr val="1B2530"/>
+                </a:solidFill>
+                <a:latin typeface="Calibri" pitchFamily="34" charset="0"/>
+                <a:ea typeface="Calibri" pitchFamily="34" charset="-122"/>
+                <a:cs typeface="Calibri" pitchFamily="34" charset="-120"/>
+              </a:rPr>
+              <a:t>Next: Lecture 03, where these ideas come from. The numbers: Lectures 04 to 06. The stack and the calling convention: Lecture 18. The encoding of an instruction: Lecture 19.</a:t>
+            </a:r>
+            <a:endParaRPr lang="en-US" sz="2000" dirty="0"/>
           </a:p>
         </p:txBody>
       </p:sp>
@@ -19668,7 +19914,7 @@
                 <a:ea typeface="Cambria" pitchFamily="34" charset="-122"/>
                 <a:cs typeface="Cambria" pitchFamily="34" charset="-120"/>
               </a:rPr>
-              <a:t>What you will be able to do by the end</a:t>
+              <a:t>Your learning contract for today</a:t>
             </a:r>
             <a:endParaRPr lang="en-US" sz="3200" dirty="0"/>
           </a:p>
@@ -19676,50 +19922,28 @@
       </p:sp>
       <p:sp>
         <p:nvSpPr>
-          <p:cNvPr id="3" name="Text 1"/>
-          <p:cNvSpPr txBox="1"/>
+          <p:cNvPr id="3" name="Shape 1"/>
+          <p:cNvSpPr/>
           <p:nvPr/>
         </p:nvSpPr>
         <p:spPr>
           <a:xfrm>
-            <a:off x="548640" y="1435608"/>
-            <a:ext cx="402336" cy="402336"/>
-          </a:xfrm>
-          <a:prstGeom prst="roundRect">
-            <a:avLst>
-              <a:gd name="adj" fmla="val 18182"/>
-            </a:avLst>
+            <a:off x="548640" y="1539240"/>
+            <a:ext cx="146304" cy="146304"/>
+          </a:xfrm>
+          <a:prstGeom prst="rect">
+            <a:avLst/>
           </a:prstGeom>
           <a:solidFill>
             <a:srgbClr val="0E7C86"/>
           </a:solidFill>
-          <a:ln>
+          <a:ln w="12700">
             <a:solidFill>
               <a:srgbClr val="0E7C86"/>
             </a:solidFill>
+            <a:prstDash val="solid"/>
           </a:ln>
         </p:spPr>
-        <p:txBody>
-          <a:bodyPr wrap="square" lIns="0" tIns="0" rIns="0" bIns="0" rtlCol="0" anchor="ctr"/>
-          <a:lstStyle/>
-          <a:p>
-            <a:pPr algn="ctr" indent="0" marL="0">
-              <a:buNone/>
-            </a:pPr>
-            <a:r>
-              <a:rPr lang="en-US" sz="1500" b="1" dirty="0">
-                <a:solidFill>
-                  <a:srgbClr val="FFFFFF"/>
-                </a:solidFill>
-                <a:latin typeface="Calibri" pitchFamily="34" charset="0"/>
-                <a:ea typeface="Calibri" pitchFamily="34" charset="-122"/>
-                <a:cs typeface="Calibri" pitchFamily="34" charset="-120"/>
-              </a:rPr>
-              <a:t>1</a:t>
-            </a:r>
-            <a:endParaRPr lang="en-US" sz="1500" dirty="0"/>
-          </a:p>
-        </p:txBody>
       </p:sp>
       <p:sp>
         <p:nvSpPr>
@@ -19729,453 +19953,8 @@
         </p:nvSpPr>
         <p:spPr>
           <a:xfrm>
-            <a:off x="1207008" y="1417320"/>
-            <a:ext cx="10436047" cy="438912"/>
-          </a:xfrm>
-          <a:prstGeom prst="rect">
-            <a:avLst/>
-          </a:prstGeom>
-          <a:noFill/>
-          <a:ln/>
-        </p:spPr>
-        <p:txBody>
-          <a:bodyPr wrap="square" lIns="0" tIns="0" rIns="0" bIns="0" rtlCol="0" anchor="ctr"/>
-          <a:lstStyle/>
-          <a:p>
-            <a:pPr indent="0" marL="0">
-              <a:spcAft>
-                <a:spcPts val="200"/>
-              </a:spcAft>
-              <a:buNone/>
-            </a:pPr>
-            <a:r>
-              <a:rPr lang="en-US" sz="2200" dirty="0">
-                <a:solidFill>
-                  <a:srgbClr val="1B2530"/>
-                </a:solidFill>
-                <a:latin typeface="Calibri" pitchFamily="34" charset="0"/>
-                <a:ea typeface="Calibri" pitchFamily="34" charset="-122"/>
-                <a:cs typeface="Calibri" pitchFamily="34" charset="-120"/>
-              </a:rPr>
-              <a:t>Build a cartridge from an assembly file and run it on PRG32</a:t>
-            </a:r>
-            <a:endParaRPr lang="en-US" sz="2200" dirty="0"/>
-          </a:p>
-        </p:txBody>
-      </p:sp>
-      <p:sp>
-        <p:nvSpPr>
-          <p:cNvPr id="5" name="Text 3"/>
-          <p:cNvSpPr txBox="1"/>
-          <p:nvPr/>
-        </p:nvSpPr>
-        <p:spPr>
-          <a:xfrm>
-            <a:off x="548640" y="2250237"/>
-            <a:ext cx="402336" cy="402336"/>
-          </a:xfrm>
-          <a:prstGeom prst="roundRect">
-            <a:avLst>
-              <a:gd name="adj" fmla="val 18182"/>
-            </a:avLst>
-          </a:prstGeom>
-          <a:solidFill>
-            <a:srgbClr val="0E7C86"/>
-          </a:solidFill>
-          <a:ln>
-            <a:solidFill>
-              <a:srgbClr val="0E7C86"/>
-            </a:solidFill>
-          </a:ln>
-        </p:spPr>
-        <p:txBody>
-          <a:bodyPr wrap="square" lIns="0" tIns="0" rIns="0" bIns="0" rtlCol="0" anchor="ctr"/>
-          <a:lstStyle/>
-          <a:p>
-            <a:pPr algn="ctr" indent="0" marL="0">
-              <a:buNone/>
-            </a:pPr>
-            <a:r>
-              <a:rPr lang="en-US" sz="1500" b="1" dirty="0">
-                <a:solidFill>
-                  <a:srgbClr val="FFFFFF"/>
-                </a:solidFill>
-                <a:latin typeface="Calibri" pitchFamily="34" charset="0"/>
-                <a:ea typeface="Calibri" pitchFamily="34" charset="-122"/>
-                <a:cs typeface="Calibri" pitchFamily="34" charset="-120"/>
-              </a:rPr>
-              <a:t>2</a:t>
-            </a:r>
-            <a:endParaRPr lang="en-US" sz="1500" dirty="0"/>
-          </a:p>
-        </p:txBody>
-      </p:sp>
-      <p:sp>
-        <p:nvSpPr>
-          <p:cNvPr id="6" name="Text 4"/>
-          <p:cNvSpPr txBox="1"/>
-          <p:nvPr/>
-        </p:nvSpPr>
-        <p:spPr>
-          <a:xfrm>
-            <a:off x="1207008" y="2231949"/>
-            <a:ext cx="10436047" cy="438912"/>
-          </a:xfrm>
-          <a:prstGeom prst="rect">
-            <a:avLst/>
-          </a:prstGeom>
-          <a:noFill/>
-          <a:ln/>
-        </p:spPr>
-        <p:txBody>
-          <a:bodyPr wrap="square" lIns="0" tIns="0" rIns="0" bIns="0" rtlCol="0" anchor="ctr"/>
-          <a:lstStyle/>
-          <a:p>
-            <a:pPr indent="0" marL="0">
-              <a:spcAft>
-                <a:spcPts val="200"/>
-              </a:spcAft>
-              <a:buNone/>
-            </a:pPr>
-            <a:r>
-              <a:rPr lang="en-US" sz="2200" dirty="0">
-                <a:solidFill>
-                  <a:srgbClr val="1B2530"/>
-                </a:solidFill>
-                <a:latin typeface="Calibri" pitchFamily="34" charset="0"/>
-                <a:ea typeface="Calibri" pitchFamily="34" charset="-122"/>
-                <a:cs typeface="Calibri" pitchFamily="34" charset="-120"/>
-              </a:rPr>
-              <a:t>Say what a register is, and name the ones you will use every day</a:t>
-            </a:r>
-            <a:endParaRPr lang="en-US" sz="2200" dirty="0"/>
-          </a:p>
-        </p:txBody>
-      </p:sp>
-      <p:sp>
-        <p:nvSpPr>
-          <p:cNvPr id="7" name="Text 5"/>
-          <p:cNvSpPr txBox="1"/>
-          <p:nvPr/>
-        </p:nvSpPr>
-        <p:spPr>
-          <a:xfrm>
-            <a:off x="548640" y="3064866"/>
-            <a:ext cx="402336" cy="402336"/>
-          </a:xfrm>
-          <a:prstGeom prst="roundRect">
-            <a:avLst>
-              <a:gd name="adj" fmla="val 18182"/>
-            </a:avLst>
-          </a:prstGeom>
-          <a:solidFill>
-            <a:srgbClr val="0E7C86"/>
-          </a:solidFill>
-          <a:ln>
-            <a:solidFill>
-              <a:srgbClr val="0E7C86"/>
-            </a:solidFill>
-          </a:ln>
-        </p:spPr>
-        <p:txBody>
-          <a:bodyPr wrap="square" lIns="0" tIns="0" rIns="0" bIns="0" rtlCol="0" anchor="ctr"/>
-          <a:lstStyle/>
-          <a:p>
-            <a:pPr algn="ctr" indent="0" marL="0">
-              <a:buNone/>
-            </a:pPr>
-            <a:r>
-              <a:rPr lang="en-US" sz="1500" b="1" dirty="0">
-                <a:solidFill>
-                  <a:srgbClr val="FFFFFF"/>
-                </a:solidFill>
-                <a:latin typeface="Calibri" pitchFamily="34" charset="0"/>
-                <a:ea typeface="Calibri" pitchFamily="34" charset="-122"/>
-                <a:cs typeface="Calibri" pitchFamily="34" charset="-120"/>
-              </a:rPr>
-              <a:t>3</a:t>
-            </a:r>
-            <a:endParaRPr lang="en-US" sz="1500" dirty="0"/>
-          </a:p>
-        </p:txBody>
-      </p:sp>
-      <p:sp>
-        <p:nvSpPr>
-          <p:cNvPr id="8" name="Text 6"/>
-          <p:cNvSpPr txBox="1"/>
-          <p:nvPr/>
-        </p:nvSpPr>
-        <p:spPr>
-          <a:xfrm>
-            <a:off x="1207008" y="3046578"/>
-            <a:ext cx="10436047" cy="438912"/>
-          </a:xfrm>
-          <a:prstGeom prst="rect">
-            <a:avLst/>
-          </a:prstGeom>
-          <a:noFill/>
-          <a:ln/>
-        </p:spPr>
-        <p:txBody>
-          <a:bodyPr wrap="square" lIns="0" tIns="0" rIns="0" bIns="0" rtlCol="0" anchor="ctr"/>
-          <a:lstStyle/>
-          <a:p>
-            <a:pPr indent="0" marL="0">
-              <a:spcAft>
-                <a:spcPts val="200"/>
-              </a:spcAft>
-              <a:buNone/>
-            </a:pPr>
-            <a:r>
-              <a:rPr lang="en-US" sz="2200" dirty="0">
-                <a:solidFill>
-                  <a:srgbClr val="1B2530"/>
-                </a:solidFill>
-                <a:latin typeface="Calibri" pitchFamily="34" charset="0"/>
-                <a:ea typeface="Calibri" pitchFamily="34" charset="-122"/>
-                <a:cs typeface="Calibri" pitchFamily="34" charset="-120"/>
-              </a:rPr>
-              <a:t>Call a framework function, passing arguments in registers</a:t>
-            </a:r>
-            <a:endParaRPr lang="en-US" sz="2200" dirty="0"/>
-          </a:p>
-        </p:txBody>
-      </p:sp>
-      <p:sp>
-        <p:nvSpPr>
-          <p:cNvPr id="9" name="Text 7"/>
-          <p:cNvSpPr txBox="1"/>
-          <p:nvPr/>
-        </p:nvSpPr>
-        <p:spPr>
-          <a:xfrm>
-            <a:off x="548640" y="3879494"/>
-            <a:ext cx="402336" cy="402336"/>
-          </a:xfrm>
-          <a:prstGeom prst="roundRect">
-            <a:avLst>
-              <a:gd name="adj" fmla="val 18182"/>
-            </a:avLst>
-          </a:prstGeom>
-          <a:solidFill>
-            <a:srgbClr val="0E7C86"/>
-          </a:solidFill>
-          <a:ln>
-            <a:solidFill>
-              <a:srgbClr val="0E7C86"/>
-            </a:solidFill>
-          </a:ln>
-        </p:spPr>
-        <p:txBody>
-          <a:bodyPr wrap="square" lIns="0" tIns="0" rIns="0" bIns="0" rtlCol="0" anchor="ctr"/>
-          <a:lstStyle/>
-          <a:p>
-            <a:pPr algn="ctr" indent="0" marL="0">
-              <a:buNone/>
-            </a:pPr>
-            <a:r>
-              <a:rPr lang="en-US" sz="1500" b="1" dirty="0">
-                <a:solidFill>
-                  <a:srgbClr val="FFFFFF"/>
-                </a:solidFill>
-                <a:latin typeface="Calibri" pitchFamily="34" charset="0"/>
-                <a:ea typeface="Calibri" pitchFamily="34" charset="-122"/>
-                <a:cs typeface="Calibri" pitchFamily="34" charset="-120"/>
-              </a:rPr>
-              <a:t>4</a:t>
-            </a:r>
-            <a:endParaRPr lang="en-US" sz="1500" dirty="0"/>
-          </a:p>
-        </p:txBody>
-      </p:sp>
-      <p:sp>
-        <p:nvSpPr>
-          <p:cNvPr id="10" name="Text 8"/>
-          <p:cNvSpPr txBox="1"/>
-          <p:nvPr/>
-        </p:nvSpPr>
-        <p:spPr>
-          <a:xfrm>
-            <a:off x="1207008" y="3861206"/>
-            <a:ext cx="10436047" cy="438912"/>
-          </a:xfrm>
-          <a:prstGeom prst="rect">
-            <a:avLst/>
-          </a:prstGeom>
-          <a:noFill/>
-          <a:ln/>
-        </p:spPr>
-        <p:txBody>
-          <a:bodyPr wrap="square" lIns="0" tIns="0" rIns="0" bIns="0" rtlCol="0" anchor="ctr"/>
-          <a:lstStyle/>
-          <a:p>
-            <a:pPr indent="0" marL="0">
-              <a:spcAft>
-                <a:spcPts val="200"/>
-              </a:spcAft>
-              <a:buNone/>
-            </a:pPr>
-            <a:r>
-              <a:rPr lang="en-US" sz="2200" dirty="0">
-                <a:solidFill>
-                  <a:srgbClr val="1B2530"/>
-                </a:solidFill>
-                <a:latin typeface="Calibri" pitchFamily="34" charset="0"/>
-                <a:ea typeface="Calibri" pitchFamily="34" charset="-122"/>
-                <a:cs typeface="Calibri" pitchFamily="34" charset="-120"/>
-              </a:rPr>
-              <a:t>Keep a value in memory from one frame to the next: load, modify, store</a:t>
-            </a:r>
-            <a:endParaRPr lang="en-US" sz="2200" dirty="0"/>
-          </a:p>
-        </p:txBody>
-      </p:sp>
-      <p:sp>
-        <p:nvSpPr>
-          <p:cNvPr id="11" name="Text 9"/>
-          <p:cNvSpPr txBox="1"/>
-          <p:nvPr/>
-        </p:nvSpPr>
-        <p:spPr>
-          <a:xfrm>
-            <a:off x="548640" y="4694123"/>
-            <a:ext cx="402336" cy="402336"/>
-          </a:xfrm>
-          <a:prstGeom prst="roundRect">
-            <a:avLst>
-              <a:gd name="adj" fmla="val 18182"/>
-            </a:avLst>
-          </a:prstGeom>
-          <a:solidFill>
-            <a:srgbClr val="0E7C86"/>
-          </a:solidFill>
-          <a:ln>
-            <a:solidFill>
-              <a:srgbClr val="0E7C86"/>
-            </a:solidFill>
-          </a:ln>
-        </p:spPr>
-        <p:txBody>
-          <a:bodyPr wrap="square" lIns="0" tIns="0" rIns="0" bIns="0" rtlCol="0" anchor="ctr"/>
-          <a:lstStyle/>
-          <a:p>
-            <a:pPr algn="ctr" indent="0" marL="0">
-              <a:buNone/>
-            </a:pPr>
-            <a:r>
-              <a:rPr lang="en-US" sz="1500" b="1" dirty="0">
-                <a:solidFill>
-                  <a:srgbClr val="FFFFFF"/>
-                </a:solidFill>
-                <a:latin typeface="Calibri" pitchFamily="34" charset="0"/>
-                <a:ea typeface="Calibri" pitchFamily="34" charset="-122"/>
-                <a:cs typeface="Calibri" pitchFamily="34" charset="-120"/>
-              </a:rPr>
-              <a:t>5</a:t>
-            </a:r>
-            <a:endParaRPr lang="en-US" sz="1500" dirty="0"/>
-          </a:p>
-        </p:txBody>
-      </p:sp>
-      <p:sp>
-        <p:nvSpPr>
-          <p:cNvPr id="12" name="Text 10"/>
-          <p:cNvSpPr txBox="1"/>
-          <p:nvPr/>
-        </p:nvSpPr>
-        <p:spPr>
-          <a:xfrm>
-            <a:off x="1207008" y="4675835"/>
-            <a:ext cx="10436047" cy="438912"/>
-          </a:xfrm>
-          <a:prstGeom prst="rect">
-            <a:avLst/>
-          </a:prstGeom>
-          <a:noFill/>
-          <a:ln/>
-        </p:spPr>
-        <p:txBody>
-          <a:bodyPr wrap="square" lIns="0" tIns="0" rIns="0" bIns="0" rtlCol="0" anchor="ctr"/>
-          <a:lstStyle/>
-          <a:p>
-            <a:pPr indent="0" marL="0">
-              <a:spcAft>
-                <a:spcPts val="200"/>
-              </a:spcAft>
-              <a:buNone/>
-            </a:pPr>
-            <a:r>
-              <a:rPr lang="en-US" sz="2200" dirty="0">
-                <a:solidFill>
-                  <a:srgbClr val="1B2530"/>
-                </a:solidFill>
-                <a:latin typeface="Calibri" pitchFamily="34" charset="0"/>
-                <a:ea typeface="Calibri" pitchFamily="34" charset="-122"/>
-                <a:cs typeface="Calibri" pitchFamily="34" charset="-120"/>
-              </a:rPr>
-              <a:t>Read one instruction as the 32-bit number it really is</a:t>
-            </a:r>
-            <a:endParaRPr lang="en-US" sz="2200" dirty="0"/>
-          </a:p>
-        </p:txBody>
-      </p:sp>
-      <p:sp>
-        <p:nvSpPr>
-          <p:cNvPr id="13" name="Text 11"/>
-          <p:cNvSpPr txBox="1"/>
-          <p:nvPr/>
-        </p:nvSpPr>
-        <p:spPr>
-          <a:xfrm>
-            <a:off x="548640" y="5508752"/>
-            <a:ext cx="402336" cy="402336"/>
-          </a:xfrm>
-          <a:prstGeom prst="roundRect">
-            <a:avLst>
-              <a:gd name="adj" fmla="val 18182"/>
-            </a:avLst>
-          </a:prstGeom>
-          <a:solidFill>
-            <a:srgbClr val="0E7C86"/>
-          </a:solidFill>
-          <a:ln>
-            <a:solidFill>
-              <a:srgbClr val="0E7C86"/>
-            </a:solidFill>
-          </a:ln>
-        </p:spPr>
-        <p:txBody>
-          <a:bodyPr wrap="square" lIns="0" tIns="0" rIns="0" bIns="0" rtlCol="0" anchor="ctr"/>
-          <a:lstStyle/>
-          <a:p>
-            <a:pPr algn="ctr" indent="0" marL="0">
-              <a:buNone/>
-            </a:pPr>
-            <a:r>
-              <a:rPr lang="en-US" sz="1500" b="1" dirty="0">
-                <a:solidFill>
-                  <a:srgbClr val="FFFFFF"/>
-                </a:solidFill>
-                <a:latin typeface="Calibri" pitchFamily="34" charset="0"/>
-                <a:ea typeface="Calibri" pitchFamily="34" charset="-122"/>
-                <a:cs typeface="Calibri" pitchFamily="34" charset="-120"/>
-              </a:rPr>
-              <a:t>6</a:t>
-            </a:r>
-            <a:endParaRPr lang="en-US" sz="1500" dirty="0"/>
-          </a:p>
-        </p:txBody>
-      </p:sp>
-      <p:sp>
-        <p:nvSpPr>
-          <p:cNvPr id="14" name="Text 12"/>
-          <p:cNvSpPr txBox="1"/>
-          <p:nvPr/>
-        </p:nvSpPr>
-        <p:spPr>
-          <a:xfrm>
-            <a:off x="1207008" y="5490464"/>
-            <a:ext cx="10436047" cy="681736"/>
+            <a:off x="932688" y="1417320"/>
+            <a:ext cx="6565392" cy="2433828"/>
           </a:xfrm>
           <a:prstGeom prst="rect">
             <a:avLst/>
@@ -20194,7 +19973,7 @@
               <a:buNone/>
             </a:pPr>
             <a:r>
-              <a:rPr lang="en-US" sz="2200" dirty="0">
+              <a:rPr lang="en-US" sz="2400" dirty="0">
                 <a:solidFill>
                   <a:srgbClr val="1B2530"/>
                 </a:solidFill>
@@ -20202,9 +19981,342 @@
                 <a:ea typeface="Calibri" pitchFamily="34" charset="-122"/>
                 <a:cs typeface="Calibri" pitchFamily="34" charset="-120"/>
               </a:rPr>
-              <a:t>List the questions this program raises: the rest of the course answers them</a:t>
+              <a:t>By the end you will be able to</a:t>
             </a:r>
-            <a:endParaRPr lang="en-US" sz="2200" dirty="0"/>
+            <a:endParaRPr lang="en-US" sz="2400" dirty="0"/>
+          </a:p>
+          <a:p>
+            <a:pPr indent="0" marL="0">
+              <a:spcAft>
+                <a:spcPts val="200"/>
+              </a:spcAft>
+              <a:buNone/>
+            </a:pPr>
+            <a:r>
+              <a:rPr lang="en-US" sz="2100" dirty="0">
+                <a:solidFill>
+                  <a:srgbClr val="5B6B78"/>
+                </a:solidFill>
+                <a:latin typeface="Calibri" pitchFamily="34" charset="0"/>
+                <a:ea typeface="Calibri" pitchFamily="34" charset="-122"/>
+                <a:cs typeface="Calibri" pitchFamily="34" charset="-120"/>
+              </a:rPr>
+              <a:t>– build and run a cartridge, and say when the runtime calls init, update and draw</a:t>
+            </a:r>
+            <a:endParaRPr lang="en-US" sz="2400" dirty="0"/>
+          </a:p>
+          <a:p>
+            <a:pPr indent="0" marL="0">
+              <a:spcAft>
+                <a:spcPts val="200"/>
+              </a:spcAft>
+              <a:buNone/>
+            </a:pPr>
+            <a:r>
+              <a:rPr lang="en-US" sz="2100" dirty="0">
+                <a:solidFill>
+                  <a:srgbClr val="5B6B78"/>
+                </a:solidFill>
+                <a:latin typeface="Calibri" pitchFamily="34" charset="0"/>
+                <a:ea typeface="Calibri" pitchFamily="34" charset="-122"/>
+                <a:cs typeface="Calibri" pitchFamily="34" charset="-120"/>
+              </a:rPr>
+              <a:t>– read a line of assembly: label, instruction, operands, comment</a:t>
+            </a:r>
+            <a:endParaRPr lang="en-US" sz="2400" dirty="0"/>
+          </a:p>
+          <a:p>
+            <a:pPr indent="0" marL="0">
+              <a:spcAft>
+                <a:spcPts val="200"/>
+              </a:spcAft>
+              <a:buNone/>
+            </a:pPr>
+            <a:r>
+              <a:rPr lang="en-US" sz="2100" dirty="0">
+                <a:solidFill>
+                  <a:srgbClr val="5B6B78"/>
+                </a:solidFill>
+                <a:latin typeface="Calibri" pitchFamily="34" charset="0"/>
+                <a:ea typeface="Calibri" pitchFamily="34" charset="-122"/>
+                <a:cs typeface="Calibri" pitchFamily="34" charset="-120"/>
+              </a:rPr>
+              <a:t>– tell an address from a value, and trace what la, lw, addi and sw leave behind</a:t>
+            </a:r>
+            <a:endParaRPr lang="en-US" sz="2400" dirty="0"/>
+          </a:p>
+        </p:txBody>
+      </p:sp>
+      <p:sp>
+        <p:nvSpPr>
+          <p:cNvPr id="5" name="Shape 3"/>
+          <p:cNvSpPr/>
+          <p:nvPr/>
+        </p:nvSpPr>
+        <p:spPr>
+          <a:xfrm>
+            <a:off x="548640" y="4203954"/>
+            <a:ext cx="146304" cy="146304"/>
+          </a:xfrm>
+          <a:prstGeom prst="rect">
+            <a:avLst/>
+          </a:prstGeom>
+          <a:solidFill>
+            <a:srgbClr val="C7791B"/>
+          </a:solidFill>
+          <a:ln w="12700">
+            <a:solidFill>
+              <a:srgbClr val="C7791B"/>
+            </a:solidFill>
+            <a:prstDash val="solid"/>
+          </a:ln>
+        </p:spPr>
+      </p:sp>
+      <p:sp>
+        <p:nvSpPr>
+          <p:cNvPr id="6" name="Text 4"/>
+          <p:cNvSpPr txBox="1"/>
+          <p:nvPr/>
+        </p:nvSpPr>
+        <p:spPr>
+          <a:xfrm>
+            <a:off x="932688" y="4082034"/>
+            <a:ext cx="6565392" cy="743712"/>
+          </a:xfrm>
+          <a:prstGeom prst="rect">
+            <a:avLst/>
+          </a:prstGeom>
+          <a:noFill/>
+          <a:ln/>
+        </p:spPr>
+        <p:txBody>
+          <a:bodyPr wrap="square" lIns="0" tIns="0" rIns="0" bIns="0" rtlCol="0" anchor="t"/>
+          <a:lstStyle/>
+          <a:p>
+            <a:pPr indent="0" marL="0">
+              <a:spcAft>
+                <a:spcPts val="200"/>
+              </a:spcAft>
+              <a:buNone/>
+            </a:pPr>
+            <a:r>
+              <a:rPr lang="en-US" sz="2400" dirty="0">
+                <a:solidFill>
+                  <a:srgbClr val="1B2530"/>
+                </a:solidFill>
+                <a:latin typeface="Calibri" pitchFamily="34" charset="0"/>
+                <a:ea typeface="Calibri" pitchFamily="34" charset="-122"/>
+                <a:cs typeface="Calibri" pitchFamily="34" charset="-120"/>
+              </a:rPr>
+              <a:t>You need only Lecture 01: what a program is, the terminal, PRG32-QT running</a:t>
+            </a:r>
+            <a:endParaRPr lang="en-US" sz="2400" dirty="0"/>
+          </a:p>
+        </p:txBody>
+      </p:sp>
+      <p:sp>
+        <p:nvSpPr>
+          <p:cNvPr id="7" name="Shape 5"/>
+          <p:cNvSpPr/>
+          <p:nvPr/>
+        </p:nvSpPr>
+        <p:spPr>
+          <a:xfrm>
+            <a:off x="548640" y="5178552"/>
+            <a:ext cx="146304" cy="146304"/>
+          </a:xfrm>
+          <a:prstGeom prst="rect">
+            <a:avLst/>
+          </a:prstGeom>
+          <a:solidFill>
+            <a:srgbClr val="0E7C86"/>
+          </a:solidFill>
+          <a:ln w="12700">
+            <a:solidFill>
+              <a:srgbClr val="0E7C86"/>
+            </a:solidFill>
+            <a:prstDash val="solid"/>
+          </a:ln>
+        </p:spPr>
+      </p:sp>
+      <p:sp>
+        <p:nvSpPr>
+          <p:cNvPr id="8" name="Text 6"/>
+          <p:cNvSpPr txBox="1"/>
+          <p:nvPr/>
+        </p:nvSpPr>
+        <p:spPr>
+          <a:xfrm>
+            <a:off x="932688" y="5056632"/>
+            <a:ext cx="6565392" cy="1115568"/>
+          </a:xfrm>
+          <a:prstGeom prst="rect">
+            <a:avLst/>
+          </a:prstGeom>
+          <a:noFill/>
+          <a:ln/>
+        </p:spPr>
+        <p:txBody>
+          <a:bodyPr wrap="square" lIns="0" tIns="0" rIns="0" bIns="0" rtlCol="0" anchor="t"/>
+          <a:lstStyle/>
+          <a:p>
+            <a:pPr indent="0" marL="0">
+              <a:spcAft>
+                <a:spcPts val="200"/>
+              </a:spcAft>
+              <a:buNone/>
+            </a:pPr>
+            <a:r>
+              <a:rPr lang="en-US" sz="2400" dirty="0">
+                <a:solidFill>
+                  <a:srgbClr val="1B2530"/>
+                </a:solidFill>
+                <a:latin typeface="Calibri" pitchFamily="34" charset="0"/>
+                <a:ea typeface="Calibri" pitchFamily="34" charset="-122"/>
+                <a:cs typeface="Calibri" pitchFamily="34" charset="-120"/>
+              </a:rPr>
+              <a:t>You will also use things you are not expected to understand yet: the last slides say which, and when they are explained</a:t>
+            </a:r>
+            <a:endParaRPr lang="en-US" sz="2400" dirty="0"/>
+          </a:p>
+        </p:txBody>
+      </p:sp>
+      <p:sp>
+        <p:nvSpPr>
+          <p:cNvPr id="9" name="Shape 7"/>
+          <p:cNvSpPr/>
+          <p:nvPr/>
+        </p:nvSpPr>
+        <p:spPr>
+          <a:xfrm>
+            <a:off x="7863840" y="1417320"/>
+            <a:ext cx="3779215" cy="4754880"/>
+          </a:xfrm>
+          <a:prstGeom prst="roundRect">
+            <a:avLst>
+              <a:gd name="adj" fmla="val 1936"/>
+            </a:avLst>
+          </a:prstGeom>
+          <a:solidFill>
+            <a:srgbClr val="D8ECEE"/>
+          </a:solidFill>
+          <a:ln w="12700">
+            <a:solidFill>
+              <a:srgbClr val="D8ECEE"/>
+            </a:solidFill>
+            <a:prstDash val="solid"/>
+          </a:ln>
+        </p:spPr>
+      </p:sp>
+      <p:sp>
+        <p:nvSpPr>
+          <p:cNvPr id="10" name="Text 8"/>
+          <p:cNvSpPr txBox="1"/>
+          <p:nvPr/>
+        </p:nvSpPr>
+        <p:spPr>
+          <a:xfrm>
+            <a:off x="8138160" y="1645920"/>
+            <a:ext cx="3230575" cy="548640"/>
+          </a:xfrm>
+          <a:prstGeom prst="rect">
+            <a:avLst/>
+          </a:prstGeom>
+          <a:noFill/>
+          <a:ln/>
+        </p:spPr>
+        <p:txBody>
+          <a:bodyPr wrap="square" lIns="0" tIns="0" rIns="0" bIns="0" rtlCol="0" anchor="ctr"/>
+          <a:lstStyle/>
+          <a:p>
+            <a:pPr indent="0" marL="0">
+              <a:buNone/>
+            </a:pPr>
+            <a:r>
+              <a:rPr lang="en-US" sz="1800" b="1" dirty="0">
+                <a:solidFill>
+                  <a:srgbClr val="2E4A62"/>
+                </a:solidFill>
+                <a:latin typeface="Calibri" pitchFamily="34" charset="0"/>
+                <a:ea typeface="Calibri" pitchFamily="34" charset="-122"/>
+                <a:cs typeface="Calibri" pitchFamily="34" charset="-120"/>
+              </a:rPr>
+              <a:t>How you will know</a:t>
+            </a:r>
+            <a:endParaRPr lang="en-US" sz="1800" dirty="0"/>
+          </a:p>
+        </p:txBody>
+      </p:sp>
+      <p:sp>
+        <p:nvSpPr>
+          <p:cNvPr id="11" name="Text 9"/>
+          <p:cNvSpPr txBox="1"/>
+          <p:nvPr/>
+        </p:nvSpPr>
+        <p:spPr>
+          <a:xfrm>
+            <a:off x="8138160" y="2286000"/>
+            <a:ext cx="3230575" cy="3657600"/>
+          </a:xfrm>
+          <a:prstGeom prst="rect">
+            <a:avLst/>
+          </a:prstGeom>
+          <a:noFill/>
+          <a:ln/>
+        </p:spPr>
+        <p:txBody>
+          <a:bodyPr wrap="square" lIns="0" tIns="0" rIns="0" bIns="0" rtlCol="0" anchor="t"/>
+          <a:lstStyle/>
+          <a:p>
+            <a:pPr indent="0" marL="0">
+              <a:buNone/>
+            </a:pPr>
+            <a:r>
+              <a:rPr lang="en-US" sz="1900" dirty="0">
+                <a:solidFill>
+                  <a:srgbClr val="1B2530"/>
+                </a:solidFill>
+                <a:latin typeface="Calibri" pitchFamily="34" charset="0"/>
+                <a:ea typeface="Calibri" pitchFamily="34" charset="-122"/>
+                <a:cs typeface="Calibri" pitchFamily="34" charset="-120"/>
+              </a:rPr>
+              <a:t>Outcome 1: checkpoint 1</a:t>
+            </a:r>
+            <a:endParaRPr lang="en-US" sz="1900" dirty="0"/>
+          </a:p>
+          <a:p>
+            <a:pPr indent="0" marL="0">
+              <a:buNone/>
+            </a:pPr>
+            <a:r>
+              <a:rPr lang="en-US" sz="1900" dirty="0">
+                <a:solidFill>
+                  <a:srgbClr val="1B2530"/>
+                </a:solidFill>
+                <a:latin typeface="Calibri" pitchFamily="34" charset="0"/>
+                <a:ea typeface="Calibri" pitchFamily="34" charset="-122"/>
+                <a:cs typeface="Calibri" pitchFamily="34" charset="-120"/>
+              </a:rPr>
+              <a:t>Outcome 2: the exit ticket</a:t>
+            </a:r>
+            <a:endParaRPr lang="en-US" sz="1900" dirty="0"/>
+          </a:p>
+          <a:p>
+            <a:pPr indent="0" marL="0">
+              <a:buNone/>
+            </a:pPr>
+            <a:r>
+              <a:rPr lang="en-US" sz="1900" dirty="0">
+                <a:solidFill>
+                  <a:srgbClr val="1B2530"/>
+                </a:solidFill>
+                <a:latin typeface="Calibri" pitchFamily="34" charset="0"/>
+                <a:ea typeface="Calibri" pitchFamily="34" charset="-122"/>
+                <a:cs typeface="Calibri" pitchFamily="34" charset="-120"/>
+              </a:rPr>
+              <a:t>Outcome 3: checkpoint 2, the trace</a:t>
+            </a:r>
+            <a:endParaRPr lang="en-US" sz="1900" dirty="0"/>
           </a:p>
         </p:txBody>
       </p:sp>
@@ -27340,6 +27452,532 @@
                 <a:ea typeface="Cambria" pitchFamily="34" charset="-122"/>
                 <a:cs typeface="Cambria" pitchFamily="34" charset="-120"/>
               </a:rPr>
+              <a:t>Checkpoint 1: predict before you run</a:t>
+            </a:r>
+            <a:endParaRPr lang="en-US" sz="3200" dirty="0"/>
+          </a:p>
+        </p:txBody>
+      </p:sp>
+      <p:sp>
+        <p:nvSpPr>
+          <p:cNvPr id="3" name="Shape 1"/>
+          <p:cNvSpPr/>
+          <p:nvPr/>
+        </p:nvSpPr>
+        <p:spPr>
+          <a:xfrm>
+            <a:off x="548640" y="1722120"/>
+            <a:ext cx="146304" cy="146304"/>
+          </a:xfrm>
+          <a:prstGeom prst="rect">
+            <a:avLst/>
+          </a:prstGeom>
+          <a:solidFill>
+            <a:srgbClr val="0E7C86"/>
+          </a:solidFill>
+          <a:ln w="12700">
+            <a:solidFill>
+              <a:srgbClr val="0E7C86"/>
+            </a:solidFill>
+            <a:prstDash val="solid"/>
+          </a:ln>
+        </p:spPr>
+      </p:sp>
+      <p:sp>
+        <p:nvSpPr>
+          <p:cNvPr id="4" name="Text 2"/>
+          <p:cNvSpPr txBox="1"/>
+          <p:nvPr/>
+        </p:nvSpPr>
+        <p:spPr>
+          <a:xfrm>
+            <a:off x="932688" y="1600200"/>
+            <a:ext cx="6565392" cy="743712"/>
+          </a:xfrm>
+          <a:prstGeom prst="rect">
+            <a:avLst/>
+          </a:prstGeom>
+          <a:noFill/>
+          <a:ln/>
+        </p:spPr>
+        <p:txBody>
+          <a:bodyPr wrap="square" lIns="0" tIns="0" rIns="0" bIns="0" rtlCol="0" anchor="t"/>
+          <a:lstStyle/>
+          <a:p>
+            <a:pPr indent="0" marL="0">
+              <a:spcAft>
+                <a:spcPts val="200"/>
+              </a:spcAft>
+              <a:buNone/>
+            </a:pPr>
+            <a:r>
+              <a:rPr lang="en-US" sz="2400" dirty="0">
+                <a:solidFill>
+                  <a:srgbClr val="1B2530"/>
+                </a:solidFill>
+                <a:latin typeface="Calibri" pitchFamily="34" charset="0"/>
+                <a:ea typeface="Calibri" pitchFamily="34" charset="-122"/>
+                <a:cs typeface="Calibri" pitchFamily="34" charset="-120"/>
+              </a:rPr>
+              <a:t>A game runs at 30 frames per second for 2 seconds</a:t>
+            </a:r>
+            <a:endParaRPr lang="en-US" sz="2400" dirty="0"/>
+          </a:p>
+        </p:txBody>
+      </p:sp>
+      <p:sp>
+        <p:nvSpPr>
+          <p:cNvPr id="5" name="Shape 3"/>
+          <p:cNvSpPr/>
+          <p:nvPr/>
+        </p:nvSpPr>
+        <p:spPr>
+          <a:xfrm>
+            <a:off x="548640" y="2923032"/>
+            <a:ext cx="146304" cy="146304"/>
+          </a:xfrm>
+          <a:prstGeom prst="rect">
+            <a:avLst/>
+          </a:prstGeom>
+          <a:solidFill>
+            <a:srgbClr val="C7791B"/>
+          </a:solidFill>
+          <a:ln w="12700">
+            <a:solidFill>
+              <a:srgbClr val="C7791B"/>
+            </a:solidFill>
+            <a:prstDash val="solid"/>
+          </a:ln>
+        </p:spPr>
+      </p:sp>
+      <p:sp>
+        <p:nvSpPr>
+          <p:cNvPr id="6" name="Text 4"/>
+          <p:cNvSpPr txBox="1"/>
+          <p:nvPr/>
+        </p:nvSpPr>
+        <p:spPr>
+          <a:xfrm>
+            <a:off x="932688" y="2801112"/>
+            <a:ext cx="6565392" cy="1457706"/>
+          </a:xfrm>
+          <a:prstGeom prst="rect">
+            <a:avLst/>
+          </a:prstGeom>
+          <a:noFill/>
+          <a:ln/>
+        </p:spPr>
+        <p:txBody>
+          <a:bodyPr wrap="square" lIns="0" tIns="0" rIns="0" bIns="0" rtlCol="0" anchor="t"/>
+          <a:lstStyle/>
+          <a:p>
+            <a:pPr indent="0" marL="0">
+              <a:spcAft>
+                <a:spcPts val="200"/>
+              </a:spcAft>
+              <a:buNone/>
+            </a:pPr>
+            <a:r>
+              <a:rPr lang="en-US" sz="2400" dirty="0">
+                <a:solidFill>
+                  <a:srgbClr val="1B2530"/>
+                </a:solidFill>
+                <a:latin typeface="Calibri" pitchFamily="34" charset="0"/>
+                <a:ea typeface="Calibri" pitchFamily="34" charset="-122"/>
+                <a:cs typeface="Calibri" pitchFamily="34" charset="-120"/>
+              </a:rPr>
+              <a:t>How many times has the runtime called</a:t>
+            </a:r>
+            <a:endParaRPr lang="en-US" sz="2400" dirty="0"/>
+          </a:p>
+          <a:p>
+            <a:pPr indent="0" marL="0">
+              <a:spcAft>
+                <a:spcPts val="200"/>
+              </a:spcAft>
+              <a:buNone/>
+            </a:pPr>
+            <a:r>
+              <a:rPr lang="en-US" sz="2100" dirty="0">
+                <a:solidFill>
+                  <a:srgbClr val="5B6B78"/>
+                </a:solidFill>
+                <a:latin typeface="Calibri" pitchFamily="34" charset="0"/>
+                <a:ea typeface="Calibri" pitchFamily="34" charset="-122"/>
+                <a:cs typeface="Calibri" pitchFamily="34" charset="-120"/>
+              </a:rPr>
+              <a:t>– init?</a:t>
+            </a:r>
+            <a:endParaRPr lang="en-US" sz="2400" dirty="0"/>
+          </a:p>
+          <a:p>
+            <a:pPr indent="0" marL="0">
+              <a:spcAft>
+                <a:spcPts val="200"/>
+              </a:spcAft>
+              <a:buNone/>
+            </a:pPr>
+            <a:r>
+              <a:rPr lang="en-US" sz="2100" dirty="0">
+                <a:solidFill>
+                  <a:srgbClr val="5B6B78"/>
+                </a:solidFill>
+                <a:latin typeface="Calibri" pitchFamily="34" charset="0"/>
+                <a:ea typeface="Calibri" pitchFamily="34" charset="-122"/>
+                <a:cs typeface="Calibri" pitchFamily="34" charset="-120"/>
+              </a:rPr>
+              <a:t>– update?</a:t>
+            </a:r>
+            <a:endParaRPr lang="en-US" sz="2400" dirty="0"/>
+          </a:p>
+          <a:p>
+            <a:pPr indent="0" marL="0">
+              <a:spcAft>
+                <a:spcPts val="200"/>
+              </a:spcAft>
+              <a:buNone/>
+            </a:pPr>
+            <a:r>
+              <a:rPr lang="en-US" sz="2100" dirty="0">
+                <a:solidFill>
+                  <a:srgbClr val="5B6B78"/>
+                </a:solidFill>
+                <a:latin typeface="Calibri" pitchFamily="34" charset="0"/>
+                <a:ea typeface="Calibri" pitchFamily="34" charset="-122"/>
+                <a:cs typeface="Calibri" pitchFamily="34" charset="-120"/>
+              </a:rPr>
+              <a:t>– draw?</a:t>
+            </a:r>
+            <a:endParaRPr lang="en-US" sz="2400" dirty="0"/>
+          </a:p>
+        </p:txBody>
+      </p:sp>
+      <p:sp>
+        <p:nvSpPr>
+          <p:cNvPr id="7" name="Shape 5"/>
+          <p:cNvSpPr/>
+          <p:nvPr/>
+        </p:nvSpPr>
+        <p:spPr>
+          <a:xfrm>
+            <a:off x="548640" y="4837938"/>
+            <a:ext cx="146304" cy="146304"/>
+          </a:xfrm>
+          <a:prstGeom prst="rect">
+            <a:avLst/>
+          </a:prstGeom>
+          <a:solidFill>
+            <a:srgbClr val="0E7C86"/>
+          </a:solidFill>
+          <a:ln w="12700">
+            <a:solidFill>
+              <a:srgbClr val="0E7C86"/>
+            </a:solidFill>
+            <a:prstDash val="solid"/>
+          </a:ln>
+        </p:spPr>
+      </p:sp>
+      <p:sp>
+        <p:nvSpPr>
+          <p:cNvPr id="8" name="Text 6"/>
+          <p:cNvSpPr txBox="1"/>
+          <p:nvPr/>
+        </p:nvSpPr>
+        <p:spPr>
+          <a:xfrm>
+            <a:off x="932688" y="4716018"/>
+            <a:ext cx="6565392" cy="743712"/>
+          </a:xfrm>
+          <a:prstGeom prst="rect">
+            <a:avLst/>
+          </a:prstGeom>
+          <a:noFill/>
+          <a:ln/>
+        </p:spPr>
+        <p:txBody>
+          <a:bodyPr wrap="square" lIns="0" tIns="0" rIns="0" bIns="0" rtlCol="0" anchor="t"/>
+          <a:lstStyle/>
+          <a:p>
+            <a:pPr indent="0" marL="0">
+              <a:spcAft>
+                <a:spcPts val="200"/>
+              </a:spcAft>
+              <a:buNone/>
+            </a:pPr>
+            <a:r>
+              <a:rPr lang="en-US" sz="2400" dirty="0">
+                <a:solidFill>
+                  <a:srgbClr val="1B2530"/>
+                </a:solidFill>
+                <a:latin typeface="Calibri" pitchFamily="34" charset="0"/>
+                <a:ea typeface="Calibri" pitchFamily="34" charset="-122"/>
+                <a:cs typeface="Calibri" pitchFamily="34" charset="-120"/>
+              </a:rPr>
+              <a:t>Which kind of instruction, compute, move or jump, can read a value from memory?</a:t>
+            </a:r>
+            <a:endParaRPr lang="en-US" sz="2400" dirty="0"/>
+          </a:p>
+        </p:txBody>
+      </p:sp>
+      <p:sp>
+        <p:nvSpPr>
+          <p:cNvPr id="9" name="Shape 7"/>
+          <p:cNvSpPr/>
+          <p:nvPr/>
+        </p:nvSpPr>
+        <p:spPr>
+          <a:xfrm>
+            <a:off x="7863840" y="1417320"/>
+            <a:ext cx="3779215" cy="4754880"/>
+          </a:xfrm>
+          <a:prstGeom prst="roundRect">
+            <a:avLst>
+              <a:gd name="adj" fmla="val 1936"/>
+            </a:avLst>
+          </a:prstGeom>
+          <a:solidFill>
+            <a:srgbClr val="D8ECEE"/>
+          </a:solidFill>
+          <a:ln w="12700">
+            <a:solidFill>
+              <a:srgbClr val="D8ECEE"/>
+            </a:solidFill>
+            <a:prstDash val="solid"/>
+          </a:ln>
+        </p:spPr>
+      </p:sp>
+      <p:sp>
+        <p:nvSpPr>
+          <p:cNvPr id="10" name="Text 8"/>
+          <p:cNvSpPr txBox="1"/>
+          <p:nvPr/>
+        </p:nvSpPr>
+        <p:spPr>
+          <a:xfrm>
+            <a:off x="8138160" y="1645920"/>
+            <a:ext cx="3230575" cy="548640"/>
+          </a:xfrm>
+          <a:prstGeom prst="rect">
+            <a:avLst/>
+          </a:prstGeom>
+          <a:noFill/>
+          <a:ln/>
+        </p:spPr>
+        <p:txBody>
+          <a:bodyPr wrap="square" lIns="0" tIns="0" rIns="0" bIns="0" rtlCol="0" anchor="ctr"/>
+          <a:lstStyle/>
+          <a:p>
+            <a:pPr indent="0" marL="0">
+              <a:buNone/>
+            </a:pPr>
+            <a:r>
+              <a:rPr lang="en-US" sz="1800" b="1" dirty="0">
+                <a:solidFill>
+                  <a:srgbClr val="2E4A62"/>
+                </a:solidFill>
+                <a:latin typeface="Calibri" pitchFamily="34" charset="0"/>
+                <a:ea typeface="Calibri" pitchFamily="34" charset="-122"/>
+                <a:cs typeface="Calibri" pitchFamily="34" charset="-120"/>
+              </a:rPr>
+              <a:t>How</a:t>
+            </a:r>
+            <a:endParaRPr lang="en-US" sz="1800" dirty="0"/>
+          </a:p>
+        </p:txBody>
+      </p:sp>
+      <p:sp>
+        <p:nvSpPr>
+          <p:cNvPr id="11" name="Text 9"/>
+          <p:cNvSpPr txBox="1"/>
+          <p:nvPr/>
+        </p:nvSpPr>
+        <p:spPr>
+          <a:xfrm>
+            <a:off x="8138160" y="2286000"/>
+            <a:ext cx="3230575" cy="3657600"/>
+          </a:xfrm>
+          <a:prstGeom prst="rect">
+            <a:avLst/>
+          </a:prstGeom>
+          <a:noFill/>
+          <a:ln/>
+        </p:spPr>
+        <p:txBody>
+          <a:bodyPr wrap="square" lIns="0" tIns="0" rIns="0" bIns="0" rtlCol="0" anchor="t"/>
+          <a:lstStyle/>
+          <a:p>
+            <a:pPr indent="0" marL="0">
+              <a:buNone/>
+            </a:pPr>
+            <a:r>
+              <a:rPr lang="en-US" sz="1900" dirty="0">
+                <a:solidFill>
+                  <a:srgbClr val="1B2530"/>
+                </a:solidFill>
+                <a:latin typeface="Calibri" pitchFamily="34" charset="0"/>
+                <a:ea typeface="Calibri" pitchFamily="34" charset="-122"/>
+                <a:cs typeface="Calibri" pitchFamily="34" charset="-120"/>
+              </a:rPr>
+              <a:t>One minute alone: write your answers</a:t>
+            </a:r>
+            <a:endParaRPr lang="en-US" sz="1900" dirty="0"/>
+          </a:p>
+          <a:p>
+            <a:pPr indent="0" marL="0">
+              <a:buNone/>
+            </a:pPr>
+            <a:endParaRPr lang="en-US" sz="1900" dirty="0"/>
+          </a:p>
+          <a:p>
+            <a:pPr indent="0" marL="0">
+              <a:buNone/>
+            </a:pPr>
+            <a:r>
+              <a:rPr lang="en-US" sz="1900" dirty="0">
+                <a:solidFill>
+                  <a:srgbClr val="1B2530"/>
+                </a:solidFill>
+                <a:latin typeface="Calibri" pitchFamily="34" charset="0"/>
+                <a:ea typeface="Calibri" pitchFamily="34" charset="-122"/>
+                <a:cs typeface="Calibri" pitchFamily="34" charset="-120"/>
+              </a:rPr>
+              <a:t>One minute with your neighbour: agree on them</a:t>
+            </a:r>
+            <a:endParaRPr lang="en-US" sz="1900" dirty="0"/>
+          </a:p>
+          <a:p>
+            <a:pPr indent="0" marL="0">
+              <a:buNone/>
+            </a:pPr>
+            <a:endParaRPr lang="en-US" sz="1900" dirty="0"/>
+          </a:p>
+          <a:p>
+            <a:pPr indent="0" marL="0">
+              <a:buNone/>
+            </a:pPr>
+            <a:r>
+              <a:rPr lang="en-US" sz="1900" dirty="0">
+                <a:solidFill>
+                  <a:srgbClr val="1B2530"/>
+                </a:solidFill>
+                <a:latin typeface="Calibri" pitchFamily="34" charset="0"/>
+                <a:ea typeface="Calibri" pitchFamily="34" charset="-122"/>
+                <a:cs typeface="Calibri" pitchFamily="34" charset="-120"/>
+              </a:rPr>
+              <a:t>Then we check together</a:t>
+            </a:r>
+            <a:endParaRPr lang="en-US" sz="1900" dirty="0"/>
+          </a:p>
+        </p:txBody>
+      </p:sp>
+      <p:sp>
+        <p:nvSpPr>
+          <p:cNvPr id="25" name="Slide Number Placeholder 0"/>
+          <p:cNvSpPr>
+            <a:spLocks noGrp="1"/>
+          </p:cNvSpPr>
+          <p:nvPr>
+            <p:ph type="sldNum" sz="quarter" idx="4294967295"/>
+          </p:nvPr>
+        </p:nvSpPr>
+        <p:spPr>
+          <a:xfrm>
+            <a:off x="11002975" y="6419088"/>
+            <a:ext cx="640080" cy="274320"/>
+          </a:xfrm>
+          <a:prstGeom prst="rect">
+            <a:avLst/>
+          </a:prstGeom>
+          <a:extLst>
+            <a:ext uri="{C572A759-6A51-4108-AA02-DFA0A04FC94B}">
+              <ma14:wrappingTextBoxFlag xmlns:ma14="http://schemas.microsoft.com/office/mac/drawingml/2011/main" val="0"/>
+            </a:ext>
+          </a:extLst>
+        </p:spPr>
+        <p:txBody>
+          <a:bodyPr/>
+          <a:lstStyle>
+            <a:lvl1pPr>
+              <a:defRPr sz="1000">
+                <a:solidFill>
+                  <a:srgbClr val="5B6B78"/>
+                </a:solidFill>
+                <a:latin typeface="Calibri"/>
+                <a:ea typeface="Calibri"/>
+                <a:cs typeface="Calibri"/>
+              </a:defRPr>
+            </a:lvl1pPr>
+          </a:lstStyle>
+          <a:p>
+            <a:pPr algn="r"/>
+            <a:fld id="{F7021451-1387-4CA6-816F-3879F97B5CBC}" type="slidenum">
+              <a:rPr b="0" lang="en-US"/>
+              <a:t>8</a:t>
+            </a:fld>
+            <a:endParaRPr lang="en-US"/>
+          </a:p>
+        </p:txBody>
+      </p:sp>
+    </p:spTree>
+  </p:cSld>
+  <p:clrMapOvr>
+    <a:masterClrMapping/>
+  </p:clrMapOvr>
+</p:sld>
+</file>
+
+<file path=ppt/slides/slide9.xml><?xml version="1.0" encoding="utf-8"?>
+<p:sld xmlns:a="http://schemas.openxmlformats.org/drawingml/2006/main" xmlns:r="http://schemas.openxmlformats.org/officeDocument/2006/relationships" xmlns:p="http://schemas.openxmlformats.org/presentationml/2006/main">
+  <p:cSld name="Slide 9">
+    <p:spTree>
+      <p:nvGrpSpPr>
+        <p:cNvPr id="1" name=""/>
+        <p:cNvGrpSpPr/>
+        <p:nvPr/>
+      </p:nvGrpSpPr>
+      <p:grpSpPr>
+        <a:xfrm>
+          <a:off x="0" y="0"/>
+          <a:ext cx="0" cy="0"/>
+          <a:chOff x="0" y="0"/>
+          <a:chExt cx="0" cy="0"/>
+        </a:xfrm>
+      </p:grpSpPr>
+      <p:sp>
+        <p:nvSpPr>
+          <p:cNvPr id="2" name="Text 1"/>
+          <p:cNvSpPr/>
+          <p:nvPr>
+            <p:ph idx="101" type="title" hasCustomPrompt="1"/>
+          </p:nvPr>
+        </p:nvSpPr>
+        <p:spPr>
+          <a:xfrm>
+            <a:off x="548640" y="365760"/>
+            <a:ext cx="11094415" cy="868680"/>
+          </a:xfrm>
+          <a:prstGeom prst="rect">
+            <a:avLst/>
+          </a:prstGeom>
+          <a:noFill/>
+          <a:ln/>
+        </p:spPr>
+        <p:txBody>
+          <a:bodyPr wrap="square" lIns="0" tIns="0" rIns="0" bIns="0" rtlCol="0" anchor="ctr"/>
+          <a:lstStyle/>
+          <a:p>
+            <a:pPr algn="l" indent="0" marL="0">
+              <a:buNone/>
+            </a:pPr>
+            <a:r>
+              <a:rPr lang="en-US" sz="3200" b="1" dirty="0">
+                <a:solidFill>
+                  <a:srgbClr val="2E4A62"/>
+                </a:solidFill>
+                <a:latin typeface="Cambria" pitchFamily="34" charset="0"/>
+                <a:ea typeface="Cambria" pitchFamily="34" charset="-122"/>
+                <a:cs typeface="Cambria" pitchFamily="34" charset="-120"/>
+              </a:rPr>
               <a:t>How to read one line of assembly</a:t>
             </a:r>
             <a:endParaRPr lang="en-US" sz="3200" dirty="0"/>
@@ -27348,7 +27986,7 @@
       </p:sp>
       <p:graphicFrame>
         <p:nvGraphicFramePr>
-          <p:cNvPr id="9" name="Table 0"/>
+          <p:cNvPr id="10" name="Table 0"/>
           <p:cNvGraphicFramePr>
             <a:graphicFrameLocks noGrp="1"/>
           </p:cNvGraphicFramePr>
@@ -28774,1433 +29412,6 @@
                 <a:cs typeface="Calibri" pitchFamily="34" charset="-120"/>
               </a:rPr>
               <a:t> · reading a line of assembly</a:t>
-            </a:r>
-            <a:endParaRPr lang="en-US" sz="1100" dirty="0"/>
-          </a:p>
-        </p:txBody>
-      </p:sp>
-      <p:sp>
-        <p:nvSpPr>
-          <p:cNvPr id="25" name="Slide Number Placeholder 0"/>
-          <p:cNvSpPr>
-            <a:spLocks noGrp="1"/>
-          </p:cNvSpPr>
-          <p:nvPr>
-            <p:ph type="sldNum" sz="quarter" idx="4294967295"/>
-          </p:nvPr>
-        </p:nvSpPr>
-        <p:spPr>
-          <a:xfrm>
-            <a:off x="11002975" y="6419088"/>
-            <a:ext cx="640080" cy="274320"/>
-          </a:xfrm>
-          <a:prstGeom prst="rect">
-            <a:avLst/>
-          </a:prstGeom>
-          <a:extLst>
-            <a:ext uri="{C572A759-6A51-4108-AA02-DFA0A04FC94B}">
-              <ma14:wrappingTextBoxFlag xmlns:ma14="http://schemas.microsoft.com/office/mac/drawingml/2011/main" val="0"/>
-            </a:ext>
-          </a:extLst>
-        </p:spPr>
-        <p:txBody>
-          <a:bodyPr/>
-          <a:lstStyle>
-            <a:lvl1pPr>
-              <a:defRPr sz="1000">
-                <a:solidFill>
-                  <a:srgbClr val="5B6B78"/>
-                </a:solidFill>
-                <a:latin typeface="Calibri"/>
-                <a:ea typeface="Calibri"/>
-                <a:cs typeface="Calibri"/>
-              </a:defRPr>
-            </a:lvl1pPr>
-          </a:lstStyle>
-          <a:p>
-            <a:pPr algn="r"/>
-            <a:fld id="{F7021451-1387-4CA6-816F-3879F97B5CBC}" type="slidenum">
-              <a:rPr b="0" lang="en-US"/>
-              <a:t>8</a:t>
-            </a:fld>
-            <a:endParaRPr lang="en-US"/>
-          </a:p>
-        </p:txBody>
-      </p:sp>
-    </p:spTree>
-  </p:cSld>
-  <p:clrMapOvr>
-    <a:masterClrMapping/>
-  </p:clrMapOvr>
-</p:sld>
-</file>
-
-<file path=ppt/slides/slide9.xml><?xml version="1.0" encoding="utf-8"?>
-<p:sld xmlns:a="http://schemas.openxmlformats.org/drawingml/2006/main" xmlns:r="http://schemas.openxmlformats.org/officeDocument/2006/relationships" xmlns:p="http://schemas.openxmlformats.org/presentationml/2006/main">
-  <p:cSld name="Slide 9">
-    <p:spTree>
-      <p:nvGrpSpPr>
-        <p:cNvPr id="1" name=""/>
-        <p:cNvGrpSpPr/>
-        <p:nvPr/>
-      </p:nvGrpSpPr>
-      <p:grpSpPr>
-        <a:xfrm>
-          <a:off x="0" y="0"/>
-          <a:ext cx="0" cy="0"/>
-          <a:chOff x="0" y="0"/>
-          <a:chExt cx="0" cy="0"/>
-        </a:xfrm>
-      </p:grpSpPr>
-      <p:sp>
-        <p:nvSpPr>
-          <p:cNvPr id="2" name="Text 1"/>
-          <p:cNvSpPr/>
-          <p:nvPr>
-            <p:ph idx="101" type="title" hasCustomPrompt="1"/>
-          </p:nvPr>
-        </p:nvSpPr>
-        <p:spPr>
-          <a:xfrm>
-            <a:off x="548640" y="365760"/>
-            <a:ext cx="11094415" cy="868680"/>
-          </a:xfrm>
-          <a:prstGeom prst="rect">
-            <a:avLst/>
-          </a:prstGeom>
-          <a:noFill/>
-          <a:ln/>
-        </p:spPr>
-        <p:txBody>
-          <a:bodyPr wrap="square" lIns="0" tIns="0" rIns="0" bIns="0" rtlCol="0" anchor="ctr"/>
-          <a:lstStyle/>
-          <a:p>
-            <a:pPr algn="l" indent="0" marL="0">
-              <a:buNone/>
-            </a:pPr>
-            <a:r>
-              <a:rPr lang="en-US" sz="3200" b="1" dirty="0">
-                <a:solidFill>
-                  <a:srgbClr val="2E4A62"/>
-                </a:solidFill>
-                <a:latin typeface="Cambria" pitchFamily="34" charset="0"/>
-                <a:ea typeface="Cambria" pitchFamily="34" charset="-122"/>
-                <a:cs typeface="Cambria" pitchFamily="34" charset="-120"/>
-              </a:rPr>
-              <a:t>Why save ra? The stack frame</a:t>
-            </a:r>
-            <a:endParaRPr lang="en-US" sz="3200" dirty="0"/>
-          </a:p>
-        </p:txBody>
-      </p:sp>
-      <p:sp>
-        <p:nvSpPr>
-          <p:cNvPr id="3" name="Shape 1"/>
-          <p:cNvSpPr/>
-          <p:nvPr/>
-        </p:nvSpPr>
-        <p:spPr>
-          <a:xfrm>
-            <a:off x="548640" y="1515999"/>
-            <a:ext cx="146304" cy="146304"/>
-          </a:xfrm>
-          <a:prstGeom prst="rect">
-            <a:avLst/>
-          </a:prstGeom>
-          <a:solidFill>
-            <a:srgbClr val="0E7C86"/>
-          </a:solidFill>
-          <a:ln w="12700">
-            <a:solidFill>
-              <a:srgbClr val="0E7C86"/>
-            </a:solidFill>
-            <a:prstDash val="solid"/>
-          </a:ln>
-        </p:spPr>
-      </p:sp>
-      <p:sp>
-        <p:nvSpPr>
-          <p:cNvPr id="4" name="Text 2"/>
-          <p:cNvSpPr txBox="1"/>
-          <p:nvPr/>
-        </p:nvSpPr>
-        <p:spPr>
-          <a:xfrm>
-            <a:off x="932688" y="1417320"/>
-            <a:ext cx="6108192" cy="325374"/>
-          </a:xfrm>
-          <a:prstGeom prst="rect">
-            <a:avLst/>
-          </a:prstGeom>
-          <a:noFill/>
-          <a:ln/>
-        </p:spPr>
-        <p:txBody>
-          <a:bodyPr wrap="square" lIns="0" tIns="0" rIns="0" bIns="0" rtlCol="0" anchor="t"/>
-          <a:lstStyle/>
-          <a:p>
-            <a:pPr indent="0" marL="0">
-              <a:spcAft>
-                <a:spcPts val="200"/>
-              </a:spcAft>
-              <a:buNone/>
-            </a:pPr>
-            <a:r>
-              <a:rPr lang="en-US" sz="2100" dirty="0">
-                <a:solidFill>
-                  <a:srgbClr val="1B2530"/>
-                </a:solidFill>
-                <a:latin typeface="Calibri" pitchFamily="34" charset="0"/>
-                <a:ea typeface="Calibri" pitchFamily="34" charset="-122"/>
-                <a:cs typeface="Calibri" pitchFamily="34" charset="-120"/>
-              </a:rPr>
-              <a:t>call stores the address to come back to in ra</a:t>
-            </a:r>
-            <a:endParaRPr lang="en-US" sz="2100" dirty="0"/>
-          </a:p>
-        </p:txBody>
-      </p:sp>
-      <p:sp>
-        <p:nvSpPr>
-          <p:cNvPr id="5" name="Shape 3"/>
-          <p:cNvSpPr/>
-          <p:nvPr/>
-        </p:nvSpPr>
-        <p:spPr>
-          <a:xfrm>
-            <a:off x="548640" y="2142744"/>
-            <a:ext cx="146304" cy="146304"/>
-          </a:xfrm>
-          <a:prstGeom prst="rect">
-            <a:avLst/>
-          </a:prstGeom>
-          <a:solidFill>
-            <a:srgbClr val="C7791B"/>
-          </a:solidFill>
-          <a:ln w="12700">
-            <a:solidFill>
-              <a:srgbClr val="C7791B"/>
-            </a:solidFill>
-            <a:prstDash val="solid"/>
-          </a:ln>
-        </p:spPr>
-      </p:sp>
-      <p:sp>
-        <p:nvSpPr>
-          <p:cNvPr id="6" name="Text 4"/>
-          <p:cNvSpPr txBox="1"/>
-          <p:nvPr/>
-        </p:nvSpPr>
-        <p:spPr>
-          <a:xfrm>
-            <a:off x="932688" y="2044065"/>
-            <a:ext cx="6108192" cy="650748"/>
-          </a:xfrm>
-          <a:prstGeom prst="rect">
-            <a:avLst/>
-          </a:prstGeom>
-          <a:noFill/>
-          <a:ln/>
-        </p:spPr>
-        <p:txBody>
-          <a:bodyPr wrap="square" lIns="0" tIns="0" rIns="0" bIns="0" rtlCol="0" anchor="t"/>
-          <a:lstStyle/>
-          <a:p>
-            <a:pPr indent="0" marL="0">
-              <a:spcAft>
-                <a:spcPts val="200"/>
-              </a:spcAft>
-              <a:buNone/>
-            </a:pPr>
-            <a:r>
-              <a:rPr lang="en-US" sz="2100" dirty="0">
-                <a:solidFill>
-                  <a:srgbClr val="1B2530"/>
-                </a:solidFill>
-                <a:latin typeface="Calibri" pitchFamily="34" charset="0"/>
-                <a:ea typeface="Calibri" pitchFamily="34" charset="-122"/>
-                <a:cs typeface="Calibri" pitchFamily="34" charset="-120"/>
-              </a:rPr>
-              <a:t>The function you call will use ra for its own calls, overwriting yours</a:t>
-            </a:r>
-            <a:endParaRPr lang="en-US" sz="2100" dirty="0"/>
-          </a:p>
-        </p:txBody>
-      </p:sp>
-      <p:sp>
-        <p:nvSpPr>
-          <p:cNvPr id="7" name="Shape 5"/>
-          <p:cNvSpPr/>
-          <p:nvPr/>
-        </p:nvSpPr>
-        <p:spPr>
-          <a:xfrm>
-            <a:off x="548640" y="3094863"/>
-            <a:ext cx="146304" cy="146304"/>
-          </a:xfrm>
-          <a:prstGeom prst="rect">
-            <a:avLst/>
-          </a:prstGeom>
-          <a:solidFill>
-            <a:srgbClr val="0E7C86"/>
-          </a:solidFill>
-          <a:ln w="12700">
-            <a:solidFill>
-              <a:srgbClr val="0E7C86"/>
-            </a:solidFill>
-            <a:prstDash val="solid"/>
-          </a:ln>
-        </p:spPr>
-      </p:sp>
-      <p:sp>
-        <p:nvSpPr>
-          <p:cNvPr id="8" name="Text 6"/>
-          <p:cNvSpPr txBox="1"/>
-          <p:nvPr/>
-        </p:nvSpPr>
-        <p:spPr>
-          <a:xfrm>
-            <a:off x="932688" y="2996184"/>
-            <a:ext cx="6108192" cy="1281684"/>
-          </a:xfrm>
-          <a:prstGeom prst="rect">
-            <a:avLst/>
-          </a:prstGeom>
-          <a:noFill/>
-          <a:ln/>
-        </p:spPr>
-        <p:txBody>
-          <a:bodyPr wrap="square" lIns="0" tIns="0" rIns="0" bIns="0" rtlCol="0" anchor="t"/>
-          <a:lstStyle/>
-          <a:p>
-            <a:pPr indent="0" marL="0">
-              <a:spcAft>
-                <a:spcPts val="200"/>
-              </a:spcAft>
-              <a:buNone/>
-            </a:pPr>
-            <a:r>
-              <a:rPr lang="en-US" sz="2100" dirty="0">
-                <a:solidFill>
-                  <a:srgbClr val="1B2530"/>
-                </a:solidFill>
-                <a:latin typeface="Calibri" pitchFamily="34" charset="0"/>
-                <a:ea typeface="Calibri" pitchFamily="34" charset="-122"/>
-                <a:cs typeface="Calibri" pitchFamily="34" charset="-120"/>
-              </a:rPr>
-              <a:t>So a function that calls another one saves ra first</a:t>
-            </a:r>
-            <a:endParaRPr lang="en-US" sz="2100" dirty="0"/>
-          </a:p>
-          <a:p>
-            <a:pPr indent="0" marL="0">
-              <a:spcAft>
-                <a:spcPts val="200"/>
-              </a:spcAft>
-              <a:buNone/>
-            </a:pPr>
-            <a:r>
-              <a:rPr lang="en-US" sz="1800" dirty="0">
-                <a:solidFill>
-                  <a:srgbClr val="5B6B78"/>
-                </a:solidFill>
-                <a:latin typeface="Calibri" pitchFamily="34" charset="0"/>
-                <a:ea typeface="Calibri" pitchFamily="34" charset="-122"/>
-                <a:cs typeface="Calibri" pitchFamily="34" charset="-120"/>
-              </a:rPr>
-              <a:t>– lower sp by 16 to make room</a:t>
-            </a:r>
-            <a:endParaRPr lang="en-US" sz="2100" dirty="0"/>
-          </a:p>
-          <a:p>
-            <a:pPr indent="0" marL="0">
-              <a:spcAft>
-                <a:spcPts val="200"/>
-              </a:spcAft>
-              <a:buNone/>
-            </a:pPr>
-            <a:r>
-              <a:rPr lang="en-US" sz="1800" dirty="0">
-                <a:solidFill>
-                  <a:srgbClr val="5B6B78"/>
-                </a:solidFill>
-                <a:latin typeface="Calibri" pitchFamily="34" charset="0"/>
-                <a:ea typeface="Calibri" pitchFamily="34" charset="-122"/>
-                <a:cs typeface="Calibri" pitchFamily="34" charset="-120"/>
-              </a:rPr>
-              <a:t>– store ra at 12(sp)</a:t>
-            </a:r>
-            <a:endParaRPr lang="en-US" sz="2100" dirty="0"/>
-          </a:p>
-        </p:txBody>
-      </p:sp>
-      <p:sp>
-        <p:nvSpPr>
-          <p:cNvPr id="9" name="Shape 7"/>
-          <p:cNvSpPr/>
-          <p:nvPr/>
-        </p:nvSpPr>
-        <p:spPr>
-          <a:xfrm>
-            <a:off x="548640" y="4677918"/>
-            <a:ext cx="146304" cy="146304"/>
-          </a:xfrm>
-          <a:prstGeom prst="rect">
-            <a:avLst/>
-          </a:prstGeom>
-          <a:solidFill>
-            <a:srgbClr val="C7791B"/>
-          </a:solidFill>
-          <a:ln w="12700">
-            <a:solidFill>
-              <a:srgbClr val="C7791B"/>
-            </a:solidFill>
-            <a:prstDash val="solid"/>
-          </a:ln>
-        </p:spPr>
-      </p:sp>
-      <p:sp>
-        <p:nvSpPr>
-          <p:cNvPr id="10" name="Text 8"/>
-          <p:cNvSpPr txBox="1"/>
-          <p:nvPr/>
-        </p:nvSpPr>
-        <p:spPr>
-          <a:xfrm>
-            <a:off x="932688" y="4579239"/>
-            <a:ext cx="6108192" cy="640842"/>
-          </a:xfrm>
-          <a:prstGeom prst="rect">
-            <a:avLst/>
-          </a:prstGeom>
-          <a:noFill/>
-          <a:ln/>
-        </p:spPr>
-        <p:txBody>
-          <a:bodyPr wrap="square" lIns="0" tIns="0" rIns="0" bIns="0" rtlCol="0" anchor="t"/>
-          <a:lstStyle/>
-          <a:p>
-            <a:pPr indent="0" marL="0">
-              <a:spcAft>
-                <a:spcPts val="200"/>
-              </a:spcAft>
-              <a:buNone/>
-            </a:pPr>
-            <a:r>
-              <a:rPr lang="en-US" sz="2100" dirty="0">
-                <a:solidFill>
-                  <a:srgbClr val="1B2530"/>
-                </a:solidFill>
-                <a:latin typeface="Calibri" pitchFamily="34" charset="0"/>
-                <a:ea typeface="Calibri" pitchFamily="34" charset="-122"/>
-                <a:cs typeface="Calibri" pitchFamily="34" charset="-120"/>
-              </a:rPr>
-              <a:t>After the call, undo it in reverse order</a:t>
-            </a:r>
-            <a:endParaRPr lang="en-US" sz="2100" dirty="0"/>
-          </a:p>
-          <a:p>
-            <a:pPr indent="0" marL="0">
-              <a:spcAft>
-                <a:spcPts val="200"/>
-              </a:spcAft>
-              <a:buNone/>
-            </a:pPr>
-            <a:r>
-              <a:rPr lang="en-US" sz="1800" dirty="0">
-                <a:solidFill>
-                  <a:srgbClr val="5B6B78"/>
-                </a:solidFill>
-                <a:latin typeface="Calibri" pitchFamily="34" charset="0"/>
-                <a:ea typeface="Calibri" pitchFamily="34" charset="-122"/>
-                <a:cs typeface="Calibri" pitchFamily="34" charset="-120"/>
-              </a:rPr>
-              <a:t>– load ra back, raise sp by 16, then ret</a:t>
-            </a:r>
-            <a:endParaRPr lang="en-US" sz="2100" dirty="0"/>
-          </a:p>
-        </p:txBody>
-      </p:sp>
-      <p:sp>
-        <p:nvSpPr>
-          <p:cNvPr id="11" name="Shape 9"/>
-          <p:cNvSpPr/>
-          <p:nvPr/>
-        </p:nvSpPr>
-        <p:spPr>
-          <a:xfrm>
-            <a:off x="548640" y="5620131"/>
-            <a:ext cx="146304" cy="146304"/>
-          </a:xfrm>
-          <a:prstGeom prst="rect">
-            <a:avLst/>
-          </a:prstGeom>
-          <a:solidFill>
-            <a:srgbClr val="0E7C86"/>
-          </a:solidFill>
-          <a:ln w="12700">
-            <a:solidFill>
-              <a:srgbClr val="0E7C86"/>
-            </a:solidFill>
-            <a:prstDash val="solid"/>
-          </a:ln>
-        </p:spPr>
-      </p:sp>
-      <p:sp>
-        <p:nvSpPr>
-          <p:cNvPr id="12" name="Text 10"/>
-          <p:cNvSpPr txBox="1"/>
-          <p:nvPr/>
-        </p:nvSpPr>
-        <p:spPr>
-          <a:xfrm>
-            <a:off x="932688" y="5521452"/>
-            <a:ext cx="6108192" cy="650748"/>
-          </a:xfrm>
-          <a:prstGeom prst="rect">
-            <a:avLst/>
-          </a:prstGeom>
-          <a:noFill/>
-          <a:ln/>
-        </p:spPr>
-        <p:txBody>
-          <a:bodyPr wrap="square" lIns="0" tIns="0" rIns="0" bIns="0" rtlCol="0" anchor="t"/>
-          <a:lstStyle/>
-          <a:p>
-            <a:pPr indent="0" marL="0">
-              <a:spcAft>
-                <a:spcPts val="200"/>
-              </a:spcAft>
-              <a:buNone/>
-            </a:pPr>
-            <a:r>
-              <a:rPr lang="en-US" sz="2100" dirty="0">
-                <a:solidFill>
-                  <a:srgbClr val="1B2530"/>
-                </a:solidFill>
-                <a:latin typeface="Calibri" pitchFamily="34" charset="0"/>
-                <a:ea typeface="Calibri" pitchFamily="34" charset="-122"/>
-                <a:cs typeface="Calibri" pitchFamily="34" charset="-120"/>
-              </a:rPr>
-              <a:t>Forgetting the pair is the classic first bug: the function returns to the wrong place</a:t>
-            </a:r>
-            <a:endParaRPr lang="en-US" sz="2100" dirty="0"/>
-          </a:p>
-        </p:txBody>
-      </p:sp>
-      <p:sp>
-        <p:nvSpPr>
-          <p:cNvPr id="13" name="Text 11"/>
-          <p:cNvSpPr txBox="1"/>
-          <p:nvPr/>
-        </p:nvSpPr>
-        <p:spPr>
-          <a:xfrm>
-            <a:off x="7589520" y="1417320"/>
-            <a:ext cx="4206240" cy="365760"/>
-          </a:xfrm>
-          <a:prstGeom prst="rect">
-            <a:avLst/>
-          </a:prstGeom>
-          <a:noFill/>
-          <a:ln/>
-        </p:spPr>
-        <p:txBody>
-          <a:bodyPr wrap="square" lIns="0" tIns="0" rIns="0" bIns="0" rtlCol="0" anchor="t"/>
-          <a:lstStyle/>
-          <a:p>
-            <a:pPr indent="0" marL="0">
-              <a:buNone/>
-            </a:pPr>
-            <a:r>
-              <a:rPr lang="en-US" sz="1500" b="1" dirty="0">
-                <a:solidFill>
-                  <a:srgbClr val="2E4A62"/>
-                </a:solidFill>
-                <a:latin typeface="Calibri" pitchFamily="34" charset="0"/>
-                <a:ea typeface="Calibri" pitchFamily="34" charset="-122"/>
-                <a:cs typeface="Calibri" pitchFamily="34" charset="-120"/>
-              </a:rPr>
-              <a:t>Stack memory after the prologue</a:t>
-            </a:r>
-            <a:endParaRPr lang="en-US" sz="1500" dirty="0"/>
-          </a:p>
-        </p:txBody>
-      </p:sp>
-      <p:sp>
-        <p:nvSpPr>
-          <p:cNvPr id="14" name="Text 12"/>
-          <p:cNvSpPr txBox="1"/>
-          <p:nvPr/>
-        </p:nvSpPr>
-        <p:spPr>
-          <a:xfrm>
-            <a:off x="7589520" y="2103120"/>
-            <a:ext cx="2926080" cy="566928"/>
-          </a:xfrm>
-          <a:prstGeom prst="rect">
-            <a:avLst/>
-          </a:prstGeom>
-          <a:solidFill>
-            <a:srgbClr val="C9D2D8"/>
-          </a:solidFill>
-          <a:ln w="12700">
-            <a:solidFill>
-              <a:srgbClr val="2E4A62"/>
-            </a:solidFill>
-          </a:ln>
-        </p:spPr>
-        <p:txBody>
-          <a:bodyPr wrap="square" lIns="0" tIns="0" rIns="0" bIns="0" rtlCol="0" anchor="ctr"/>
-          <a:lstStyle/>
-          <a:p>
-            <a:pPr algn="ctr" indent="0" marL="0">
-              <a:buNone/>
-            </a:pPr>
-            <a:r>
-              <a:rPr lang="en-US" sz="1600" b="1" dirty="0">
-                <a:solidFill>
-                  <a:srgbClr val="1B2530"/>
-                </a:solidFill>
-                <a:latin typeface="Courier New" pitchFamily="34" charset="0"/>
-                <a:ea typeface="Courier New" pitchFamily="34" charset="-122"/>
-                <a:cs typeface="Courier New" pitchFamily="34" charset="-120"/>
-              </a:rPr>
-              <a:t>caller's data</a:t>
-            </a:r>
-            <a:endParaRPr lang="en-US" sz="1600" dirty="0"/>
-          </a:p>
-        </p:txBody>
-      </p:sp>
-      <p:sp>
-        <p:nvSpPr>
-          <p:cNvPr id="15" name="Text 13"/>
-          <p:cNvSpPr txBox="1"/>
-          <p:nvPr/>
-        </p:nvSpPr>
-        <p:spPr>
-          <a:xfrm>
-            <a:off x="10652760" y="2103120"/>
-            <a:ext cx="1097280" cy="566928"/>
-          </a:xfrm>
-          <a:prstGeom prst="rect">
-            <a:avLst/>
-          </a:prstGeom>
-          <a:noFill/>
-          <a:ln/>
-        </p:spPr>
-        <p:txBody>
-          <a:bodyPr wrap="square" lIns="0" tIns="0" rIns="0" bIns="0" rtlCol="0" anchor="ctr"/>
-          <a:lstStyle/>
-          <a:p>
-            <a:pPr indent="0" marL="0">
-              <a:buNone/>
-            </a:pPr>
-            <a:r>
-              <a:rPr lang="en-US" sz="1400" dirty="0">
-                <a:solidFill>
-                  <a:srgbClr val="5B6B78"/>
-                </a:solidFill>
-                <a:latin typeface="Courier New" pitchFamily="34" charset="0"/>
-                <a:ea typeface="Courier New" pitchFamily="34" charset="-122"/>
-                <a:cs typeface="Courier New" pitchFamily="34" charset="-120"/>
-              </a:rPr>
-              <a:t>16(sp)</a:t>
-            </a:r>
-            <a:endParaRPr lang="en-US" sz="1400" dirty="0"/>
-          </a:p>
-        </p:txBody>
-      </p:sp>
-      <p:sp>
-        <p:nvSpPr>
-          <p:cNvPr id="16" name="Text 14"/>
-          <p:cNvSpPr txBox="1"/>
-          <p:nvPr/>
-        </p:nvSpPr>
-        <p:spPr>
-          <a:xfrm>
-            <a:off x="7589520" y="2670048"/>
-            <a:ext cx="2926080" cy="566928"/>
-          </a:xfrm>
-          <a:prstGeom prst="rect">
-            <a:avLst/>
-          </a:prstGeom>
-          <a:solidFill>
-            <a:srgbClr val="C7791B"/>
-          </a:solidFill>
-          <a:ln w="12700">
-            <a:solidFill>
-              <a:srgbClr val="2E4A62"/>
-            </a:solidFill>
-          </a:ln>
-        </p:spPr>
-        <p:txBody>
-          <a:bodyPr wrap="square" lIns="0" tIns="0" rIns="0" bIns="0" rtlCol="0" anchor="ctr"/>
-          <a:lstStyle/>
-          <a:p>
-            <a:pPr algn="ctr" indent="0" marL="0">
-              <a:buNone/>
-            </a:pPr>
-            <a:r>
-              <a:rPr lang="en-US" sz="1600" b="1" dirty="0">
-                <a:solidFill>
-                  <a:srgbClr val="FFFFFF"/>
-                </a:solidFill>
-                <a:latin typeface="Courier New" pitchFamily="34" charset="0"/>
-                <a:ea typeface="Courier New" pitchFamily="34" charset="-122"/>
-                <a:cs typeface="Courier New" pitchFamily="34" charset="-120"/>
-              </a:rPr>
-              <a:t>ra</a:t>
-            </a:r>
-            <a:endParaRPr lang="en-US" sz="1600" dirty="0"/>
-          </a:p>
-        </p:txBody>
-      </p:sp>
-      <p:sp>
-        <p:nvSpPr>
-          <p:cNvPr id="17" name="Text 15"/>
-          <p:cNvSpPr txBox="1"/>
-          <p:nvPr/>
-        </p:nvSpPr>
-        <p:spPr>
-          <a:xfrm>
-            <a:off x="10652760" y="2670048"/>
-            <a:ext cx="1097280" cy="566928"/>
-          </a:xfrm>
-          <a:prstGeom prst="rect">
-            <a:avLst/>
-          </a:prstGeom>
-          <a:noFill/>
-          <a:ln/>
-        </p:spPr>
-        <p:txBody>
-          <a:bodyPr wrap="square" lIns="0" tIns="0" rIns="0" bIns="0" rtlCol="0" anchor="ctr"/>
-          <a:lstStyle/>
-          <a:p>
-            <a:pPr indent="0" marL="0">
-              <a:buNone/>
-            </a:pPr>
-            <a:r>
-              <a:rPr lang="en-US" sz="1400" dirty="0">
-                <a:solidFill>
-                  <a:srgbClr val="5B6B78"/>
-                </a:solidFill>
-                <a:latin typeface="Courier New" pitchFamily="34" charset="0"/>
-                <a:ea typeface="Courier New" pitchFamily="34" charset="-122"/>
-                <a:cs typeface="Courier New" pitchFamily="34" charset="-120"/>
-              </a:rPr>
-              <a:t>12(sp)</a:t>
-            </a:r>
-            <a:endParaRPr lang="en-US" sz="1400" dirty="0"/>
-          </a:p>
-        </p:txBody>
-      </p:sp>
-      <p:sp>
-        <p:nvSpPr>
-          <p:cNvPr id="18" name="Text 16"/>
-          <p:cNvSpPr txBox="1"/>
-          <p:nvPr/>
-        </p:nvSpPr>
-        <p:spPr>
-          <a:xfrm>
-            <a:off x="7589520" y="3236976"/>
-            <a:ext cx="2926080" cy="566928"/>
-          </a:xfrm>
-          <a:prstGeom prst="rect">
-            <a:avLst/>
-          </a:prstGeom>
-          <a:solidFill>
-            <a:srgbClr val="EEF2F4"/>
-          </a:solidFill>
-          <a:ln w="12700">
-            <a:solidFill>
-              <a:srgbClr val="2E4A62"/>
-            </a:solidFill>
-          </a:ln>
-        </p:spPr>
-        <p:txBody>
-          <a:bodyPr wrap="square" lIns="0" tIns="0" rIns="0" bIns="0" rtlCol="0" anchor="ctr"/>
-          <a:lstStyle/>
-          <a:p>
-            <a:pPr algn="ctr" indent="0" marL="0">
-              <a:buNone/>
-            </a:pPr>
-            <a:r>
-              <a:rPr lang="en-US" sz="1600" b="1" dirty="0">
-                <a:solidFill>
-                  <a:srgbClr val="5B6B78"/>
-                </a:solidFill>
-                <a:latin typeface="Courier New" pitchFamily="34" charset="0"/>
-                <a:ea typeface="Courier New" pitchFamily="34" charset="-122"/>
-                <a:cs typeface="Courier New" pitchFamily="34" charset="-120"/>
-              </a:rPr>
-              <a:t>free</a:t>
-            </a:r>
-            <a:endParaRPr lang="en-US" sz="1600" dirty="0"/>
-          </a:p>
-        </p:txBody>
-      </p:sp>
-      <p:sp>
-        <p:nvSpPr>
-          <p:cNvPr id="19" name="Text 17"/>
-          <p:cNvSpPr txBox="1"/>
-          <p:nvPr/>
-        </p:nvSpPr>
-        <p:spPr>
-          <a:xfrm>
-            <a:off x="10652760" y="3236976"/>
-            <a:ext cx="1097280" cy="566928"/>
-          </a:xfrm>
-          <a:prstGeom prst="rect">
-            <a:avLst/>
-          </a:prstGeom>
-          <a:noFill/>
-          <a:ln/>
-        </p:spPr>
-        <p:txBody>
-          <a:bodyPr wrap="square" lIns="0" tIns="0" rIns="0" bIns="0" rtlCol="0" anchor="ctr"/>
-          <a:lstStyle/>
-          <a:p>
-            <a:pPr indent="0" marL="0">
-              <a:buNone/>
-            </a:pPr>
-            <a:r>
-              <a:rPr lang="en-US" sz="1400" dirty="0">
-                <a:solidFill>
-                  <a:srgbClr val="5B6B78"/>
-                </a:solidFill>
-                <a:latin typeface="Courier New" pitchFamily="34" charset="0"/>
-                <a:ea typeface="Courier New" pitchFamily="34" charset="-122"/>
-                <a:cs typeface="Courier New" pitchFamily="34" charset="-120"/>
-              </a:rPr>
-              <a:t> 8(sp)</a:t>
-            </a:r>
-            <a:endParaRPr lang="en-US" sz="1400" dirty="0"/>
-          </a:p>
-        </p:txBody>
-      </p:sp>
-      <p:sp>
-        <p:nvSpPr>
-          <p:cNvPr id="20" name="Text 18"/>
-          <p:cNvSpPr txBox="1"/>
-          <p:nvPr/>
-        </p:nvSpPr>
-        <p:spPr>
-          <a:xfrm>
-            <a:off x="7589520" y="3803904"/>
-            <a:ext cx="2926080" cy="566928"/>
-          </a:xfrm>
-          <a:prstGeom prst="rect">
-            <a:avLst/>
-          </a:prstGeom>
-          <a:solidFill>
-            <a:srgbClr val="EEF2F4"/>
-          </a:solidFill>
-          <a:ln w="12700">
-            <a:solidFill>
-              <a:srgbClr val="2E4A62"/>
-            </a:solidFill>
-          </a:ln>
-        </p:spPr>
-        <p:txBody>
-          <a:bodyPr wrap="square" lIns="0" tIns="0" rIns="0" bIns="0" rtlCol="0" anchor="ctr"/>
-          <a:lstStyle/>
-          <a:p>
-            <a:pPr algn="ctr" indent="0" marL="0">
-              <a:buNone/>
-            </a:pPr>
-            <a:r>
-              <a:rPr lang="en-US" sz="1600" b="1" dirty="0">
-                <a:solidFill>
-                  <a:srgbClr val="5B6B78"/>
-                </a:solidFill>
-                <a:latin typeface="Courier New" pitchFamily="34" charset="0"/>
-                <a:ea typeface="Courier New" pitchFamily="34" charset="-122"/>
-                <a:cs typeface="Courier New" pitchFamily="34" charset="-120"/>
-              </a:rPr>
-              <a:t>free</a:t>
-            </a:r>
-            <a:endParaRPr lang="en-US" sz="1600" dirty="0"/>
-          </a:p>
-        </p:txBody>
-      </p:sp>
-      <p:sp>
-        <p:nvSpPr>
-          <p:cNvPr id="21" name="Text 19"/>
-          <p:cNvSpPr txBox="1"/>
-          <p:nvPr/>
-        </p:nvSpPr>
-        <p:spPr>
-          <a:xfrm>
-            <a:off x="10652760" y="3803904"/>
-            <a:ext cx="1097280" cy="566928"/>
-          </a:xfrm>
-          <a:prstGeom prst="rect">
-            <a:avLst/>
-          </a:prstGeom>
-          <a:noFill/>
-          <a:ln/>
-        </p:spPr>
-        <p:txBody>
-          <a:bodyPr wrap="square" lIns="0" tIns="0" rIns="0" bIns="0" rtlCol="0" anchor="ctr"/>
-          <a:lstStyle/>
-          <a:p>
-            <a:pPr indent="0" marL="0">
-              <a:buNone/>
-            </a:pPr>
-            <a:r>
-              <a:rPr lang="en-US" sz="1400" dirty="0">
-                <a:solidFill>
-                  <a:srgbClr val="5B6B78"/>
-                </a:solidFill>
-                <a:latin typeface="Courier New" pitchFamily="34" charset="0"/>
-                <a:ea typeface="Courier New" pitchFamily="34" charset="-122"/>
-                <a:cs typeface="Courier New" pitchFamily="34" charset="-120"/>
-              </a:rPr>
-              <a:t> 4(sp)</a:t>
-            </a:r>
-            <a:endParaRPr lang="en-US" sz="1400" dirty="0"/>
-          </a:p>
-        </p:txBody>
-      </p:sp>
-      <p:sp>
-        <p:nvSpPr>
-          <p:cNvPr id="22" name="Text 20"/>
-          <p:cNvSpPr txBox="1"/>
-          <p:nvPr/>
-        </p:nvSpPr>
-        <p:spPr>
-          <a:xfrm>
-            <a:off x="7589520" y="4370832"/>
-            <a:ext cx="2926080" cy="566928"/>
-          </a:xfrm>
-          <a:prstGeom prst="rect">
-            <a:avLst/>
-          </a:prstGeom>
-          <a:solidFill>
-            <a:srgbClr val="EEF2F4"/>
-          </a:solidFill>
-          <a:ln w="12700">
-            <a:solidFill>
-              <a:srgbClr val="2E4A62"/>
-            </a:solidFill>
-          </a:ln>
-        </p:spPr>
-        <p:txBody>
-          <a:bodyPr wrap="square" lIns="0" tIns="0" rIns="0" bIns="0" rtlCol="0" anchor="ctr"/>
-          <a:lstStyle/>
-          <a:p>
-            <a:pPr algn="ctr" indent="0" marL="0">
-              <a:buNone/>
-            </a:pPr>
-            <a:r>
-              <a:rPr lang="en-US" sz="1600" b="1" dirty="0">
-                <a:solidFill>
-                  <a:srgbClr val="5B6B78"/>
-                </a:solidFill>
-                <a:latin typeface="Courier New" pitchFamily="34" charset="0"/>
-                <a:ea typeface="Courier New" pitchFamily="34" charset="-122"/>
-                <a:cs typeface="Courier New" pitchFamily="34" charset="-120"/>
-              </a:rPr>
-              <a:t>free</a:t>
-            </a:r>
-            <a:endParaRPr lang="en-US" sz="1600" dirty="0"/>
-          </a:p>
-        </p:txBody>
-      </p:sp>
-      <p:sp>
-        <p:nvSpPr>
-          <p:cNvPr id="23" name="Text 21"/>
-          <p:cNvSpPr txBox="1"/>
-          <p:nvPr/>
-        </p:nvSpPr>
-        <p:spPr>
-          <a:xfrm>
-            <a:off x="10652760" y="4370832"/>
-            <a:ext cx="1097280" cy="566928"/>
-          </a:xfrm>
-          <a:prstGeom prst="rect">
-            <a:avLst/>
-          </a:prstGeom>
-          <a:noFill/>
-          <a:ln/>
-        </p:spPr>
-        <p:txBody>
-          <a:bodyPr wrap="square" lIns="0" tIns="0" rIns="0" bIns="0" rtlCol="0" anchor="ctr"/>
-          <a:lstStyle/>
-          <a:p>
-            <a:pPr indent="0" marL="0">
-              <a:buNone/>
-            </a:pPr>
-            <a:r>
-              <a:rPr lang="en-US" sz="1400" dirty="0">
-                <a:solidFill>
-                  <a:srgbClr val="5B6B78"/>
-                </a:solidFill>
-                <a:latin typeface="Courier New" pitchFamily="34" charset="0"/>
-                <a:ea typeface="Courier New" pitchFamily="34" charset="-122"/>
-                <a:cs typeface="Courier New" pitchFamily="34" charset="-120"/>
-              </a:rPr>
-              <a:t> 0(sp)</a:t>
-            </a:r>
-            <a:endParaRPr lang="en-US" sz="1400" dirty="0"/>
-          </a:p>
-        </p:txBody>
-      </p:sp>
-      <p:sp>
-        <p:nvSpPr>
-          <p:cNvPr id="24" name="Shape 22"/>
-          <p:cNvSpPr/>
-          <p:nvPr/>
-        </p:nvSpPr>
-        <p:spPr>
-          <a:xfrm>
-            <a:off x="6766560" y="4654296"/>
-            <a:ext cx="777240" cy="0"/>
-          </a:xfrm>
-          <a:prstGeom prst="line">
-            <a:avLst/>
-          </a:prstGeom>
-          <a:noFill/>
-          <a:ln w="28575">
-            <a:solidFill>
-              <a:srgbClr val="B23A48"/>
-            </a:solidFill>
-            <a:prstDash val="solid"/>
-            <a:tailEnd type="triangle"/>
-          </a:ln>
-        </p:spPr>
-      </p:sp>
-      <p:sp>
-        <p:nvSpPr>
-          <p:cNvPr id="25" name="Text 23"/>
-          <p:cNvSpPr txBox="1"/>
-          <p:nvPr/>
-        </p:nvSpPr>
-        <p:spPr>
-          <a:xfrm>
-            <a:off x="6217920" y="4370832"/>
-            <a:ext cx="502920" cy="566928"/>
-          </a:xfrm>
-          <a:prstGeom prst="rect">
-            <a:avLst/>
-          </a:prstGeom>
-          <a:noFill/>
-          <a:ln/>
-        </p:spPr>
-        <p:txBody>
-          <a:bodyPr wrap="square" lIns="0" tIns="0" rIns="0" bIns="0" rtlCol="0" anchor="ctr"/>
-          <a:lstStyle/>
-          <a:p>
-            <a:pPr algn="r" indent="0" marL="0">
-              <a:buNone/>
-            </a:pPr>
-            <a:r>
-              <a:rPr lang="en-US" sz="1800" b="1" dirty="0">
-                <a:solidFill>
-                  <a:srgbClr val="B23A48"/>
-                </a:solidFill>
-                <a:latin typeface="Courier New" pitchFamily="34" charset="0"/>
-                <a:ea typeface="Courier New" pitchFamily="34" charset="-122"/>
-                <a:cs typeface="Courier New" pitchFamily="34" charset="-120"/>
-              </a:rPr>
-              <a:t>sp</a:t>
-            </a:r>
-            <a:endParaRPr lang="en-US" sz="1800" dirty="0"/>
-          </a:p>
-        </p:txBody>
-      </p:sp>
-      <p:sp>
-        <p:nvSpPr>
-          <p:cNvPr id="26" name="Text 24"/>
-          <p:cNvSpPr txBox="1"/>
-          <p:nvPr/>
-        </p:nvSpPr>
-        <p:spPr>
-          <a:xfrm>
-            <a:off x="7589520" y="1810512"/>
-            <a:ext cx="2926080" cy="256032"/>
-          </a:xfrm>
-          <a:prstGeom prst="rect">
-            <a:avLst/>
-          </a:prstGeom>
-          <a:noFill/>
-          <a:ln/>
-        </p:spPr>
-        <p:txBody>
-          <a:bodyPr wrap="square" lIns="0" tIns="0" rIns="0" bIns="0" rtlCol="0" anchor="t"/>
-          <a:lstStyle/>
-          <a:p>
-            <a:pPr algn="ctr" indent="0" marL="0">
-              <a:buNone/>
-            </a:pPr>
-            <a:r>
-              <a:rPr lang="en-US" sz="1150" i="1" dirty="0">
-                <a:solidFill>
-                  <a:srgbClr val="5B6B78"/>
-                </a:solidFill>
-                <a:latin typeface="Calibri" pitchFamily="34" charset="0"/>
-                <a:ea typeface="Calibri" pitchFamily="34" charset="-122"/>
-                <a:cs typeface="Calibri" pitchFamily="34" charset="-120"/>
-              </a:rPr>
-              <a:t>higher addresses</a:t>
-            </a:r>
-            <a:endParaRPr lang="en-US" sz="1150" dirty="0"/>
-          </a:p>
-        </p:txBody>
-      </p:sp>
-      <p:sp>
-        <p:nvSpPr>
-          <p:cNvPr id="27" name="Text 25"/>
-          <p:cNvSpPr txBox="1"/>
-          <p:nvPr/>
-        </p:nvSpPr>
-        <p:spPr>
-          <a:xfrm>
-            <a:off x="7040880" y="5120640"/>
-            <a:ext cx="4754880" cy="640080"/>
-          </a:xfrm>
-          <a:prstGeom prst="rect">
-            <a:avLst/>
-          </a:prstGeom>
-          <a:noFill/>
-          <a:ln/>
-        </p:spPr>
-        <p:txBody>
-          <a:bodyPr wrap="square" lIns="0" tIns="0" rIns="0" bIns="0" rtlCol="0" anchor="t"/>
-          <a:lstStyle/>
-          <a:p>
-            <a:pPr indent="0" marL="0">
-              <a:buNone/>
-            </a:pPr>
-            <a:r>
-              <a:rPr lang="en-US" sz="1400" dirty="0">
-                <a:solidFill>
-                  <a:srgbClr val="1B2530"/>
-                </a:solidFill>
-                <a:latin typeface="Calibri" pitchFamily="34" charset="0"/>
-                <a:ea typeface="Calibri" pitchFamily="34" charset="-122"/>
-                <a:cs typeface="Calibri" pitchFamily="34" charset="-120"/>
-              </a:rPr>
-              <a:t>The stack grows downward: subtract from sp to allocate, add to release.</a:t>
-            </a:r>
-            <a:endParaRPr lang="en-US" sz="1400" dirty="0"/>
-          </a:p>
-        </p:txBody>
-      </p:sp>
-      <p:sp>
-        <p:nvSpPr>
-          <p:cNvPr id="28" name="Shape 26"/>
-          <p:cNvSpPr/>
-          <p:nvPr/>
-        </p:nvSpPr>
-        <p:spPr>
-          <a:xfrm>
-            <a:off x="7939862" y="91440"/>
-            <a:ext cx="3703193" cy="274320"/>
-          </a:xfrm>
-          <a:prstGeom prst="rect">
-            <a:avLst/>
-          </a:prstGeom>
-          <a:solidFill>
-            <a:srgbClr val="F3E8FF"/>
-          </a:solidFill>
-          <a:ln w="12700">
-            <a:solidFill>
-              <a:srgbClr val="7E22CE"/>
-            </a:solidFill>
-            <a:prstDash val="dash"/>
-          </a:ln>
-        </p:spPr>
-      </p:sp>
-      <p:sp>
-        <p:nvSpPr>
-          <p:cNvPr id="29" name="Shape 27"/>
-          <p:cNvSpPr/>
-          <p:nvPr/>
-        </p:nvSpPr>
-        <p:spPr>
-          <a:xfrm>
-            <a:off x="7967294" y="128016"/>
-            <a:ext cx="45720" cy="45720"/>
-          </a:xfrm>
-          <a:prstGeom prst="rect">
-            <a:avLst/>
-          </a:prstGeom>
-          <a:solidFill>
-            <a:srgbClr val="7E22CE"/>
-          </a:solidFill>
-          <a:ln w="12700">
-            <a:solidFill>
-              <a:srgbClr val="7E22CE"/>
-            </a:solidFill>
-            <a:prstDash val="solid"/>
-          </a:ln>
-        </p:spPr>
-      </p:sp>
-      <p:sp>
-        <p:nvSpPr>
-          <p:cNvPr id="30" name="Shape 28"/>
-          <p:cNvSpPr/>
-          <p:nvPr/>
-        </p:nvSpPr>
-        <p:spPr>
-          <a:xfrm>
-            <a:off x="7967294" y="205740"/>
-            <a:ext cx="45720" cy="45720"/>
-          </a:xfrm>
-          <a:prstGeom prst="rect">
-            <a:avLst/>
-          </a:prstGeom>
-          <a:solidFill>
-            <a:srgbClr val="7E22CE"/>
-          </a:solidFill>
-          <a:ln w="12700">
-            <a:solidFill>
-              <a:srgbClr val="7E22CE"/>
-            </a:solidFill>
-            <a:prstDash val="solid"/>
-          </a:ln>
-        </p:spPr>
-      </p:sp>
-      <p:sp>
-        <p:nvSpPr>
-          <p:cNvPr id="31" name="Shape 29"/>
-          <p:cNvSpPr/>
-          <p:nvPr/>
-        </p:nvSpPr>
-        <p:spPr>
-          <a:xfrm>
-            <a:off x="7967294" y="283464"/>
-            <a:ext cx="45720" cy="45720"/>
-          </a:xfrm>
-          <a:prstGeom prst="rect">
-            <a:avLst/>
-          </a:prstGeom>
-          <a:solidFill>
-            <a:srgbClr val="7E22CE"/>
-          </a:solidFill>
-          <a:ln w="12700">
-            <a:solidFill>
-              <a:srgbClr val="7E22CE"/>
-            </a:solidFill>
-            <a:prstDash val="solid"/>
-          </a:ln>
-        </p:spPr>
-      </p:sp>
-      <p:pic>
-        <p:nvPicPr>
-          <p:cNvPr id="32" name="Image 0" descr="preencoded.png">    </p:cNvPr>
-          <p:cNvPicPr>
-            <a:picLocks noChangeAspect="1"/>
-          </p:cNvPicPr>
-          <p:nvPr/>
-        </p:nvPicPr>
-        <p:blipFill>
-          <a:blip r:embed="rId1"/>
-          <a:stretch>
-            <a:fillRect/>
-          </a:stretch>
-        </p:blipFill>
-        <p:spPr>
-          <a:xfrm>
-            <a:off x="8067878" y="128016"/>
-            <a:ext cx="201168" cy="201168"/>
-          </a:xfrm>
-          <a:prstGeom prst="rect">
-            <a:avLst/>
-          </a:prstGeom>
-        </p:spPr>
-      </p:pic>
-      <p:sp>
-        <p:nvSpPr>
-          <p:cNvPr id="33" name="Text 30"/>
-          <p:cNvSpPr txBox="1"/>
-          <p:nvPr/>
-        </p:nvSpPr>
-        <p:spPr>
-          <a:xfrm>
-            <a:off x="8323910" y="91440"/>
-            <a:ext cx="3282569" cy="274320"/>
-          </a:xfrm>
-          <a:prstGeom prst="rect">
-            <a:avLst/>
-          </a:prstGeom>
-          <a:noFill/>
-          <a:ln/>
-        </p:spPr>
-        <p:txBody>
-          <a:bodyPr wrap="square" lIns="0" tIns="0" rIns="0" bIns="0" rtlCol="0" anchor="ctr"/>
-          <a:lstStyle/>
-          <a:p>
-            <a:pPr indent="0" marL="0">
-              <a:buNone/>
-            </a:pPr>
-            <a:r>
-              <a:rPr lang="en-US" sz="1100" b="1" dirty="0">
-                <a:solidFill>
-                  <a:srgbClr val="6B21A8"/>
-                </a:solidFill>
-                <a:latin typeface="Calibri" pitchFamily="34" charset="0"/>
-                <a:ea typeface="Calibri" pitchFamily="34" charset="-122"/>
-                <a:cs typeface="Calibri" pitchFamily="34" charset="-120"/>
-              </a:rPr>
-              <a:t>UNDERSTAND LATER</a:t>
-            </a:r>
-            <a:pPr indent="0" marL="0">
-              <a:buNone/>
-            </a:pPr>
-            <a:r>
-              <a:rPr lang="en-US" sz="1100" dirty="0">
-                <a:solidFill>
-                  <a:srgbClr val="6B21A8"/>
-                </a:solidFill>
-                <a:latin typeface="Calibri" pitchFamily="34" charset="0"/>
-                <a:ea typeface="Calibri" pitchFamily="34" charset="-122"/>
-                <a:cs typeface="Calibri" pitchFamily="34" charset="-120"/>
-              </a:rPr>
-              <a:t> · the stack</a:t>
-            </a:r>
-            <a:pPr indent="0" marL="0">
-              <a:buNone/>
-            </a:pPr>
-            <a:r>
-              <a:rPr lang="en-US" sz="1100" b="1" dirty="0">
-                <a:solidFill>
-                  <a:srgbClr val="6B21A8"/>
-                </a:solidFill>
-                <a:latin typeface="Calibri" pitchFamily="34" charset="0"/>
-                <a:ea typeface="Calibri" pitchFamily="34" charset="-122"/>
-                <a:cs typeface="Calibri" pitchFamily="34" charset="-120"/>
-              </a:rPr>
-              <a:t> → Lecture 18</a:t>
-            </a:r>
-            <a:endParaRPr lang="en-US" sz="1100" dirty="0"/>
-          </a:p>
-        </p:txBody>
-      </p:sp>
-      <p:sp>
-        <p:nvSpPr>
-          <p:cNvPr id="34" name="Shape 31"/>
-          <p:cNvSpPr/>
-          <p:nvPr/>
-        </p:nvSpPr>
-        <p:spPr>
-          <a:xfrm>
-            <a:off x="4868748" y="91440"/>
-            <a:ext cx="2961386" cy="274320"/>
-          </a:xfrm>
-          <a:prstGeom prst="rect">
-            <a:avLst/>
-          </a:prstGeom>
-          <a:solidFill>
-            <a:srgbClr val="E0F2FE"/>
-          </a:solidFill>
-          <a:ln w="12700">
-            <a:solidFill>
-              <a:srgbClr val="0369A1"/>
-            </a:solidFill>
-            <a:prstDash val="solid"/>
-          </a:ln>
-        </p:spPr>
-      </p:sp>
-      <p:sp>
-        <p:nvSpPr>
-          <p:cNvPr id="35" name="Shape 32"/>
-          <p:cNvSpPr/>
-          <p:nvPr/>
-        </p:nvSpPr>
-        <p:spPr>
-          <a:xfrm>
-            <a:off x="4868748" y="91440"/>
-            <a:ext cx="73152" cy="274320"/>
-          </a:xfrm>
-          <a:prstGeom prst="rect">
-            <a:avLst/>
-          </a:prstGeom>
-          <a:solidFill>
-            <a:srgbClr val="0369A1"/>
-          </a:solidFill>
-          <a:ln w="12700">
-            <a:solidFill>
-              <a:srgbClr val="0369A1"/>
-            </a:solidFill>
-            <a:prstDash val="solid"/>
-          </a:ln>
-        </p:spPr>
-      </p:sp>
-      <p:pic>
-        <p:nvPicPr>
-          <p:cNvPr id="36" name="Image 1" descr="preencoded.png">    </p:cNvPr>
-          <p:cNvPicPr>
-            <a:picLocks noChangeAspect="1"/>
-          </p:cNvPicPr>
-          <p:nvPr/>
-        </p:nvPicPr>
-        <p:blipFill>
-          <a:blip r:embed="rId2"/>
-          <a:stretch>
-            <a:fillRect/>
-          </a:stretch>
-        </p:blipFill>
-        <p:spPr>
-          <a:xfrm>
-            <a:off x="4996764" y="128016"/>
-            <a:ext cx="201168" cy="201168"/>
-          </a:xfrm>
-          <a:prstGeom prst="rect">
-            <a:avLst/>
-          </a:prstGeom>
-        </p:spPr>
-      </p:pic>
-      <p:sp>
-        <p:nvSpPr>
-          <p:cNvPr id="37" name="Text 33"/>
-          <p:cNvSpPr txBox="1"/>
-          <p:nvPr/>
-        </p:nvSpPr>
-        <p:spPr>
-          <a:xfrm>
-            <a:off x="5252796" y="91440"/>
-            <a:ext cx="2540762" cy="274320"/>
-          </a:xfrm>
-          <a:prstGeom prst="rect">
-            <a:avLst/>
-          </a:prstGeom>
-          <a:noFill/>
-          <a:ln/>
-        </p:spPr>
-        <p:txBody>
-          <a:bodyPr wrap="square" lIns="0" tIns="0" rIns="0" bIns="0" rtlCol="0" anchor="ctr"/>
-          <a:lstStyle/>
-          <a:p>
-            <a:pPr indent="0" marL="0">
-              <a:buNone/>
-            </a:pPr>
-            <a:r>
-              <a:rPr lang="en-US" sz="1100" b="1" dirty="0">
-                <a:solidFill>
-                  <a:srgbClr val="075985"/>
-                </a:solidFill>
-                <a:latin typeface="Calibri" pitchFamily="34" charset="0"/>
-                <a:ea typeface="Calibri" pitchFamily="34" charset="-122"/>
-                <a:cs typeface="Calibri" pitchFamily="34" charset="-120"/>
-              </a:rPr>
-              <a:t>UNDERSTAND NOW</a:t>
-            </a:r>
-            <a:pPr indent="0" marL="0">
-              <a:buNone/>
-            </a:pPr>
-            <a:r>
-              <a:rPr lang="en-US" sz="1100" dirty="0">
-                <a:solidFill>
-                  <a:srgbClr val="075985"/>
-                </a:solidFill>
-                <a:latin typeface="Calibri" pitchFamily="34" charset="0"/>
-                <a:ea typeface="Calibri" pitchFamily="34" charset="-122"/>
-                <a:cs typeface="Calibri" pitchFamily="34" charset="-120"/>
-              </a:rPr>
-              <a:t> · why ra is saved</a:t>
             </a:r>
             <a:endParaRPr lang="en-US" sz="1100" dirty="0"/>
           </a:p>
